--- a/presentation/GLYCOTWIN_PRESENTATION.pptx
+++ b/presentation/GLYCOTWIN_PRESENTATION.pptx
@@ -3678,7 +3678,7 @@
               </a:defRPr>
             </a:pPr>
             <a:r>
-              <a:t>Thank You • Happiest Health Summit 2026 Bengaluru  |  Slide 10 of 10</a:t>
+              <a:t>Happiest Health Summit 2026 • Bengaluru  |  Slide 10 of 10</a:t>
             </a:r>
           </a:p>
         </p:txBody>
@@ -3988,7 +3988,7 @@
               </a:defRPr>
             </a:pPr>
             <a:r>
-              <a:t>Clinical Background • Slide 2 of 10  |  Slide 2 of 10</a:t>
+              <a:t>Clinical Background &amp; Context  |  Slide 2 of 10</a:t>
             </a:r>
           </a:p>
         </p:txBody>
@@ -4266,7 +4266,7 @@
               </a:defRPr>
             </a:pPr>
             <a:r>
-              <a:t>Data Architecture • Slide 3 of 10  |  Slide 3 of 10</a:t>
+              <a:t>Data Architecture &amp; Privacy  |  Slide 3 of 10</a:t>
             </a:r>
           </a:p>
         </p:txBody>
@@ -4608,7 +4608,7 @@
               </a:defRPr>
             </a:pPr>
             <a:r>
-              <a:t>Model Evaluation • Slide 4 of 10  |  Slide 4 of 10</a:t>
+              <a:t>Model Evaluation &amp; Benchmarking  |  Slide 4 of 10</a:t>
             </a:r>
           </a:p>
         </p:txBody>
@@ -4828,13 +4828,13 @@
               </a:spcAft>
               <a:defRPr sz="1300">
                 <a:solidFill>
-                  <a:srgbClr val="FDE68A"/>
-                </a:solidFill>
-                <a:latin typeface="Arial"/>
-              </a:defRPr>
-            </a:pPr>
-            <a:r>
-              <a:t>   1. Post-Prandial Brisk Walk (0 to 45 mins): Simulates muscular GLUT-4 glucose clearance.</a:t>
+                  <a:srgbClr val="94A3B8"/>
+                </a:solidFill>
+                <a:latin typeface="Arial"/>
+              </a:defRPr>
+            </a:pPr>
+            <a:r>
+              <a:t>   • Post-Prandial Brisk Walk (0 to 45 mins): Simulates muscular GLUT-4 glucose clearance.</a:t>
             </a:r>
           </a:p>
           <a:p>
@@ -4844,13 +4844,13 @@
               </a:spcAft>
               <a:defRPr sz="1300">
                 <a:solidFill>
-                  <a:srgbClr val="FDE68A"/>
-                </a:solidFill>
-                <a:latin typeface="Arial"/>
-              </a:defRPr>
-            </a:pPr>
-            <a:r>
-              <a:t>   2. Indian Carb Swap / Reduction (0 to 60g): Models switching white rice to millets/proteins.</a:t>
+                  <a:srgbClr val="94A3B8"/>
+                </a:solidFill>
+                <a:latin typeface="Arial"/>
+              </a:defRPr>
+            </a:pPr>
+            <a:r>
+              <a:t>   • Indian Carb Swap / Reduction (0 to 60g): Models switching white rice to millets/proteins.</a:t>
             </a:r>
           </a:p>
           <a:p>
@@ -4860,13 +4860,13 @@
               </a:spcAft>
               <a:defRPr sz="1300">
                 <a:solidFill>
-                  <a:srgbClr val="FDE68A"/>
-                </a:solidFill>
-                <a:latin typeface="Arial"/>
-              </a:defRPr>
-            </a:pPr>
-            <a:r>
-              <a:t>   3. Medication Adjustment (-4U to +4U): Titrates basal insulin or shifts sulfonylurea timing.</a:t>
+                  <a:srgbClr val="94A3B8"/>
+                </a:solidFill>
+                <a:latin typeface="Arial"/>
+              </a:defRPr>
+            </a:pPr>
+            <a:r>
+              <a:t>   • Medication Adjustment (-4U to +4U): Titrates basal insulin or shifts sulfonylurea timing.</a:t>
             </a:r>
           </a:p>
           <a:p>
@@ -4918,7 +4918,7 @@
               </a:defRPr>
             </a:pPr>
             <a:r>
-              <a:t>Counterfactual Simulation • Slide 5 of 10  |  Slide 5 of 10</a:t>
+              <a:t>In-Silico Counterfactual Simulation  |  Slide 5 of 10</a:t>
             </a:r>
           </a:p>
         </p:txBody>
@@ -5228,7 +5228,7 @@
               </a:defRPr>
             </a:pPr>
             <a:r>
-              <a:t>User Interface &amp; Experience • Slide 6 of 10  |  Slide 6 of 10</a:t>
+              <a:t>User Interface &amp; Cockpit  |  Slide 6 of 10</a:t>
             </a:r>
           </a:p>
         </p:txBody>
@@ -5570,7 +5570,7 @@
               </a:defRPr>
             </a:pPr>
             <a:r>
-              <a:t>Clinical Validation • Slide 7 of 10  |  Slide 7 of 10</a:t>
+              <a:t>Clinical Scenarios &amp; Persona Validation  |  Slide 7 of 10</a:t>
             </a:r>
           </a:p>
         </p:txBody>
@@ -5864,7 +5864,7 @@
               </a:defRPr>
             </a:pPr>
             <a:r>
-              <a:t>Regulatory Compliance • Slide 8 of 10  |  Slide 8 of 10</a:t>
+              <a:t>Regulatory Compliance &amp; Sandbox Rules  |  Slide 8 of 10</a:t>
             </a:r>
           </a:p>
         </p:txBody>
@@ -6190,7 +6190,7 @@
               </a:defRPr>
             </a:pPr>
             <a:r>
-              <a:t>Deployment Roadmap • Slide 9 of 10  |  Slide 9 of 10</a:t>
+              <a:t>Impact &amp; Deployment Roadmap  |  Slide 9 of 10</a:t>
             </a:r>
           </a:p>
         </p:txBody>

--- a/presentation/GLYCOTWIN_PRESENTATION.pptx
+++ b/presentation/GLYCOTWIN_PRESENTATION.pptx
@@ -3112,7 +3112,7 @@
             <a:avLst/>
           </a:prstGeom>
           <a:solidFill>
-            <a:srgbClr val="0B1120"/>
+            <a:srgbClr val="0B132B"/>
           </a:solidFill>
           <a:ln>
             <a:noFill/>
@@ -3148,18 +3148,18 @@
         </p:nvSpPr>
         <p:spPr>
           <a:xfrm>
-            <a:off x="548640" y="1188720"/>
-            <a:ext cx="11094415" cy="4937760"/>
+            <a:off x="822960" y="914400"/>
+            <a:ext cx="10545775" cy="5029200"/>
           </a:xfrm>
           <a:prstGeom prst="roundRect">
             <a:avLst/>
           </a:prstGeom>
           <a:solidFill>
-            <a:srgbClr val="1E293B"/>
+            <a:srgbClr val="1C2541"/>
           </a:solidFill>
           <a:ln w="19050">
             <a:solidFill>
-              <a:srgbClr val="334155"/>
+              <a:srgbClr val="48CAE4"/>
             </a:solidFill>
           </a:ln>
         </p:spPr>
@@ -3193,8 +3193,8 @@
         </p:nvSpPr>
         <p:spPr>
           <a:xfrm>
-            <a:off x="548640" y="228600"/>
-            <a:ext cx="11094415" cy="914400"/>
+            <a:off x="1280160" y="1280160"/>
+            <a:ext cx="9601200" cy="4297680"/>
           </a:xfrm>
           <a:prstGeom prst="rect">
             <a:avLst/>
@@ -3202,173 +3202,85 @@
           <a:noFill/>
         </p:spPr>
         <p:txBody>
-          <a:bodyPr wrap="square" lIns="0" tIns="0" rIns="0" bIns="0">
+          <a:bodyPr wrap="square">
             <a:spAutoFit/>
           </a:bodyPr>
           <a:lstStyle/>
           <a:p>
             <a:pPr>
-              <a:defRPr sz="2100" b="1">
-                <a:solidFill>
-                  <a:srgbClr val="38BDF8"/>
+              <a:spcAft>
+                <a:spcPts val="1400"/>
+              </a:spcAft>
+              <a:defRPr sz="1300" b="1">
+                <a:solidFill>
+                  <a:srgbClr val="48CAE4"/>
                 </a:solidFill>
                 <a:latin typeface="Arial"/>
               </a:defRPr>
             </a:pPr>
             <a:r>
-              <a:t>GlycoTwin-AI: Multimodal Digital Twin for Proactive Diabetes Management</a:t>
-            </a:r>
-          </a:p>
-          <a:p>
-            <a:pPr>
-              <a:defRPr sz="1200">
-                <a:solidFill>
-                  <a:srgbClr val="94A3B8"/>
+              <a:t>HAPPIEST HEALTH REIMAGINING &amp; REFORMING HEALTHCARE IN INDIA SUMMIT 2026, BENGALURU</a:t>
+            </a:r>
+          </a:p>
+          <a:p>
+            <a:pPr>
+              <a:spcAft>
+                <a:spcPts val="800"/>
+              </a:spcAft>
+              <a:defRPr sz="3800" b="1">
+                <a:solidFill>
+                  <a:srgbClr val="FFFFFF"/>
                 </a:solidFill>
                 <a:latin typeface="Arial"/>
               </a:defRPr>
             </a:pPr>
             <a:r>
-              <a:t>Happiest Health Reimagining &amp; Reforming Healthcare in India Summit 2026, Bengaluru</a:t>
-            </a:r>
-          </a:p>
-        </p:txBody>
-      </p:sp>
-      <p:sp>
-        <p:nvSpPr>
-          <p:cNvPr id="5" name="TextBox 4"/>
-          <p:cNvSpPr txBox="1"/>
-          <p:nvPr/>
-        </p:nvSpPr>
-        <p:spPr>
-          <a:xfrm>
-            <a:off x="822960" y="1371600"/>
-            <a:ext cx="10515600" cy="4480560"/>
-          </a:xfrm>
-          <a:prstGeom prst="rect">
-            <a:avLst/>
-          </a:prstGeom>
-          <a:noFill/>
-        </p:spPr>
-        <p:txBody>
-          <a:bodyPr wrap="square" lIns="0" tIns="0" rIns="0" bIns="0">
-            <a:spAutoFit/>
-          </a:bodyPr>
-          <a:lstStyle/>
+              <a:t>GlycoTwin-AI</a:t>
+            </a:r>
+          </a:p>
           <a:p>
             <a:pPr>
               <a:spcAft>
-                <a:spcPts val="1000"/>
+                <a:spcPts val="1800"/>
+              </a:spcAft>
+              <a:defRPr sz="1800" b="1">
+                <a:solidFill>
+                  <a:srgbClr val="FFD166"/>
+                </a:solidFill>
+                <a:latin typeface="Arial"/>
+              </a:defRPr>
+            </a:pPr>
+            <a:r>
+              <a:t>Multimodal Healthcare Digital Twin for Proactive Type 2 Diabetes Management in India</a:t>
+            </a:r>
+          </a:p>
+          <a:p>
+            <a:pPr>
+              <a:spcAft>
+                <a:spcPts val="2400"/>
               </a:spcAft>
               <a:defRPr sz="1350">
                 <a:solidFill>
-                  <a:srgbClr val="F1F5F9"/>
+                  <a:srgbClr val="8D99AE"/>
                 </a:solidFill>
                 <a:latin typeface="Arial"/>
               </a:defRPr>
             </a:pPr>
             <a:r>
-              <a:t>Track: Digital Twin Proof-of-Concept (PoC) Challenge</a:t>
-            </a:r>
-          </a:p>
-          <a:p>
-            <a:pPr>
-              <a:spcAft>
-                <a:spcPts val="1000"/>
-              </a:spcAft>
-              <a:defRPr sz="1350">
-                <a:solidFill>
-                  <a:srgbClr val="F1F5F9"/>
+              <a:t>A dynamic virtual physiological replica fusing static EHR with continuous wearable IoT telemetry (CGM + PPG) to predict acute dysglycemic adverse events 2 hours in advance and simulate personalized interventions in-silico.</a:t>
+            </a:r>
+          </a:p>
+          <a:p>
+            <a:pPr>
+              <a:defRPr sz="1200" b="1">
+                <a:solidFill>
+                  <a:srgbClr val="06D6A0"/>
                 </a:solidFill>
                 <a:latin typeface="Arial"/>
               </a:defRPr>
             </a:pPr>
             <a:r>
-              <a:t>Focus Condition: Type 2 Diabetes Mellitus &amp; Postprandial/Nocturnal Dysglycemia</a:t>
-            </a:r>
-          </a:p>
-          <a:p>
-            <a:pPr>
-              <a:spcAft>
-                <a:spcPts val="1000"/>
-              </a:spcAft>
-              <a:defRPr sz="1350">
-                <a:solidFill>
-                  <a:srgbClr val="F1F5F9"/>
-                </a:solidFill>
-                <a:latin typeface="Arial"/>
-              </a:defRPr>
-            </a:pPr>
-            <a:r>
-              <a:t>Target Population: Asian Indian Phenotype (&gt;101M Diabetics, high carb staple diets)</a:t>
-            </a:r>
-          </a:p>
-          <a:p>
-            <a:pPr>
-              <a:spcAft>
-                <a:spcPts val="1000"/>
-              </a:spcAft>
-              <a:defRPr sz="1350">
-                <a:solidFill>
-                  <a:srgbClr val="F1F5F9"/>
-                </a:solidFill>
-                <a:latin typeface="Arial"/>
-              </a:defRPr>
-            </a:pPr>
-            <a:r>
-              <a:t>Core Innovation: In-silico physiological twin fusing static EHR with wearable CGM/PPG</a:t>
-            </a:r>
-          </a:p>
-          <a:p>
-            <a:pPr>
-              <a:spcAft>
-                <a:spcPts val="1000"/>
-              </a:spcAft>
-              <a:defRPr sz="1350">
-                <a:solidFill>
-                  <a:srgbClr val="F1F5F9"/>
-                </a:solidFill>
-                <a:latin typeface="Arial"/>
-              </a:defRPr>
-            </a:pPr>
-            <a:r>
-              <a:t>Key Capability: 2-Hour ahead adverse event prediction &amp; What-If counterfactual simulation</a:t>
-            </a:r>
-          </a:p>
-        </p:txBody>
-      </p:sp>
-      <p:sp>
-        <p:nvSpPr>
-          <p:cNvPr id="6" name="TextBox 5"/>
-          <p:cNvSpPr txBox="1"/>
-          <p:nvPr/>
-        </p:nvSpPr>
-        <p:spPr>
-          <a:xfrm>
-            <a:off x="548640" y="6263640"/>
-            <a:ext cx="11094415" cy="365760"/>
-          </a:xfrm>
-          <a:prstGeom prst="rect">
-            <a:avLst/>
-          </a:prstGeom>
-          <a:noFill/>
-        </p:spPr>
-        <p:txBody>
-          <a:bodyPr wrap="square" lIns="0" tIns="0" rIns="0" bIns="0">
-            <a:spAutoFit/>
-          </a:bodyPr>
-          <a:lstStyle/>
-          <a:p>
-            <a:pPr>
-              <a:defRPr sz="1000">
-                <a:solidFill>
-                  <a:srgbClr val="94A3B8"/>
-                </a:solidFill>
-                <a:latin typeface="Arial"/>
-              </a:defRPr>
-            </a:pPr>
-            <a:r>
-              <a:t>Team GlycoTwin India • Center for Healthcare AI &amp; Innovation  |  Slide 1 of 10</a:t>
+              <a:t>Track: Digital Twin PoC Challenge  |  Team GlycoTwin India  |  Center for Healthcare AI &amp; Innovation</a:t>
             </a:r>
           </a:p>
         </p:txBody>
@@ -3406,7 +3318,7 @@
             <a:avLst/>
           </a:prstGeom>
           <a:solidFill>
-            <a:srgbClr val="0B1120"/>
+            <a:srgbClr val="0B132B"/>
           </a:solidFill>
           <a:ln>
             <a:noFill/>
@@ -3442,19 +3354,17 @@
         </p:nvSpPr>
         <p:spPr>
           <a:xfrm>
-            <a:off x="548640" y="1188720"/>
-            <a:ext cx="11094415" cy="4937760"/>
+            <a:off x="731520" y="365760"/>
+            <a:ext cx="4059935" cy="329184"/>
           </a:xfrm>
           <a:prstGeom prst="roundRect">
             <a:avLst/>
           </a:prstGeom>
           <a:solidFill>
-            <a:srgbClr val="1E293B"/>
+            <a:srgbClr val="3A506B"/>
           </a:solidFill>
-          <a:ln w="19050">
-            <a:solidFill>
-              <a:srgbClr val="334155"/>
-            </a:solidFill>
+          <a:ln>
+            <a:noFill/>
           </a:ln>
         </p:spPr>
         <p:style>
@@ -3472,10 +3382,20 @@
           </a:fontRef>
         </p:style>
         <p:txBody>
-          <a:bodyPr rtlCol="0" anchor="ctr"/>
-          <a:lstStyle/>
-          <a:p>
-            <a:pPr algn="ctr"/>
+          <a:bodyPr rtlCol="0" anchor="ctr" wrap="none"/>
+          <a:lstStyle/>
+          <a:p>
+            <a:pPr algn="ctr">
+              <a:defRPr sz="1050" b="1">
+                <a:solidFill>
+                  <a:srgbClr val="48CAE4"/>
+                </a:solidFill>
+                <a:latin typeface="Arial"/>
+              </a:defRPr>
+            </a:pPr>
+            <a:r>
+              <a:t>SUMMIT SUMMARY &amp; OPEN SOURCE CODEBASE</a:t>
+            </a:r>
           </a:p>
         </p:txBody>
       </p:sp>
@@ -3487,8 +3407,8 @@
         </p:nvSpPr>
         <p:spPr>
           <a:xfrm>
-            <a:off x="548640" y="228600"/>
-            <a:ext cx="11094415" cy="914400"/>
+            <a:off x="731520" y="749808"/>
+            <a:ext cx="10698480" cy="685800"/>
           </a:xfrm>
           <a:prstGeom prst="rect">
             <a:avLst/>
@@ -3496,34 +3416,21 @@
           <a:noFill/>
         </p:spPr>
         <p:txBody>
-          <a:bodyPr wrap="square" lIns="0" tIns="0" rIns="0" bIns="0">
+          <a:bodyPr wrap="square">
             <a:spAutoFit/>
           </a:bodyPr>
           <a:lstStyle/>
           <a:p>
             <a:pPr>
-              <a:defRPr sz="2100" b="1">
-                <a:solidFill>
-                  <a:srgbClr val="38BDF8"/>
+              <a:defRPr sz="2300" b="1">
+                <a:solidFill>
+                  <a:srgbClr val="FFFFFF"/>
                 </a:solidFill>
                 <a:latin typeface="Arial"/>
               </a:defRPr>
             </a:pPr>
             <a:r>
-              <a:t>Conclusion &amp; Competitive Summary</a:t>
-            </a:r>
-          </a:p>
-          <a:p>
-            <a:pPr>
-              <a:defRPr sz="1200">
-                <a:solidFill>
-                  <a:srgbClr val="94A3B8"/>
-                </a:solidFill>
-                <a:latin typeface="Arial"/>
-              </a:defRPr>
-            </a:pPr>
-            <a:r>
-              <a:t>Happiest Health Reimagining and Reforming Healthcare Summit 2026</a:t>
+              <a:t>Conclusion: Reimagining Healthcare in India 2026</a:t>
             </a:r>
           </a:p>
         </p:txBody>
@@ -3536,8 +3443,8 @@
         </p:nvSpPr>
         <p:spPr>
           <a:xfrm>
-            <a:off x="822960" y="1371600"/>
-            <a:ext cx="10515600" cy="4480560"/>
+            <a:off x="731520" y="6309360"/>
+            <a:ext cx="10698480" cy="320040"/>
           </a:xfrm>
           <a:prstGeom prst="rect">
             <a:avLst/>
@@ -3545,118 +3452,80 @@
           <a:noFill/>
         </p:spPr>
         <p:txBody>
-          <a:bodyPr wrap="square" lIns="0" tIns="0" rIns="0" bIns="0">
+          <a:bodyPr wrap="square">
             <a:spAutoFit/>
           </a:bodyPr>
           <a:lstStyle/>
           <a:p>
             <a:pPr>
-              <a:spcAft>
-                <a:spcPts val="1000"/>
-              </a:spcAft>
-              <a:defRPr sz="1350">
-                <a:solidFill>
-                  <a:srgbClr val="F1F5F9"/>
+              <a:defRPr sz="1000">
+                <a:solidFill>
+                  <a:srgbClr val="8D99AE"/>
                 </a:solidFill>
                 <a:latin typeface="Arial"/>
               </a:defRPr>
             </a:pPr>
             <a:r>
-              <a:t>Accomplished: Selected #1 Indian healthcare priority (Type 2 Diabetes) &amp; delivered an end-to-end Digital Twin.</a:t>
-            </a:r>
-          </a:p>
-          <a:p>
-            <a:pPr>
-              <a:spcAft>
-                <a:spcPts val="1000"/>
-              </a:spcAft>
-              <a:defRPr sz="1350">
-                <a:solidFill>
-                  <a:srgbClr val="F1F5F9"/>
-                </a:solidFill>
-                <a:latin typeface="Arial"/>
-              </a:defRPr>
-            </a:pPr>
-            <a:r>
-              <a:t>Dual Data Fusion: Seamlessly unites static clinical EHR with high-resolution wearable telemetry.</a:t>
-            </a:r>
-          </a:p>
-          <a:p>
-            <a:pPr>
-              <a:spcAft>
-                <a:spcPts val="1000"/>
-              </a:spcAft>
-              <a:defRPr sz="1350">
-                <a:solidFill>
-                  <a:srgbClr val="F1F5F9"/>
-                </a:solidFill>
-                <a:latin typeface="Arial"/>
-              </a:defRPr>
-            </a:pPr>
-            <a:r>
-              <a:t>Clinical Grade Accuracy: 7.15% MARD and 120-minute lead time on acute dysglycemic adverse events.</a:t>
-            </a:r>
-          </a:p>
-          <a:p>
-            <a:pPr>
-              <a:spcAft>
-                <a:spcPts val="1000"/>
-              </a:spcAft>
-              <a:defRPr sz="1350">
-                <a:solidFill>
-                  <a:srgbClr val="F1F5F9"/>
-                </a:solidFill>
-                <a:latin typeface="Arial"/>
-              </a:defRPr>
-            </a:pPr>
-            <a:r>
-              <a:t>Doctor-Centric Innovation: In-silico 'What-If' counterfactual engine transforms reactive care into proactive prevention.</a:t>
-            </a:r>
-          </a:p>
-          <a:p>
-            <a:pPr>
-              <a:spcAft>
-                <a:spcPts val="1000"/>
-              </a:spcAft>
-              <a:defRPr sz="1350">
-                <a:solidFill>
-                  <a:srgbClr val="F1F5F9"/>
-                </a:solidFill>
-                <a:latin typeface="Arial"/>
-              </a:defRPr>
-            </a:pPr>
-            <a:r>
-              <a:t>Deliverables: Complete open-source codebase (MIT), interactive UI, architecture diagrams, and 20-min demo video.</a:t>
-            </a:r>
-          </a:p>
-          <a:p>
-            <a:pPr>
-              <a:spcAft>
-                <a:spcPts val="1000"/>
-              </a:spcAft>
-              <a:defRPr sz="1350">
-                <a:solidFill>
-                  <a:srgbClr val="F1F5F9"/>
-                </a:solidFill>
-                <a:latin typeface="Arial"/>
-              </a:defRPr>
-            </a:pPr>
-            <a:r>
-              <a:t>Vision: Building the proactive foundation for Indian digital healthcare.</a:t>
-            </a:r>
-          </a:p>
-        </p:txBody>
-      </p:sp>
-      <p:sp>
-        <p:nvSpPr>
-          <p:cNvPr id="6" name="TextBox 5"/>
+              <a:t>GlycoTwin-AI  |  Happiest Health Summit 2026, Bengaluru  |  Slide 10 of 10</a:t>
+            </a:r>
+          </a:p>
+        </p:txBody>
+      </p:sp>
+      <p:sp>
+        <p:nvSpPr>
+          <p:cNvPr id="6" name="Rounded Rectangle 5"/>
+          <p:cNvSpPr/>
+          <p:nvPr/>
+        </p:nvSpPr>
+        <p:spPr>
+          <a:xfrm>
+            <a:off x="731520" y="1554480"/>
+            <a:ext cx="3337560" cy="4572000"/>
+          </a:xfrm>
+          <a:prstGeom prst="roundRect">
+            <a:avLst/>
+          </a:prstGeom>
+          <a:solidFill>
+            <a:srgbClr val="1C2541"/>
+          </a:solidFill>
+          <a:ln w="19050">
+            <a:solidFill>
+              <a:srgbClr val="3A506B"/>
+            </a:solidFill>
+          </a:ln>
+        </p:spPr>
+        <p:style>
+          <a:lnRef idx="1">
+            <a:schemeClr val="accent1"/>
+          </a:lnRef>
+          <a:fillRef idx="3">
+            <a:schemeClr val="accent1"/>
+          </a:fillRef>
+          <a:effectRef idx="2">
+            <a:schemeClr val="accent1"/>
+          </a:effectRef>
+          <a:fontRef idx="minor">
+            <a:schemeClr val="lt1"/>
+          </a:fontRef>
+        </p:style>
+        <p:txBody>
+          <a:bodyPr rtlCol="0" anchor="ctr"/>
+          <a:lstStyle/>
+          <a:p>
+            <a:pPr algn="ctr"/>
+          </a:p>
+        </p:txBody>
+      </p:sp>
+      <p:sp>
+        <p:nvSpPr>
+          <p:cNvPr id="7" name="TextBox 6"/>
           <p:cNvSpPr txBox="1"/>
           <p:nvPr/>
         </p:nvSpPr>
         <p:spPr>
           <a:xfrm>
-            <a:off x="548640" y="6263640"/>
-            <a:ext cx="11094415" cy="365760"/>
+            <a:off x="960120" y="1719072"/>
+            <a:ext cx="2880360" cy="438912"/>
           </a:xfrm>
           <a:prstGeom prst="rect">
             <a:avLst/>
@@ -3664,21 +3533,477 @@
           <a:noFill/>
         </p:spPr>
         <p:txBody>
-          <a:bodyPr wrap="square" lIns="0" tIns="0" rIns="0" bIns="0">
+          <a:bodyPr wrap="square">
             <a:spAutoFit/>
           </a:bodyPr>
           <a:lstStyle/>
           <a:p>
             <a:pPr>
-              <a:defRPr sz="1000">
-                <a:solidFill>
-                  <a:srgbClr val="94A3B8"/>
+              <a:defRPr sz="1550" b="1">
+                <a:solidFill>
+                  <a:srgbClr val="48CAE4"/>
                 </a:solidFill>
                 <a:latin typeface="Arial"/>
               </a:defRPr>
             </a:pPr>
             <a:r>
-              <a:t>Happiest Health Summit 2026 • Bengaluru  |  Slide 10 of 10</a:t>
+              <a:t>Key Breakthroughs</a:t>
+            </a:r>
+          </a:p>
+        </p:txBody>
+      </p:sp>
+      <p:sp>
+        <p:nvSpPr>
+          <p:cNvPr id="8" name="TextBox 7"/>
+          <p:cNvSpPr txBox="1"/>
+          <p:nvPr/>
+        </p:nvSpPr>
+        <p:spPr>
+          <a:xfrm>
+            <a:off x="914400" y="2148840"/>
+            <a:ext cx="2971800" cy="3749039"/>
+          </a:xfrm>
+          <a:prstGeom prst="rect">
+            <a:avLst/>
+          </a:prstGeom>
+          <a:noFill/>
+        </p:spPr>
+        <p:txBody>
+          <a:bodyPr wrap="square">
+            <a:spAutoFit/>
+          </a:bodyPr>
+          <a:lstStyle/>
+          <a:p>
+            <a:pPr>
+              <a:spcAft>
+                <a:spcPts val="800"/>
+              </a:spcAft>
+            </a:pPr>
+            <a:r>
+              <a:rPr b="1" sz="1150">
+                <a:solidFill>
+                  <a:srgbClr val="48CAE4"/>
+                </a:solidFill>
+                <a:latin typeface="Arial"/>
+              </a:rPr>
+              <a:t>• Priority Condition Solved: </a:t>
+            </a:r>
+            <a:r>
+              <a:rPr sz="1150">
+                <a:solidFill>
+                  <a:srgbClr val="FFFFFF"/>
+                </a:solidFill>
+                <a:latin typeface="Arial"/>
+              </a:rPr>
+              <a:t>End-to-end Digital Twin for Type 2 Diabetes in Asian Indian cohorts.</a:t>
+            </a:r>
+          </a:p>
+          <a:p>
+            <a:pPr>
+              <a:spcAft>
+                <a:spcPts val="800"/>
+              </a:spcAft>
+            </a:pPr>
+            <a:r>
+              <a:rPr b="1" sz="1150">
+                <a:solidFill>
+                  <a:srgbClr val="48CAE4"/>
+                </a:solidFill>
+                <a:latin typeface="Arial"/>
+              </a:rPr>
+              <a:t>• Dual Stream Fusion: </a:t>
+            </a:r>
+            <a:r>
+              <a:rPr sz="1150">
+                <a:solidFill>
+                  <a:srgbClr val="FFFFFF"/>
+                </a:solidFill>
+                <a:latin typeface="Arial"/>
+              </a:rPr>
+              <a:t>Seamlessly unites static EHR with continuous wearable IoT telemetry.</a:t>
+            </a:r>
+          </a:p>
+          <a:p>
+            <a:pPr>
+              <a:spcAft>
+                <a:spcPts val="800"/>
+              </a:spcAft>
+            </a:pPr>
+            <a:r>
+              <a:rPr b="1" sz="1150">
+                <a:solidFill>
+                  <a:srgbClr val="48CAE4"/>
+                </a:solidFill>
+                <a:latin typeface="Arial"/>
+              </a:rPr>
+              <a:t>• Clinical Accuracy: </a:t>
+            </a:r>
+            <a:r>
+              <a:rPr sz="1150">
+                <a:solidFill>
+                  <a:srgbClr val="FFFFFF"/>
+                </a:solidFill>
+                <a:latin typeface="Arial"/>
+              </a:rPr>
+              <a:t>7.15% MARD, 14.50 mg/dL RMSE, and 120-minute early warning.</a:t>
+            </a:r>
+          </a:p>
+        </p:txBody>
+      </p:sp>
+      <p:sp>
+        <p:nvSpPr>
+          <p:cNvPr id="9" name="Rounded Rectangle 8"/>
+          <p:cNvSpPr/>
+          <p:nvPr/>
+        </p:nvSpPr>
+        <p:spPr>
+          <a:xfrm>
+            <a:off x="4389120" y="1554480"/>
+            <a:ext cx="3337560" cy="4572000"/>
+          </a:xfrm>
+          <a:prstGeom prst="roundRect">
+            <a:avLst/>
+          </a:prstGeom>
+          <a:solidFill>
+            <a:srgbClr val="1C2541"/>
+          </a:solidFill>
+          <a:ln w="19050">
+            <a:solidFill>
+              <a:srgbClr val="3A506B"/>
+            </a:solidFill>
+          </a:ln>
+        </p:spPr>
+        <p:style>
+          <a:lnRef idx="1">
+            <a:schemeClr val="accent1"/>
+          </a:lnRef>
+          <a:fillRef idx="3">
+            <a:schemeClr val="accent1"/>
+          </a:fillRef>
+          <a:effectRef idx="2">
+            <a:schemeClr val="accent1"/>
+          </a:effectRef>
+          <a:fontRef idx="minor">
+            <a:schemeClr val="lt1"/>
+          </a:fontRef>
+        </p:style>
+        <p:txBody>
+          <a:bodyPr rtlCol="0" anchor="ctr"/>
+          <a:lstStyle/>
+          <a:p>
+            <a:pPr algn="ctr"/>
+          </a:p>
+        </p:txBody>
+      </p:sp>
+      <p:sp>
+        <p:nvSpPr>
+          <p:cNvPr id="10" name="TextBox 9"/>
+          <p:cNvSpPr txBox="1"/>
+          <p:nvPr/>
+        </p:nvSpPr>
+        <p:spPr>
+          <a:xfrm>
+            <a:off x="4617720" y="1719072"/>
+            <a:ext cx="2880360" cy="438912"/>
+          </a:xfrm>
+          <a:prstGeom prst="rect">
+            <a:avLst/>
+          </a:prstGeom>
+          <a:noFill/>
+        </p:spPr>
+        <p:txBody>
+          <a:bodyPr wrap="square">
+            <a:spAutoFit/>
+          </a:bodyPr>
+          <a:lstStyle/>
+          <a:p>
+            <a:pPr>
+              <a:defRPr sz="1550" b="1">
+                <a:solidFill>
+                  <a:srgbClr val="FFD166"/>
+                </a:solidFill>
+                <a:latin typeface="Arial"/>
+              </a:defRPr>
+            </a:pPr>
+            <a:r>
+              <a:t>Proactive Innovation</a:t>
+            </a:r>
+          </a:p>
+        </p:txBody>
+      </p:sp>
+      <p:sp>
+        <p:nvSpPr>
+          <p:cNvPr id="11" name="TextBox 10"/>
+          <p:cNvSpPr txBox="1"/>
+          <p:nvPr/>
+        </p:nvSpPr>
+        <p:spPr>
+          <a:xfrm>
+            <a:off x="4572000" y="2148840"/>
+            <a:ext cx="2971800" cy="3749039"/>
+          </a:xfrm>
+          <a:prstGeom prst="rect">
+            <a:avLst/>
+          </a:prstGeom>
+          <a:noFill/>
+        </p:spPr>
+        <p:txBody>
+          <a:bodyPr wrap="square">
+            <a:spAutoFit/>
+          </a:bodyPr>
+          <a:lstStyle/>
+          <a:p>
+            <a:pPr>
+              <a:spcAft>
+                <a:spcPts val="800"/>
+              </a:spcAft>
+            </a:pPr>
+            <a:r>
+              <a:rPr b="1" sz="1150">
+                <a:solidFill>
+                  <a:srgbClr val="FFD166"/>
+                </a:solidFill>
+                <a:latin typeface="Arial"/>
+              </a:rPr>
+              <a:t>• In-Silico What-If Engine: </a:t>
+            </a:r>
+            <a:r>
+              <a:rPr sz="1150">
+                <a:solidFill>
+                  <a:srgbClr val="FFFFFF"/>
+                </a:solidFill>
+                <a:latin typeface="Arial"/>
+              </a:rPr>
+              <a:t>Real-time simulation of walking, carb swaps, and insulin titration.</a:t>
+            </a:r>
+          </a:p>
+          <a:p>
+            <a:pPr>
+              <a:spcAft>
+                <a:spcPts val="800"/>
+              </a:spcAft>
+            </a:pPr>
+            <a:r>
+              <a:rPr b="1" sz="1150">
+                <a:solidFill>
+                  <a:srgbClr val="FFD166"/>
+                </a:solidFill>
+                <a:latin typeface="Arial"/>
+              </a:rPr>
+              <a:t>• Doctor UI Cockpit: </a:t>
+            </a:r>
+            <a:r>
+              <a:rPr sz="1150">
+                <a:solidFill>
+                  <a:srgbClr val="FFFFFF"/>
+                </a:solidFill>
+                <a:latin typeface="Arial"/>
+              </a:rPr>
+              <a:t>Production-ready web app with automated AI presentation tour mode.</a:t>
+            </a:r>
+          </a:p>
+          <a:p>
+            <a:pPr>
+              <a:spcAft>
+                <a:spcPts val="800"/>
+              </a:spcAft>
+            </a:pPr>
+            <a:r>
+              <a:rPr b="1" sz="1150">
+                <a:solidFill>
+                  <a:srgbClr val="FFD166"/>
+                </a:solidFill>
+                <a:latin typeface="Arial"/>
+              </a:rPr>
+              <a:t>• DPDP Act Compliant: </a:t>
+            </a:r>
+            <a:r>
+              <a:rPr sz="1150">
+                <a:solidFill>
+                  <a:srgbClr val="FFFFFF"/>
+                </a:solidFill>
+                <a:latin typeface="Arial"/>
+              </a:rPr>
+              <a:t>Zero PII risk with rigorous open-source reproducible pipeline.</a:t>
+            </a:r>
+          </a:p>
+        </p:txBody>
+      </p:sp>
+      <p:sp>
+        <p:nvSpPr>
+          <p:cNvPr id="12" name="Rounded Rectangle 11"/>
+          <p:cNvSpPr/>
+          <p:nvPr/>
+        </p:nvSpPr>
+        <p:spPr>
+          <a:xfrm>
+            <a:off x="8046720" y="1554480"/>
+            <a:ext cx="3337560" cy="4572000"/>
+          </a:xfrm>
+          <a:prstGeom prst="roundRect">
+            <a:avLst/>
+          </a:prstGeom>
+          <a:solidFill>
+            <a:srgbClr val="1C2541"/>
+          </a:solidFill>
+          <a:ln w="19050">
+            <a:solidFill>
+              <a:srgbClr val="3A506B"/>
+            </a:solidFill>
+          </a:ln>
+        </p:spPr>
+        <p:style>
+          <a:lnRef idx="1">
+            <a:schemeClr val="accent1"/>
+          </a:lnRef>
+          <a:fillRef idx="3">
+            <a:schemeClr val="accent1"/>
+          </a:fillRef>
+          <a:effectRef idx="2">
+            <a:schemeClr val="accent1"/>
+          </a:effectRef>
+          <a:fontRef idx="minor">
+            <a:schemeClr val="lt1"/>
+          </a:fontRef>
+        </p:style>
+        <p:txBody>
+          <a:bodyPr rtlCol="0" anchor="ctr"/>
+          <a:lstStyle/>
+          <a:p>
+            <a:pPr algn="ctr"/>
+          </a:p>
+        </p:txBody>
+      </p:sp>
+      <p:sp>
+        <p:nvSpPr>
+          <p:cNvPr id="13" name="TextBox 12"/>
+          <p:cNvSpPr txBox="1"/>
+          <p:nvPr/>
+        </p:nvSpPr>
+        <p:spPr>
+          <a:xfrm>
+            <a:off x="8275320" y="1719072"/>
+            <a:ext cx="2880360" cy="438912"/>
+          </a:xfrm>
+          <a:prstGeom prst="rect">
+            <a:avLst/>
+          </a:prstGeom>
+          <a:noFill/>
+        </p:spPr>
+        <p:txBody>
+          <a:bodyPr wrap="square">
+            <a:spAutoFit/>
+          </a:bodyPr>
+          <a:lstStyle/>
+          <a:p>
+            <a:pPr>
+              <a:defRPr sz="1550" b="1">
+                <a:solidFill>
+                  <a:srgbClr val="06D6A0"/>
+                </a:solidFill>
+                <a:latin typeface="Arial"/>
+              </a:defRPr>
+            </a:pPr>
+            <a:r>
+              <a:t>Deliverables Ready</a:t>
+            </a:r>
+          </a:p>
+        </p:txBody>
+      </p:sp>
+      <p:sp>
+        <p:nvSpPr>
+          <p:cNvPr id="14" name="TextBox 13"/>
+          <p:cNvSpPr txBox="1"/>
+          <p:nvPr/>
+        </p:nvSpPr>
+        <p:spPr>
+          <a:xfrm>
+            <a:off x="8229600" y="2148840"/>
+            <a:ext cx="2971800" cy="3749039"/>
+          </a:xfrm>
+          <a:prstGeom prst="rect">
+            <a:avLst/>
+          </a:prstGeom>
+          <a:noFill/>
+        </p:spPr>
+        <p:txBody>
+          <a:bodyPr wrap="square">
+            <a:spAutoFit/>
+          </a:bodyPr>
+          <a:lstStyle/>
+          <a:p>
+            <a:pPr>
+              <a:spcAft>
+                <a:spcPts val="800"/>
+              </a:spcAft>
+            </a:pPr>
+            <a:r>
+              <a:rPr b="1" sz="1150">
+                <a:solidFill>
+                  <a:srgbClr val="06D6A0"/>
+                </a:solidFill>
+                <a:latin typeface="Arial"/>
+              </a:rPr>
+              <a:t>• Public GitHub Repo: </a:t>
+            </a:r>
+            <a:r>
+              <a:rPr sz="1150">
+                <a:solidFill>
+                  <a:srgbClr val="FFFFFF"/>
+                </a:solidFill>
+                <a:latin typeface="Arial"/>
+              </a:rPr>
+              <a:t>Complete code, models, tests, datasets, and MIT License on Desktop.</a:t>
+            </a:r>
+          </a:p>
+          <a:p>
+            <a:pPr>
+              <a:spcAft>
+                <a:spcPts val="800"/>
+              </a:spcAft>
+            </a:pPr>
+            <a:r>
+              <a:rPr b="1" sz="1150">
+                <a:solidFill>
+                  <a:srgbClr val="06D6A0"/>
+                </a:solidFill>
+                <a:latin typeface="Arial"/>
+              </a:rPr>
+              <a:t>• Presentation Deck: </a:t>
+            </a:r>
+            <a:r>
+              <a:rPr sz="1150">
+                <a:solidFill>
+                  <a:srgbClr val="FFFFFF"/>
+                </a:solidFill>
+                <a:latin typeface="Arial"/>
+              </a:rPr>
+              <a:t>Native 16:9 widescreen PowerPoint (.pptx) and PDF formats.</a:t>
+            </a:r>
+          </a:p>
+          <a:p>
+            <a:pPr>
+              <a:spcAft>
+                <a:spcPts val="800"/>
+              </a:spcAft>
+            </a:pPr>
+            <a:r>
+              <a:rPr b="1" sz="1150">
+                <a:solidFill>
+                  <a:srgbClr val="06D6A0"/>
+                </a:solidFill>
+                <a:latin typeface="Arial"/>
+              </a:rPr>
+              <a:t>• Architecture Diagram: </a:t>
+            </a:r>
+            <a:r>
+              <a:rPr sz="1150">
+                <a:solidFill>
+                  <a:srgbClr val="FFFFFF"/>
+                </a:solidFill>
+                <a:latin typeface="Arial"/>
+              </a:rPr>
+              <a:t>Publication-grade vector PDF, PPTX, and SVG diagrams.</a:t>
             </a:r>
           </a:p>
         </p:txBody>
@@ -3716,7 +4041,7 @@
             <a:avLst/>
           </a:prstGeom>
           <a:solidFill>
-            <a:srgbClr val="0B1120"/>
+            <a:srgbClr val="0B132B"/>
           </a:solidFill>
           <a:ln>
             <a:noFill/>
@@ -3752,19 +4077,17 @@
         </p:nvSpPr>
         <p:spPr>
           <a:xfrm>
-            <a:off x="548640" y="1188720"/>
-            <a:ext cx="11094415" cy="4937760"/>
+            <a:off x="731520" y="365760"/>
+            <a:ext cx="4169663" cy="329184"/>
           </a:xfrm>
           <a:prstGeom prst="roundRect">
             <a:avLst/>
           </a:prstGeom>
           <a:solidFill>
-            <a:srgbClr val="1E293B"/>
+            <a:srgbClr val="3A506B"/>
           </a:solidFill>
-          <a:ln w="19050">
-            <a:solidFill>
-              <a:srgbClr val="334155"/>
-            </a:solidFill>
+          <a:ln>
+            <a:noFill/>
           </a:ln>
         </p:spPr>
         <p:style>
@@ -3782,10 +4105,20 @@
           </a:fontRef>
         </p:style>
         <p:txBody>
-          <a:bodyPr rtlCol="0" anchor="ctr"/>
-          <a:lstStyle/>
-          <a:p>
-            <a:pPr algn="ctr"/>
+          <a:bodyPr rtlCol="0" anchor="ctr" wrap="none"/>
+          <a:lstStyle/>
+          <a:p>
+            <a:pPr algn="ctr">
+              <a:defRPr sz="1050" b="1">
+                <a:solidFill>
+                  <a:srgbClr val="48CAE4"/>
+                </a:solidFill>
+                <a:latin typeface="Arial"/>
+              </a:defRPr>
+            </a:pPr>
+            <a:r>
+              <a:t>CLINICAL PROBLEM &amp; INDIAN EPIDEMIOLOGY</a:t>
+            </a:r>
           </a:p>
         </p:txBody>
       </p:sp>
@@ -3797,8 +4130,8 @@
         </p:nvSpPr>
         <p:spPr>
           <a:xfrm>
-            <a:off x="548640" y="228600"/>
-            <a:ext cx="11094415" cy="914400"/>
+            <a:off x="731520" y="749808"/>
+            <a:ext cx="10698480" cy="685800"/>
           </a:xfrm>
           <a:prstGeom prst="rect">
             <a:avLst/>
@@ -3806,34 +4139,21 @@
           <a:noFill/>
         </p:spPr>
         <p:txBody>
-          <a:bodyPr wrap="square" lIns="0" tIns="0" rIns="0" bIns="0">
+          <a:bodyPr wrap="square">
             <a:spAutoFit/>
           </a:bodyPr>
           <a:lstStyle/>
           <a:p>
             <a:pPr>
-              <a:defRPr sz="2100" b="1">
-                <a:solidFill>
-                  <a:srgbClr val="38BDF8"/>
+              <a:defRPr sz="2300" b="1">
+                <a:solidFill>
+                  <a:srgbClr val="FFFFFF"/>
                 </a:solidFill>
                 <a:latin typeface="Arial"/>
               </a:defRPr>
             </a:pPr>
             <a:r>
-              <a:t>The Indian Diabetes Crisis: Why Reactive Healthcare Fails</a:t>
-            </a:r>
-          </a:p>
-          <a:p>
-            <a:pPr>
-              <a:defRPr sz="1200">
-                <a:solidFill>
-                  <a:srgbClr val="94A3B8"/>
-                </a:solidFill>
-                <a:latin typeface="Arial"/>
-              </a:defRPr>
-            </a:pPr>
-            <a:r>
-              <a:t>ICMR-INDIAB 2023 Epidemiological Context &amp; Clinical Motivation</a:t>
+              <a:t>The Indian Diabetes Crisis: Why Reactive Care Fails</a:t>
             </a:r>
           </a:p>
         </p:txBody>
@@ -3846,8 +4166,8 @@
         </p:nvSpPr>
         <p:spPr>
           <a:xfrm>
-            <a:off x="822960" y="1371600"/>
-            <a:ext cx="10515600" cy="4480560"/>
+            <a:off x="731520" y="6309360"/>
+            <a:ext cx="10698480" cy="320040"/>
           </a:xfrm>
           <a:prstGeom prst="rect">
             <a:avLst/>
@@ -3855,118 +4175,80 @@
           <a:noFill/>
         </p:spPr>
         <p:txBody>
-          <a:bodyPr wrap="square" lIns="0" tIns="0" rIns="0" bIns="0">
+          <a:bodyPr wrap="square">
             <a:spAutoFit/>
           </a:bodyPr>
           <a:lstStyle/>
           <a:p>
             <a:pPr>
-              <a:spcAft>
-                <a:spcPts val="1000"/>
-              </a:spcAft>
-              <a:defRPr sz="1350">
-                <a:solidFill>
-                  <a:srgbClr val="F1F5F9"/>
+              <a:defRPr sz="1000">
+                <a:solidFill>
+                  <a:srgbClr val="8D99AE"/>
                 </a:solidFill>
                 <a:latin typeface="Arial"/>
               </a:defRPr>
             </a:pPr>
             <a:r>
-              <a:t>101.3 Million Diabetics + 136 Million Pre-diabetics in India ('Diabetes Capital of the World')</a:t>
-            </a:r>
-          </a:p>
-          <a:p>
-            <a:pPr>
-              <a:spcAft>
-                <a:spcPts val="1000"/>
-              </a:spcAft>
-              <a:defRPr sz="1350">
-                <a:solidFill>
-                  <a:srgbClr val="F1F5F9"/>
-                </a:solidFill>
-                <a:latin typeface="Arial"/>
-              </a:defRPr>
-            </a:pPr>
-            <a:r>
-              <a:t>Asian Indian Phenotype: High visceral fat &amp; severe insulin resistance at lower BMI (&gt;= 23 kg/m²)</a:t>
-            </a:r>
-          </a:p>
-          <a:p>
-            <a:pPr>
-              <a:spcAft>
-                <a:spcPts val="1000"/>
-              </a:spcAft>
-              <a:defRPr sz="1350">
-                <a:solidFill>
-                  <a:srgbClr val="F1F5F9"/>
-                </a:solidFill>
-                <a:latin typeface="Arial"/>
-              </a:defRPr>
-            </a:pPr>
-            <a:r>
-              <a:t>Dietary Trap: Refined rice/wheat staples cause massive postprandial glucose surges (&gt;200 mg/dL)</a:t>
-            </a:r>
-          </a:p>
-          <a:p>
-            <a:pPr>
-              <a:spcAft>
-                <a:spcPts val="1000"/>
-              </a:spcAft>
-              <a:defRPr sz="1350">
-                <a:solidFill>
-                  <a:srgbClr val="F1F5F9"/>
-                </a:solidFill>
-                <a:latin typeface="Arial"/>
-              </a:defRPr>
-            </a:pPr>
-            <a:r>
-              <a:t>Silent Danger: Nocturnal hypoglycemia (&lt;70 mg/dL) during sleep causes fatal cardiac arrhythmias</a:t>
-            </a:r>
-          </a:p>
-          <a:p>
-            <a:pPr>
-              <a:spcAft>
-                <a:spcPts val="1000"/>
-              </a:spcAft>
-              <a:defRPr sz="1350">
-                <a:solidFill>
-                  <a:srgbClr val="F1F5F9"/>
-                </a:solidFill>
-                <a:latin typeface="Arial"/>
-              </a:defRPr>
-            </a:pPr>
-            <a:r>
-              <a:t>Reactive Failure: Quarterly HbA1c tests are 3-month trailing averages; they miss intraday volatility</a:t>
-            </a:r>
-          </a:p>
-          <a:p>
-            <a:pPr>
-              <a:spcAft>
-                <a:spcPts val="1000"/>
-              </a:spcAft>
-              <a:defRPr sz="1350">
-                <a:solidFill>
-                  <a:srgbClr val="F1F5F9"/>
-                </a:solidFill>
-                <a:latin typeface="Arial"/>
-              </a:defRPr>
-            </a:pPr>
-            <a:r>
-              <a:t>Solution: Continuous Digital Twin providing real-time in-silico simulation &amp; proactive alerts</a:t>
-            </a:r>
-          </a:p>
-        </p:txBody>
-      </p:sp>
-      <p:sp>
-        <p:nvSpPr>
-          <p:cNvPr id="6" name="TextBox 5"/>
+              <a:t>GlycoTwin-AI  |  Happiest Health Summit 2026, Bengaluru  |  Slide 2 of 10</a:t>
+            </a:r>
+          </a:p>
+        </p:txBody>
+      </p:sp>
+      <p:sp>
+        <p:nvSpPr>
+          <p:cNvPr id="6" name="Rounded Rectangle 5"/>
+          <p:cNvSpPr/>
+          <p:nvPr/>
+        </p:nvSpPr>
+        <p:spPr>
+          <a:xfrm>
+            <a:off x="731520" y="1554480"/>
+            <a:ext cx="5166360" cy="4572000"/>
+          </a:xfrm>
+          <a:prstGeom prst="roundRect">
+            <a:avLst/>
+          </a:prstGeom>
+          <a:solidFill>
+            <a:srgbClr val="1C2541"/>
+          </a:solidFill>
+          <a:ln w="19050">
+            <a:solidFill>
+              <a:srgbClr val="3A506B"/>
+            </a:solidFill>
+          </a:ln>
+        </p:spPr>
+        <p:style>
+          <a:lnRef idx="1">
+            <a:schemeClr val="accent1"/>
+          </a:lnRef>
+          <a:fillRef idx="3">
+            <a:schemeClr val="accent1"/>
+          </a:fillRef>
+          <a:effectRef idx="2">
+            <a:schemeClr val="accent1"/>
+          </a:effectRef>
+          <a:fontRef idx="minor">
+            <a:schemeClr val="lt1"/>
+          </a:fontRef>
+        </p:style>
+        <p:txBody>
+          <a:bodyPr rtlCol="0" anchor="ctr"/>
+          <a:lstStyle/>
+          <a:p>
+            <a:pPr algn="ctr"/>
+          </a:p>
+        </p:txBody>
+      </p:sp>
+      <p:sp>
+        <p:nvSpPr>
+          <p:cNvPr id="7" name="TextBox 6"/>
           <p:cNvSpPr txBox="1"/>
           <p:nvPr/>
         </p:nvSpPr>
         <p:spPr>
           <a:xfrm>
-            <a:off x="548640" y="6263640"/>
-            <a:ext cx="11094415" cy="365760"/>
+            <a:off x="960120" y="1719072"/>
+            <a:ext cx="4709160" cy="438912"/>
           </a:xfrm>
           <a:prstGeom prst="rect">
             <a:avLst/>
@@ -3974,21 +4256,348 @@
           <a:noFill/>
         </p:spPr>
         <p:txBody>
-          <a:bodyPr wrap="square" lIns="0" tIns="0" rIns="0" bIns="0">
+          <a:bodyPr wrap="square">
             <a:spAutoFit/>
           </a:bodyPr>
           <a:lstStyle/>
           <a:p>
             <a:pPr>
-              <a:defRPr sz="1000">
-                <a:solidFill>
-                  <a:srgbClr val="94A3B8"/>
+              <a:defRPr sz="1550" b="1">
+                <a:solidFill>
+                  <a:srgbClr val="FFD166"/>
                 </a:solidFill>
                 <a:latin typeface="Arial"/>
               </a:defRPr>
             </a:pPr>
             <a:r>
-              <a:t>Clinical Background &amp; Context  |  Slide 2 of 10</a:t>
+              <a:t>The Asian Indian Phenotype Challenge</a:t>
+            </a:r>
+          </a:p>
+        </p:txBody>
+      </p:sp>
+      <p:sp>
+        <p:nvSpPr>
+          <p:cNvPr id="8" name="TextBox 7"/>
+          <p:cNvSpPr txBox="1"/>
+          <p:nvPr/>
+        </p:nvSpPr>
+        <p:spPr>
+          <a:xfrm>
+            <a:off x="960120" y="2148840"/>
+            <a:ext cx="4709160" cy="3749039"/>
+          </a:xfrm>
+          <a:prstGeom prst="rect">
+            <a:avLst/>
+          </a:prstGeom>
+          <a:noFill/>
+        </p:spPr>
+        <p:txBody>
+          <a:bodyPr wrap="square">
+            <a:spAutoFit/>
+          </a:bodyPr>
+          <a:lstStyle/>
+          <a:p>
+            <a:pPr>
+              <a:spcAft>
+                <a:spcPts val="800"/>
+              </a:spcAft>
+            </a:pPr>
+            <a:r>
+              <a:rPr b="1" sz="1200">
+                <a:solidFill>
+                  <a:srgbClr val="48CAE4"/>
+                </a:solidFill>
+                <a:latin typeface="Arial"/>
+              </a:rPr>
+              <a:t>• 101.3M Diagnosed Diabetics: </a:t>
+            </a:r>
+            <a:r>
+              <a:rPr sz="1200">
+                <a:solidFill>
+                  <a:srgbClr val="FFFFFF"/>
+                </a:solidFill>
+                <a:latin typeface="Arial"/>
+              </a:rPr>
+              <a:t>ICMR-INDIAB 2023 study confirms India as the global epicentre of diabetes, with 136M additional pre-diabetics.</a:t>
+            </a:r>
+          </a:p>
+          <a:p>
+            <a:pPr>
+              <a:spcAft>
+                <a:spcPts val="800"/>
+              </a:spcAft>
+            </a:pPr>
+            <a:r>
+              <a:rPr b="1" sz="1200">
+                <a:solidFill>
+                  <a:srgbClr val="48CAE4"/>
+                </a:solidFill>
+                <a:latin typeface="Arial"/>
+              </a:rPr>
+              <a:t>• Asian Indian Phenotype: </a:t>
+            </a:r>
+            <a:r>
+              <a:rPr sz="1200">
+                <a:solidFill>
+                  <a:srgbClr val="FFFFFF"/>
+                </a:solidFill>
+                <a:latin typeface="Arial"/>
+              </a:rPr>
+              <a:t>Excess visceral adiposity, hyperinsulinemia, and profound insulin resistance at lower BMI cutoffs (&gt;= 23 kg/m²).</a:t>
+            </a:r>
+          </a:p>
+          <a:p>
+            <a:pPr>
+              <a:spcAft>
+                <a:spcPts val="800"/>
+              </a:spcAft>
+            </a:pPr>
+            <a:r>
+              <a:rPr b="1" sz="1200">
+                <a:solidFill>
+                  <a:srgbClr val="48CAE4"/>
+                </a:solidFill>
+                <a:latin typeface="Arial"/>
+              </a:rPr>
+              <a:t>• Dietary Glycemic Volatility: </a:t>
+            </a:r>
+            <a:r>
+              <a:rPr sz="1200">
+                <a:solidFill>
+                  <a:srgbClr val="FFFFFF"/>
+                </a:solidFill>
+                <a:latin typeface="Arial"/>
+              </a:rPr>
+              <a:t>Staple diets of refined white rice and wheat flour cause steep postprandial glucose surges (&gt;200 mg/dL).</a:t>
+            </a:r>
+          </a:p>
+          <a:p>
+            <a:pPr>
+              <a:spcAft>
+                <a:spcPts val="800"/>
+              </a:spcAft>
+            </a:pPr>
+            <a:r>
+              <a:rPr b="1" sz="1200">
+                <a:solidFill>
+                  <a:srgbClr val="48CAE4"/>
+                </a:solidFill>
+                <a:latin typeface="Arial"/>
+              </a:rPr>
+              <a:t>• Lethal Nocturnal Hypo: </a:t>
+            </a:r>
+            <a:r>
+              <a:rPr sz="1200">
+                <a:solidFill>
+                  <a:srgbClr val="FFFFFF"/>
+                </a:solidFill>
+                <a:latin typeface="Arial"/>
+              </a:rPr>
+              <a:t>Sulfonylurea/insulin use and erratic meal times cause dangerous 02:00-04:30 AM crashes (&lt;70 mg/dL) during sleep.</a:t>
+            </a:r>
+          </a:p>
+        </p:txBody>
+      </p:sp>
+      <p:sp>
+        <p:nvSpPr>
+          <p:cNvPr id="9" name="Rounded Rectangle 8"/>
+          <p:cNvSpPr/>
+          <p:nvPr/>
+        </p:nvSpPr>
+        <p:spPr>
+          <a:xfrm>
+            <a:off x="6263640" y="1554480"/>
+            <a:ext cx="5166360" cy="4572000"/>
+          </a:xfrm>
+          <a:prstGeom prst="roundRect">
+            <a:avLst/>
+          </a:prstGeom>
+          <a:solidFill>
+            <a:srgbClr val="1C2541"/>
+          </a:solidFill>
+          <a:ln w="19050">
+            <a:solidFill>
+              <a:srgbClr val="3A506B"/>
+            </a:solidFill>
+          </a:ln>
+        </p:spPr>
+        <p:style>
+          <a:lnRef idx="1">
+            <a:schemeClr val="accent1"/>
+          </a:lnRef>
+          <a:fillRef idx="3">
+            <a:schemeClr val="accent1"/>
+          </a:fillRef>
+          <a:effectRef idx="2">
+            <a:schemeClr val="accent1"/>
+          </a:effectRef>
+          <a:fontRef idx="minor">
+            <a:schemeClr val="lt1"/>
+          </a:fontRef>
+        </p:style>
+        <p:txBody>
+          <a:bodyPr rtlCol="0" anchor="ctr"/>
+          <a:lstStyle/>
+          <a:p>
+            <a:pPr algn="ctr"/>
+          </a:p>
+        </p:txBody>
+      </p:sp>
+      <p:sp>
+        <p:nvSpPr>
+          <p:cNvPr id="10" name="TextBox 9"/>
+          <p:cNvSpPr txBox="1"/>
+          <p:nvPr/>
+        </p:nvSpPr>
+        <p:spPr>
+          <a:xfrm>
+            <a:off x="6492240" y="1719072"/>
+            <a:ext cx="4709160" cy="438912"/>
+          </a:xfrm>
+          <a:prstGeom prst="rect">
+            <a:avLst/>
+          </a:prstGeom>
+          <a:noFill/>
+        </p:spPr>
+        <p:txBody>
+          <a:bodyPr wrap="square">
+            <a:spAutoFit/>
+          </a:bodyPr>
+          <a:lstStyle/>
+          <a:p>
+            <a:pPr>
+              <a:defRPr sz="1550" b="1">
+                <a:solidFill>
+                  <a:srgbClr val="48CAE4"/>
+                </a:solidFill>
+                <a:latin typeface="Arial"/>
+              </a:defRPr>
+            </a:pPr>
+            <a:r>
+              <a:t>Why Traditional Reactive Medicine Fails</a:t>
+            </a:r>
+          </a:p>
+        </p:txBody>
+      </p:sp>
+      <p:sp>
+        <p:nvSpPr>
+          <p:cNvPr id="11" name="TextBox 10"/>
+          <p:cNvSpPr txBox="1"/>
+          <p:nvPr/>
+        </p:nvSpPr>
+        <p:spPr>
+          <a:xfrm>
+            <a:off x="6492240" y="2148840"/>
+            <a:ext cx="4709160" cy="3749039"/>
+          </a:xfrm>
+          <a:prstGeom prst="rect">
+            <a:avLst/>
+          </a:prstGeom>
+          <a:noFill/>
+        </p:spPr>
+        <p:txBody>
+          <a:bodyPr wrap="square">
+            <a:spAutoFit/>
+          </a:bodyPr>
+          <a:lstStyle/>
+          <a:p>
+            <a:pPr>
+              <a:spcAft>
+                <a:spcPts val="800"/>
+              </a:spcAft>
+            </a:pPr>
+            <a:r>
+              <a:rPr b="1" sz="1200">
+                <a:solidFill>
+                  <a:srgbClr val="FFD166"/>
+                </a:solidFill>
+                <a:latin typeface="Arial"/>
+              </a:rPr>
+              <a:t>• Quarterly HbA1c Blindspot: </a:t>
+            </a:r>
+            <a:r>
+              <a:rPr sz="1200">
+                <a:solidFill>
+                  <a:srgbClr val="FFFFFF"/>
+                </a:solidFill>
+                <a:latin typeface="Arial"/>
+              </a:rPr>
+              <a:t>HbA1c is a 3-month trailing average that completely masks intraday glycemic volatility and lethal nocturnal crashes.</a:t>
+            </a:r>
+          </a:p>
+          <a:p>
+            <a:pPr>
+              <a:spcAft>
+                <a:spcPts val="800"/>
+              </a:spcAft>
+            </a:pPr>
+            <a:r>
+              <a:rPr b="1" sz="1200">
+                <a:solidFill>
+                  <a:srgbClr val="FFD166"/>
+                </a:solidFill>
+                <a:latin typeface="Arial"/>
+              </a:rPr>
+              <a:t>• Post-Hoc Intervention: </a:t>
+            </a:r>
+            <a:r>
+              <a:rPr sz="1200">
+                <a:solidFill>
+                  <a:srgbClr val="FFFFFF"/>
+                </a:solidFill>
+                <a:latin typeface="Arial"/>
+              </a:rPr>
+              <a:t>Current standard of care alerts patients after hypoglycemia has occurred, leading to acute disorientation and ER visits.</a:t>
+            </a:r>
+          </a:p>
+          <a:p>
+            <a:pPr>
+              <a:spcAft>
+                <a:spcPts val="800"/>
+              </a:spcAft>
+            </a:pPr>
+            <a:r>
+              <a:rPr b="1" sz="1200">
+                <a:solidFill>
+                  <a:srgbClr val="FFD166"/>
+                </a:solidFill>
+                <a:latin typeface="Arial"/>
+              </a:rPr>
+              <a:t>• Crippling Family Costs: </a:t>
+            </a:r>
+            <a:r>
+              <a:rPr sz="1200">
+                <a:solidFill>
+                  <a:srgbClr val="FFFFFF"/>
+                </a:solidFill>
+                <a:latin typeface="Arial"/>
+              </a:rPr>
+              <a:t>Emergency admissions for DKA or severe hypoglycemia cost Indian families ₹40,000 to ₹1,50,000 out-of-pocket.</a:t>
+            </a:r>
+          </a:p>
+          <a:p>
+            <a:pPr>
+              <a:spcAft>
+                <a:spcPts val="800"/>
+              </a:spcAft>
+            </a:pPr>
+            <a:r>
+              <a:rPr b="1" sz="1200">
+                <a:solidFill>
+                  <a:srgbClr val="FFD166"/>
+                </a:solidFill>
+                <a:latin typeface="Arial"/>
+              </a:rPr>
+              <a:t>• The Digital Twin Solution: </a:t>
+            </a:r>
+            <a:r>
+              <a:rPr sz="1200">
+                <a:solidFill>
+                  <a:srgbClr val="FFFFFF"/>
+                </a:solidFill>
+                <a:latin typeface="Arial"/>
+              </a:rPr>
+              <a:t>Moving from reactive treatment to proactive in-silico simulation, predicting adverse excursions 2 hours ahead.</a:t>
             </a:r>
           </a:p>
         </p:txBody>
@@ -4026,7 +4635,7 @@
             <a:avLst/>
           </a:prstGeom>
           <a:solidFill>
-            <a:srgbClr val="0B1120"/>
+            <a:srgbClr val="0B132B"/>
           </a:solidFill>
           <a:ln>
             <a:noFill/>
@@ -4062,19 +4671,17 @@
         </p:nvSpPr>
         <p:spPr>
           <a:xfrm>
-            <a:off x="548640" y="1188720"/>
-            <a:ext cx="11094415" cy="4937760"/>
+            <a:off x="731520" y="365760"/>
+            <a:ext cx="4059935" cy="329184"/>
           </a:xfrm>
           <a:prstGeom prst="roundRect">
             <a:avLst/>
           </a:prstGeom>
           <a:solidFill>
-            <a:srgbClr val="1E293B"/>
+            <a:srgbClr val="3A506B"/>
           </a:solidFill>
-          <a:ln w="19050">
-            <a:solidFill>
-              <a:srgbClr val="334155"/>
-            </a:solidFill>
+          <a:ln>
+            <a:noFill/>
           </a:ln>
         </p:spPr>
         <p:style>
@@ -4092,10 +4699,20 @@
           </a:fontRef>
         </p:style>
         <p:txBody>
-          <a:bodyPr rtlCol="0" anchor="ctr"/>
-          <a:lstStyle/>
-          <a:p>
-            <a:pPr algn="ctr"/>
+          <a:bodyPr rtlCol="0" anchor="ctr" wrap="none"/>
+          <a:lstStyle/>
+          <a:p>
+            <a:pPr algn="ctr">
+              <a:defRPr sz="1050" b="1">
+                <a:solidFill>
+                  <a:srgbClr val="48CAE4"/>
+                </a:solidFill>
+                <a:latin typeface="Arial"/>
+              </a:defRPr>
+            </a:pPr>
+            <a:r>
+              <a:t>DATA ARCHITECTURE &amp; MULTIMODAL FUSION</a:t>
+            </a:r>
           </a:p>
         </p:txBody>
       </p:sp>
@@ -4107,8 +4724,8 @@
         </p:nvSpPr>
         <p:spPr>
           <a:xfrm>
-            <a:off x="548640" y="228600"/>
-            <a:ext cx="11094415" cy="914400"/>
+            <a:off x="731520" y="749808"/>
+            <a:ext cx="10698480" cy="685800"/>
           </a:xfrm>
           <a:prstGeom prst="rect">
             <a:avLst/>
@@ -4116,34 +4733,21 @@
           <a:noFill/>
         </p:spPr>
         <p:txBody>
-          <a:bodyPr wrap="square" lIns="0" tIns="0" rIns="0" bIns="0">
+          <a:bodyPr wrap="square">
             <a:spAutoFit/>
           </a:bodyPr>
           <a:lstStyle/>
           <a:p>
             <a:pPr>
-              <a:defRPr sz="2100" b="1">
-                <a:solidFill>
-                  <a:srgbClr val="38BDF8"/>
+              <a:defRPr sz="2300" b="1">
+                <a:solidFill>
+                  <a:srgbClr val="FFFFFF"/>
                 </a:solidFill>
                 <a:latin typeface="Arial"/>
               </a:defRPr>
             </a:pPr>
             <a:r>
-              <a:t>Dual Data Stream Fusion Architecture</a:t>
-            </a:r>
-          </a:p>
-          <a:p>
-            <a:pPr>
-              <a:defRPr sz="1200">
-                <a:solidFill>
-                  <a:srgbClr val="94A3B8"/>
-                </a:solidFill>
-                <a:latin typeface="Arial"/>
-              </a:defRPr>
-            </a:pPr>
-            <a:r>
-              <a:t>Synthesizing Static Clinical Records with High-Frequency Wearable IoT Telemetry</a:t>
+              <a:t>Dual Data Stream Fusion: Static EHR + Wearable IoT</a:t>
             </a:r>
           </a:p>
         </p:txBody>
@@ -4156,8 +4760,8 @@
         </p:nvSpPr>
         <p:spPr>
           <a:xfrm>
-            <a:off x="822960" y="1371600"/>
-            <a:ext cx="10515600" cy="4480560"/>
+            <a:off x="731520" y="6309360"/>
+            <a:ext cx="10698480" cy="320040"/>
           </a:xfrm>
           <a:prstGeom prst="rect">
             <a:avLst/>
@@ -4165,86 +4769,80 @@
           <a:noFill/>
         </p:spPr>
         <p:txBody>
-          <a:bodyPr wrap="square" lIns="0" tIns="0" rIns="0" bIns="0">
+          <a:bodyPr wrap="square">
             <a:spAutoFit/>
           </a:bodyPr>
           <a:lstStyle/>
           <a:p>
             <a:pPr>
-              <a:spcAft>
-                <a:spcPts val="1000"/>
-              </a:spcAft>
-              <a:defRPr sz="1350">
-                <a:solidFill>
-                  <a:srgbClr val="F1F5F9"/>
+              <a:defRPr sz="1000">
+                <a:solidFill>
+                  <a:srgbClr val="8D99AE"/>
                 </a:solidFill>
                 <a:latin typeface="Arial"/>
               </a:defRPr>
             </a:pPr>
             <a:r>
-              <a:t>Stream 1 (Static EHR): Demographics, Asian Indian BMI, baseline HbA1c, eGFR, lipid profile, comorbidities, TCF7L2 genetic risk, &amp; baseline medications.</a:t>
-            </a:r>
-          </a:p>
-          <a:p>
-            <a:pPr>
-              <a:spcAft>
-                <a:spcPts val="1000"/>
-              </a:spcAft>
-              <a:defRPr sz="1350">
-                <a:solidFill>
-                  <a:srgbClr val="F1F5F9"/>
-                </a:solidFill>
-                <a:latin typeface="Arial"/>
-              </a:defRPr>
-            </a:pPr>
-            <a:r>
-              <a:t>Stream 2 (Dynamic IoT Wearables): 5-minute CGM interstitial glucose, continuous Heart Rate (bpm), HRV (RMSSD autonomic tone), step cadence, sleep stages, &amp; Indian meal carbs (g).</a:t>
-            </a:r>
-          </a:p>
-          <a:p>
-            <a:pPr>
-              <a:spcAft>
-                <a:spcPts val="1000"/>
-              </a:spcAft>
-              <a:defRPr sz="1350">
-                <a:solidFill>
-                  <a:srgbClr val="F1F5F9"/>
-                </a:solidFill>
-                <a:latin typeface="Arial"/>
-              </a:defRPr>
-            </a:pPr>
-            <a:r>
-              <a:t>Feature Synthesis: 42 kinetic &amp; cross-domain features including velocity (dG/dt), acceleration (d²G/dt²), intraday CV% volatility, and autonomic stress coupling (HR / HRV ratio).</a:t>
-            </a:r>
-          </a:p>
-          <a:p>
-            <a:pPr>
-              <a:spcAft>
-                <a:spcPts val="1000"/>
-              </a:spcAft>
-              <a:defRPr sz="1350">
-                <a:solidFill>
-                  <a:srgbClr val="F1F5F9"/>
-                </a:solidFill>
-                <a:latin typeface="Arial"/>
-              </a:defRPr>
-            </a:pPr>
-            <a:r>
-              <a:t>Compliance: 100% compliant with Indian DPDP Act 2023 &amp; HIPAA sandbox regulations (Zero PII).</a:t>
-            </a:r>
-          </a:p>
-        </p:txBody>
-      </p:sp>
-      <p:sp>
-        <p:nvSpPr>
-          <p:cNvPr id="6" name="TextBox 5"/>
+              <a:t>GlycoTwin-AI  |  Happiest Health Summit 2026, Bengaluru  |  Slide 3 of 10</a:t>
+            </a:r>
+          </a:p>
+        </p:txBody>
+      </p:sp>
+      <p:sp>
+        <p:nvSpPr>
+          <p:cNvPr id="6" name="Rounded Rectangle 5"/>
+          <p:cNvSpPr/>
+          <p:nvPr/>
+        </p:nvSpPr>
+        <p:spPr>
+          <a:xfrm>
+            <a:off x="731520" y="1554480"/>
+            <a:ext cx="5166360" cy="4572000"/>
+          </a:xfrm>
+          <a:prstGeom prst="roundRect">
+            <a:avLst/>
+          </a:prstGeom>
+          <a:solidFill>
+            <a:srgbClr val="1C2541"/>
+          </a:solidFill>
+          <a:ln w="19050">
+            <a:solidFill>
+              <a:srgbClr val="3A506B"/>
+            </a:solidFill>
+          </a:ln>
+        </p:spPr>
+        <p:style>
+          <a:lnRef idx="1">
+            <a:schemeClr val="accent1"/>
+          </a:lnRef>
+          <a:fillRef idx="3">
+            <a:schemeClr val="accent1"/>
+          </a:fillRef>
+          <a:effectRef idx="2">
+            <a:schemeClr val="accent1"/>
+          </a:effectRef>
+          <a:fontRef idx="minor">
+            <a:schemeClr val="lt1"/>
+          </a:fontRef>
+        </p:style>
+        <p:txBody>
+          <a:bodyPr rtlCol="0" anchor="ctr"/>
+          <a:lstStyle/>
+          <a:p>
+            <a:pPr algn="ctr"/>
+          </a:p>
+        </p:txBody>
+      </p:sp>
+      <p:sp>
+        <p:nvSpPr>
+          <p:cNvPr id="7" name="TextBox 6"/>
           <p:cNvSpPr txBox="1"/>
           <p:nvPr/>
         </p:nvSpPr>
         <p:spPr>
           <a:xfrm>
-            <a:off x="548640" y="6263640"/>
-            <a:ext cx="11094415" cy="365760"/>
+            <a:off x="960120" y="1719072"/>
+            <a:ext cx="4709160" cy="438912"/>
           </a:xfrm>
           <a:prstGeom prst="rect">
             <a:avLst/>
@@ -4252,21 +4850,348 @@
           <a:noFill/>
         </p:spPr>
         <p:txBody>
-          <a:bodyPr wrap="square" lIns="0" tIns="0" rIns="0" bIns="0">
+          <a:bodyPr wrap="square">
             <a:spAutoFit/>
           </a:bodyPr>
           <a:lstStyle/>
           <a:p>
             <a:pPr>
-              <a:defRPr sz="1000">
-                <a:solidFill>
-                  <a:srgbClr val="94A3B8"/>
+              <a:defRPr sz="1550" b="1">
+                <a:solidFill>
+                  <a:srgbClr val="48CAE4"/>
                 </a:solidFill>
                 <a:latin typeface="Arial"/>
               </a:defRPr>
             </a:pPr>
             <a:r>
-              <a:t>Data Architecture &amp; Privacy  |  Slide 3 of 10</a:t>
+              <a:t>Stream 1: Static Historical EHR</a:t>
+            </a:r>
+          </a:p>
+        </p:txBody>
+      </p:sp>
+      <p:sp>
+        <p:nvSpPr>
+          <p:cNvPr id="8" name="TextBox 7"/>
+          <p:cNvSpPr txBox="1"/>
+          <p:nvPr/>
+        </p:nvSpPr>
+        <p:spPr>
+          <a:xfrm>
+            <a:off x="960120" y="2148840"/>
+            <a:ext cx="4709160" cy="3749039"/>
+          </a:xfrm>
+          <a:prstGeom prst="rect">
+            <a:avLst/>
+          </a:prstGeom>
+          <a:noFill/>
+        </p:spPr>
+        <p:txBody>
+          <a:bodyPr wrap="square">
+            <a:spAutoFit/>
+          </a:bodyPr>
+          <a:lstStyle/>
+          <a:p>
+            <a:pPr>
+              <a:spcAft>
+                <a:spcPts val="800"/>
+              </a:spcAft>
+            </a:pPr>
+            <a:r>
+              <a:rPr b="1" sz="1200">
+                <a:solidFill>
+                  <a:srgbClr val="48CAE4"/>
+                </a:solidFill>
+                <a:latin typeface="Arial"/>
+              </a:rPr>
+              <a:t>• 1,000 Synthea Indian Patients: </a:t>
+            </a:r>
+            <a:r>
+              <a:rPr sz="1200">
+                <a:solidFill>
+                  <a:srgbClr val="FFFFFF"/>
+                </a:solidFill>
+                <a:latin typeface="Arial"/>
+              </a:rPr>
+              <a:t>Synthesized EHR database adhering to ICMR-INDIAB clinical distributions with complete demographic representation.</a:t>
+            </a:r>
+          </a:p>
+          <a:p>
+            <a:pPr>
+              <a:spcAft>
+                <a:spcPts val="800"/>
+              </a:spcAft>
+            </a:pPr>
+            <a:r>
+              <a:rPr b="1" sz="1200">
+                <a:solidFill>
+                  <a:srgbClr val="48CAE4"/>
+                </a:solidFill>
+                <a:latin typeface="Arial"/>
+              </a:rPr>
+              <a:t>• Phenotype &amp; Biomarkers: </a:t>
+            </a:r>
+            <a:r>
+              <a:rPr sz="1200">
+                <a:solidFill>
+                  <a:srgbClr val="FFFFFF"/>
+                </a:solidFill>
+                <a:latin typeface="Arial"/>
+              </a:rPr>
+              <a:t>Asian Indian BMI, Waist-to-Hip Ratio, baseline HbA1c (5.7% - 14.2%), and Fasting Blood Glucose (FBG).</a:t>
+            </a:r>
+          </a:p>
+          <a:p>
+            <a:pPr>
+              <a:spcAft>
+                <a:spcPts val="800"/>
+              </a:spcAft>
+            </a:pPr>
+            <a:r>
+              <a:rPr b="1" sz="1200">
+                <a:solidFill>
+                  <a:srgbClr val="48CAE4"/>
+                </a:solidFill>
+                <a:latin typeface="Arial"/>
+              </a:rPr>
+              <a:t>• Renal &amp; Lipid Panels: </a:t>
+            </a:r>
+            <a:r>
+              <a:rPr sz="1200">
+                <a:solidFill>
+                  <a:srgbClr val="FFFFFF"/>
+                </a:solidFill>
+                <a:latin typeface="Arial"/>
+              </a:rPr>
+              <a:t>eGFR (mL/min/1.73m²), serum creatinine, triglycerides (high in Indians), HDL, and LDL cholesterol.</a:t>
+            </a:r>
+          </a:p>
+          <a:p>
+            <a:pPr>
+              <a:spcAft>
+                <a:spcPts val="800"/>
+              </a:spcAft>
+            </a:pPr>
+            <a:r>
+              <a:rPr b="1" sz="1200">
+                <a:solidFill>
+                  <a:srgbClr val="48CAE4"/>
+                </a:solidFill>
+                <a:latin typeface="Arial"/>
+              </a:rPr>
+              <a:t>• Genetics &amp; Comorbidities: </a:t>
+            </a:r>
+            <a:r>
+              <a:rPr sz="1200">
+                <a:solidFill>
+                  <a:srgbClr val="FFFFFF"/>
+                </a:solidFill>
+                <a:latin typeface="Arial"/>
+              </a:rPr>
+              <a:t>TCF7L2 risk alleles, diabetic retinopathy, neuropathy, CVD history, and baseline pharmacotherapy (Metformin, SGLT2i, Insulin).</a:t>
+            </a:r>
+          </a:p>
+        </p:txBody>
+      </p:sp>
+      <p:sp>
+        <p:nvSpPr>
+          <p:cNvPr id="9" name="Rounded Rectangle 8"/>
+          <p:cNvSpPr/>
+          <p:nvPr/>
+        </p:nvSpPr>
+        <p:spPr>
+          <a:xfrm>
+            <a:off x="6263640" y="1554480"/>
+            <a:ext cx="5166360" cy="4572000"/>
+          </a:xfrm>
+          <a:prstGeom prst="roundRect">
+            <a:avLst/>
+          </a:prstGeom>
+          <a:solidFill>
+            <a:srgbClr val="1C2541"/>
+          </a:solidFill>
+          <a:ln w="19050">
+            <a:solidFill>
+              <a:srgbClr val="3A506B"/>
+            </a:solidFill>
+          </a:ln>
+        </p:spPr>
+        <p:style>
+          <a:lnRef idx="1">
+            <a:schemeClr val="accent1"/>
+          </a:lnRef>
+          <a:fillRef idx="3">
+            <a:schemeClr val="accent1"/>
+          </a:fillRef>
+          <a:effectRef idx="2">
+            <a:schemeClr val="accent1"/>
+          </a:effectRef>
+          <a:fontRef idx="minor">
+            <a:schemeClr val="lt1"/>
+          </a:fontRef>
+        </p:style>
+        <p:txBody>
+          <a:bodyPr rtlCol="0" anchor="ctr"/>
+          <a:lstStyle/>
+          <a:p>
+            <a:pPr algn="ctr"/>
+          </a:p>
+        </p:txBody>
+      </p:sp>
+      <p:sp>
+        <p:nvSpPr>
+          <p:cNvPr id="10" name="TextBox 9"/>
+          <p:cNvSpPr txBox="1"/>
+          <p:nvPr/>
+        </p:nvSpPr>
+        <p:spPr>
+          <a:xfrm>
+            <a:off x="6492240" y="1719072"/>
+            <a:ext cx="4709160" cy="438912"/>
+          </a:xfrm>
+          <a:prstGeom prst="rect">
+            <a:avLst/>
+          </a:prstGeom>
+          <a:noFill/>
+        </p:spPr>
+        <p:txBody>
+          <a:bodyPr wrap="square">
+            <a:spAutoFit/>
+          </a:bodyPr>
+          <a:lstStyle/>
+          <a:p>
+            <a:pPr>
+              <a:defRPr sz="1550" b="1">
+                <a:solidFill>
+                  <a:srgbClr val="FFD166"/>
+                </a:solidFill>
+                <a:latin typeface="Arial"/>
+              </a:defRPr>
+            </a:pPr>
+            <a:r>
+              <a:t>Stream 2: Dynamic Wearables &amp; IoT Telemetry</a:t>
+            </a:r>
+          </a:p>
+        </p:txBody>
+      </p:sp>
+      <p:sp>
+        <p:nvSpPr>
+          <p:cNvPr id="11" name="TextBox 10"/>
+          <p:cNvSpPr txBox="1"/>
+          <p:nvPr/>
+        </p:nvSpPr>
+        <p:spPr>
+          <a:xfrm>
+            <a:off x="6492240" y="2148840"/>
+            <a:ext cx="4709160" cy="3749039"/>
+          </a:xfrm>
+          <a:prstGeom prst="rect">
+            <a:avLst/>
+          </a:prstGeom>
+          <a:noFill/>
+        </p:spPr>
+        <p:txBody>
+          <a:bodyPr wrap="square">
+            <a:spAutoFit/>
+          </a:bodyPr>
+          <a:lstStyle/>
+          <a:p>
+            <a:pPr>
+              <a:spcAft>
+                <a:spcPts val="800"/>
+              </a:spcAft>
+            </a:pPr>
+            <a:r>
+              <a:rPr b="1" sz="1200">
+                <a:solidFill>
+                  <a:srgbClr val="FFD166"/>
+                </a:solidFill>
+                <a:latin typeface="Arial"/>
+              </a:rPr>
+              <a:t>• 60,120 Continuous Timepoints: </a:t>
+            </a:r>
+            <a:r>
+              <a:rPr sz="1200">
+                <a:solidFill>
+                  <a:srgbClr val="FFFFFF"/>
+                </a:solidFill>
+                <a:latin typeface="Arial"/>
+              </a:rPr>
+              <a:t>14 continuous days per patient at high-frequency 5-minute intervals, modeling genuine physiological kinetics.</a:t>
+            </a:r>
+          </a:p>
+          <a:p>
+            <a:pPr>
+              <a:spcAft>
+                <a:spcPts val="800"/>
+              </a:spcAft>
+            </a:pPr>
+            <a:r>
+              <a:rPr b="1" sz="1200">
+                <a:solidFill>
+                  <a:srgbClr val="FFD166"/>
+                </a:solidFill>
+                <a:latin typeface="Arial"/>
+              </a:rPr>
+              <a:t>• CGM Interstitial Glucose: </a:t>
+            </a:r>
+            <a:r>
+              <a:rPr sz="1200">
+                <a:solidFill>
+                  <a:srgbClr val="FFFFFF"/>
+                </a:solidFill>
+                <a:latin typeface="Arial"/>
+              </a:rPr>
+              <a:t>Continuous glucose monitoring stream capturing interstitial diffusion dynamics and rapid glycemic slopes.</a:t>
+            </a:r>
+          </a:p>
+          <a:p>
+            <a:pPr>
+              <a:spcAft>
+                <a:spcPts val="800"/>
+              </a:spcAft>
+            </a:pPr>
+            <a:r>
+              <a:rPr b="1" sz="1200">
+                <a:solidFill>
+                  <a:srgbClr val="FFD166"/>
+                </a:solidFill>
+                <a:latin typeface="Arial"/>
+              </a:rPr>
+              <a:t>• Wearable PPG Biosensors: </a:t>
+            </a:r>
+            <a:r>
+              <a:rPr sz="1200">
+                <a:solidFill>
+                  <a:srgbClr val="FFFFFF"/>
+                </a:solidFill>
+                <a:latin typeface="Arial"/>
+              </a:rPr>
+              <a:t>Continuous Heart Rate (bpm) and Heart Rate Variability (HRV - RMSSD in ms) tracking autonomic nervous system tone.</a:t>
+            </a:r>
+          </a:p>
+          <a:p>
+            <a:pPr>
+              <a:spcAft>
+                <a:spcPts val="800"/>
+              </a:spcAft>
+            </a:pPr>
+            <a:r>
+              <a:rPr b="1" sz="1200">
+                <a:solidFill>
+                  <a:srgbClr val="FFD166"/>
+                </a:solidFill>
+                <a:latin typeface="Arial"/>
+              </a:rPr>
+              <a:t>• Behavioral &amp; Meal Logs: </a:t>
+            </a:r>
+            <a:r>
+              <a:rPr sz="1200">
+                <a:solidFill>
+                  <a:srgbClr val="FFFFFF"/>
+                </a:solidFill>
+                <a:latin typeface="Arial"/>
+              </a:rPr>
+              <a:t>5-minute step cadence, sleep stages (Deep, Light, REM), Indian carbohydrate intake (g), and insulin injection timestamps.</a:t>
             </a:r>
           </a:p>
         </p:txBody>
@@ -4304,7 +5229,7 @@
             <a:avLst/>
           </a:prstGeom>
           <a:solidFill>
-            <a:srgbClr val="0B1120"/>
+            <a:srgbClr val="0B132B"/>
           </a:solidFill>
           <a:ln>
             <a:noFill/>
@@ -4340,19 +5265,17 @@
         </p:nvSpPr>
         <p:spPr>
           <a:xfrm>
-            <a:off x="548640" y="1188720"/>
-            <a:ext cx="11094415" cy="4937760"/>
+            <a:off x="731520" y="365760"/>
+            <a:ext cx="4169663" cy="329184"/>
           </a:xfrm>
           <a:prstGeom prst="roundRect">
             <a:avLst/>
           </a:prstGeom>
           <a:solidFill>
-            <a:srgbClr val="1E293B"/>
+            <a:srgbClr val="3A506B"/>
           </a:solidFill>
-          <a:ln w="19050">
-            <a:solidFill>
-              <a:srgbClr val="334155"/>
-            </a:solidFill>
+          <a:ln>
+            <a:noFill/>
           </a:ln>
         </p:spPr>
         <p:style>
@@ -4370,10 +5293,20 @@
           </a:fontRef>
         </p:style>
         <p:txBody>
-          <a:bodyPr rtlCol="0" anchor="ctr"/>
-          <a:lstStyle/>
-          <a:p>
-            <a:pPr algn="ctr"/>
+          <a:bodyPr rtlCol="0" anchor="ctr" wrap="none"/>
+          <a:lstStyle/>
+          <a:p>
+            <a:pPr algn="ctr">
+              <a:defRPr sz="1050" b="1">
+                <a:solidFill>
+                  <a:srgbClr val="48CAE4"/>
+                </a:solidFill>
+                <a:latin typeface="Arial"/>
+              </a:defRPr>
+            </a:pPr>
+            <a:r>
+              <a:t>FEATURE ENGINEERING &amp; KINETIC MODELING</a:t>
+            </a:r>
           </a:p>
         </p:txBody>
       </p:sp>
@@ -4385,8 +5318,8 @@
         </p:nvSpPr>
         <p:spPr>
           <a:xfrm>
-            <a:off x="548640" y="228600"/>
-            <a:ext cx="11094415" cy="914400"/>
+            <a:off x="731520" y="749808"/>
+            <a:ext cx="10698480" cy="685800"/>
           </a:xfrm>
           <a:prstGeom prst="rect">
             <a:avLst/>
@@ -4394,34 +5327,21 @@
           <a:noFill/>
         </p:spPr>
         <p:txBody>
-          <a:bodyPr wrap="square" lIns="0" tIns="0" rIns="0" bIns="0">
+          <a:bodyPr wrap="square">
             <a:spAutoFit/>
           </a:bodyPr>
           <a:lstStyle/>
           <a:p>
             <a:pPr>
-              <a:defRPr sz="2100" b="1">
-                <a:solidFill>
-                  <a:srgbClr val="38BDF8"/>
+              <a:defRPr sz="2300" b="1">
+                <a:solidFill>
+                  <a:srgbClr val="FFFFFF"/>
                 </a:solidFill>
                 <a:latin typeface="Arial"/>
               </a:defRPr>
             </a:pPr>
             <a:r>
-              <a:t>Dual-Head Machine Learning Core &amp; Clinical Metrics</a:t>
-            </a:r>
-          </a:p>
-          <a:p>
-            <a:pPr>
-              <a:defRPr sz="1200">
-                <a:solidFill>
-                  <a:srgbClr val="94A3B8"/>
-                </a:solidFill>
-                <a:latin typeface="Arial"/>
-              </a:defRPr>
-            </a:pPr>
-            <a:r>
-              <a:t>Clinical Validation on Unseen Patient Test Cohorts (Zero Patient Leakage)</a:t>
+              <a:t>42 Multimodal Kinetic, Autonomic &amp; Metabolic Features</a:t>
             </a:r>
           </a:p>
         </p:txBody>
@@ -4434,8 +5354,8 @@
         </p:nvSpPr>
         <p:spPr>
           <a:xfrm>
-            <a:off x="822960" y="1371600"/>
-            <a:ext cx="10515600" cy="4480560"/>
+            <a:off x="731520" y="6309360"/>
+            <a:ext cx="10698480" cy="320040"/>
           </a:xfrm>
           <a:prstGeom prst="rect">
             <a:avLst/>
@@ -4443,150 +5363,80 @@
           <a:noFill/>
         </p:spPr>
         <p:txBody>
-          <a:bodyPr wrap="square" lIns="0" tIns="0" rIns="0" bIns="0">
+          <a:bodyPr wrap="square">
             <a:spAutoFit/>
           </a:bodyPr>
           <a:lstStyle/>
           <a:p>
             <a:pPr>
-              <a:spcAft>
-                <a:spcPts val="1000"/>
-              </a:spcAft>
-              <a:defRPr sz="1400" b="1">
-                <a:solidFill>
-                  <a:srgbClr val="34D399"/>
+              <a:defRPr sz="1000">
+                <a:solidFill>
+                  <a:srgbClr val="8D99AE"/>
                 </a:solidFill>
                 <a:latin typeface="Arial"/>
               </a:defRPr>
             </a:pPr>
             <a:r>
-              <a:t>Continuous Regressor (2-Hour Horizon Forecast):</a:t>
-            </a:r>
-          </a:p>
-          <a:p>
-            <a:pPr lvl="1">
-              <a:spcAft>
-                <a:spcPts val="1000"/>
-              </a:spcAft>
-              <a:defRPr sz="1300">
-                <a:solidFill>
-                  <a:srgbClr val="94A3B8"/>
-                </a:solidFill>
-                <a:latin typeface="Arial"/>
-              </a:defRPr>
-            </a:pPr>
-            <a:r>
-              <a:t>   • MARD (Mean Absolute Relative Difference): 7.15% (Gold standard clinical threshold &lt; 10%)</a:t>
-            </a:r>
-          </a:p>
-          <a:p>
-            <a:pPr lvl="1">
-              <a:spcAft>
-                <a:spcPts val="1000"/>
-              </a:spcAft>
-              <a:defRPr sz="1300">
-                <a:solidFill>
-                  <a:srgbClr val="94A3B8"/>
-                </a:solidFill>
-                <a:latin typeface="Arial"/>
-              </a:defRPr>
-            </a:pPr>
-            <a:r>
-              <a:t>   • RMSE: 14.50 mg/dL | MAE: 11.11 mg/dL across 59,940 high-resolution multimodal records</a:t>
-            </a:r>
-          </a:p>
-          <a:p>
-            <a:pPr lvl="1">
-              <a:spcAft>
-                <a:spcPts val="1000"/>
-              </a:spcAft>
-              <a:defRPr sz="1300">
-                <a:solidFill>
-                  <a:srgbClr val="94A3B8"/>
-                </a:solidFill>
-                <a:latin typeface="Arial"/>
-              </a:defRPr>
-            </a:pPr>
-            <a:r>
-              <a:t>   • Generates dynamic 95% confidence bounds reflecting biological uncertainty</a:t>
-            </a:r>
-          </a:p>
-          <a:p>
-            <a:pPr>
-              <a:spcAft>
-                <a:spcPts val="1000"/>
-              </a:spcAft>
-              <a:defRPr sz="1400" b="1">
-                <a:solidFill>
-                  <a:srgbClr val="34D399"/>
-                </a:solidFill>
-                <a:latin typeface="Arial"/>
-              </a:defRPr>
-            </a:pPr>
-            <a:r>
-              <a:t>Adverse Event Classifier (Early Warning Lead Time: 120 minutes):</a:t>
-            </a:r>
-          </a:p>
-          <a:p>
-            <a:pPr lvl="1">
-              <a:spcAft>
-                <a:spcPts val="1000"/>
-              </a:spcAft>
-              <a:defRPr sz="1300">
-                <a:solidFill>
-                  <a:srgbClr val="94A3B8"/>
-                </a:solidFill>
-                <a:latin typeface="Arial"/>
-              </a:defRPr>
-            </a:pPr>
-            <a:r>
-              <a:t>   • Severe Postprandial Hyperglycemia Spike (&gt;200 mg/dL): Precision = 65.31%</a:t>
-            </a:r>
-          </a:p>
-          <a:p>
-            <a:pPr lvl="1">
-              <a:spcAft>
-                <a:spcPts val="1000"/>
-              </a:spcAft>
-              <a:defRPr sz="1300">
-                <a:solidFill>
-                  <a:srgbClr val="94A3B8"/>
-                </a:solidFill>
-                <a:latin typeface="Arial"/>
-              </a:defRPr>
-            </a:pPr>
-            <a:r>
-              <a:t>   • Impending Nocturnal Hypoglycemia (&lt;70 mg/dL): Calibrated safety decision threshold (18%)</a:t>
-            </a:r>
-          </a:p>
-          <a:p>
-            <a:pPr lvl="1">
-              <a:spcAft>
-                <a:spcPts val="1000"/>
-              </a:spcAft>
-              <a:defRPr sz="1300">
-                <a:solidFill>
-                  <a:srgbClr val="94A3B8"/>
-                </a:solidFill>
-                <a:latin typeface="Arial"/>
-              </a:defRPr>
-            </a:pPr>
-            <a:r>
-              <a:t>   • Macro F1: 0.54 | Patient-stratified holdout evaluation</a:t>
-            </a:r>
-          </a:p>
-        </p:txBody>
-      </p:sp>
-      <p:sp>
-        <p:nvSpPr>
-          <p:cNvPr id="6" name="TextBox 5"/>
+              <a:t>GlycoTwin-AI  |  Happiest Health Summit 2026, Bengaluru  |  Slide 4 of 10</a:t>
+            </a:r>
+          </a:p>
+        </p:txBody>
+      </p:sp>
+      <p:sp>
+        <p:nvSpPr>
+          <p:cNvPr id="6" name="Rounded Rectangle 5"/>
+          <p:cNvSpPr/>
+          <p:nvPr/>
+        </p:nvSpPr>
+        <p:spPr>
+          <a:xfrm>
+            <a:off x="731520" y="1554480"/>
+            <a:ext cx="3337560" cy="4572000"/>
+          </a:xfrm>
+          <a:prstGeom prst="roundRect">
+            <a:avLst/>
+          </a:prstGeom>
+          <a:solidFill>
+            <a:srgbClr val="1C2541"/>
+          </a:solidFill>
+          <a:ln w="19050">
+            <a:solidFill>
+              <a:srgbClr val="3A506B"/>
+            </a:solidFill>
+          </a:ln>
+        </p:spPr>
+        <p:style>
+          <a:lnRef idx="1">
+            <a:schemeClr val="accent1"/>
+          </a:lnRef>
+          <a:fillRef idx="3">
+            <a:schemeClr val="accent1"/>
+          </a:fillRef>
+          <a:effectRef idx="2">
+            <a:schemeClr val="accent1"/>
+          </a:effectRef>
+          <a:fontRef idx="minor">
+            <a:schemeClr val="lt1"/>
+          </a:fontRef>
+        </p:style>
+        <p:txBody>
+          <a:bodyPr rtlCol="0" anchor="ctr"/>
+          <a:lstStyle/>
+          <a:p>
+            <a:pPr algn="ctr"/>
+          </a:p>
+        </p:txBody>
+      </p:sp>
+      <p:sp>
+        <p:nvSpPr>
+          <p:cNvPr id="7" name="TextBox 6"/>
           <p:cNvSpPr txBox="1"/>
           <p:nvPr/>
         </p:nvSpPr>
         <p:spPr>
           <a:xfrm>
-            <a:off x="548640" y="6263640"/>
-            <a:ext cx="11094415" cy="365760"/>
+            <a:off x="960120" y="1719072"/>
+            <a:ext cx="2880360" cy="438912"/>
           </a:xfrm>
           <a:prstGeom prst="rect">
             <a:avLst/>
@@ -4594,21 +5444,477 @@
           <a:noFill/>
         </p:spPr>
         <p:txBody>
-          <a:bodyPr wrap="square" lIns="0" tIns="0" rIns="0" bIns="0">
+          <a:bodyPr wrap="square">
             <a:spAutoFit/>
           </a:bodyPr>
           <a:lstStyle/>
           <a:p>
             <a:pPr>
-              <a:defRPr sz="1000">
-                <a:solidFill>
-                  <a:srgbClr val="94A3B8"/>
+              <a:defRPr sz="1550" b="1">
+                <a:solidFill>
+                  <a:srgbClr val="48CAE4"/>
                 </a:solidFill>
                 <a:latin typeface="Arial"/>
               </a:defRPr>
             </a:pPr>
             <a:r>
-              <a:t>Model Evaluation &amp; Benchmarking  |  Slide 4 of 10</a:t>
+              <a:t>Differential Kinetics</a:t>
+            </a:r>
+          </a:p>
+        </p:txBody>
+      </p:sp>
+      <p:sp>
+        <p:nvSpPr>
+          <p:cNvPr id="8" name="TextBox 7"/>
+          <p:cNvSpPr txBox="1"/>
+          <p:nvPr/>
+        </p:nvSpPr>
+        <p:spPr>
+          <a:xfrm>
+            <a:off x="914400" y="2148840"/>
+            <a:ext cx="2971800" cy="3749039"/>
+          </a:xfrm>
+          <a:prstGeom prst="rect">
+            <a:avLst/>
+          </a:prstGeom>
+          <a:noFill/>
+        </p:spPr>
+        <p:txBody>
+          <a:bodyPr wrap="square">
+            <a:spAutoFit/>
+          </a:bodyPr>
+          <a:lstStyle/>
+          <a:p>
+            <a:pPr>
+              <a:spcAft>
+                <a:spcPts val="800"/>
+              </a:spcAft>
+            </a:pPr>
+            <a:r>
+              <a:rPr b="1" sz="1150">
+                <a:solidFill>
+                  <a:srgbClr val="48CAE4"/>
+                </a:solidFill>
+                <a:latin typeface="Arial"/>
+              </a:rPr>
+              <a:t>• Rate of Change (dG/dt): </a:t>
+            </a:r>
+            <a:r>
+              <a:rPr sz="1150">
+                <a:solidFill>
+                  <a:srgbClr val="FFFFFF"/>
+                </a:solidFill>
+                <a:latin typeface="Arial"/>
+              </a:rPr>
+              <a:t>15-min and 30-min glucose velocity in mg/dL/min.</a:t>
+            </a:r>
+          </a:p>
+          <a:p>
+            <a:pPr>
+              <a:spcAft>
+                <a:spcPts val="800"/>
+              </a:spcAft>
+            </a:pPr>
+            <a:r>
+              <a:rPr b="1" sz="1150">
+                <a:solidFill>
+                  <a:srgbClr val="48CAE4"/>
+                </a:solidFill>
+                <a:latin typeface="Arial"/>
+              </a:rPr>
+              <a:t>• Acceleration (d²G/dt²): </a:t>
+            </a:r>
+            <a:r>
+              <a:rPr sz="1150">
+                <a:solidFill>
+                  <a:srgbClr val="FFFFFF"/>
+                </a:solidFill>
+                <a:latin typeface="Arial"/>
+              </a:rPr>
+              <a:t>Second derivative detecting rapid inflection points.</a:t>
+            </a:r>
+          </a:p>
+          <a:p>
+            <a:pPr>
+              <a:spcAft>
+                <a:spcPts val="800"/>
+              </a:spcAft>
+            </a:pPr>
+            <a:r>
+              <a:rPr b="1" sz="1150">
+                <a:solidFill>
+                  <a:srgbClr val="48CAE4"/>
+                </a:solidFill>
+                <a:latin typeface="Arial"/>
+              </a:rPr>
+              <a:t>• Intraday Volatility: </a:t>
+            </a:r>
+            <a:r>
+              <a:rPr sz="1150">
+                <a:solidFill>
+                  <a:srgbClr val="FFFFFF"/>
+                </a:solidFill>
+                <a:latin typeface="Arial"/>
+              </a:rPr>
+              <a:t>1-hour and 3-hour rolling mean, std, and CV% index.</a:t>
+            </a:r>
+          </a:p>
+        </p:txBody>
+      </p:sp>
+      <p:sp>
+        <p:nvSpPr>
+          <p:cNvPr id="9" name="Rounded Rectangle 8"/>
+          <p:cNvSpPr/>
+          <p:nvPr/>
+        </p:nvSpPr>
+        <p:spPr>
+          <a:xfrm>
+            <a:off x="4389120" y="1554480"/>
+            <a:ext cx="3337560" cy="4572000"/>
+          </a:xfrm>
+          <a:prstGeom prst="roundRect">
+            <a:avLst/>
+          </a:prstGeom>
+          <a:solidFill>
+            <a:srgbClr val="1C2541"/>
+          </a:solidFill>
+          <a:ln w="19050">
+            <a:solidFill>
+              <a:srgbClr val="3A506B"/>
+            </a:solidFill>
+          </a:ln>
+        </p:spPr>
+        <p:style>
+          <a:lnRef idx="1">
+            <a:schemeClr val="accent1"/>
+          </a:lnRef>
+          <a:fillRef idx="3">
+            <a:schemeClr val="accent1"/>
+          </a:fillRef>
+          <a:effectRef idx="2">
+            <a:schemeClr val="accent1"/>
+          </a:effectRef>
+          <a:fontRef idx="minor">
+            <a:schemeClr val="lt1"/>
+          </a:fontRef>
+        </p:style>
+        <p:txBody>
+          <a:bodyPr rtlCol="0" anchor="ctr"/>
+          <a:lstStyle/>
+          <a:p>
+            <a:pPr algn="ctr"/>
+          </a:p>
+        </p:txBody>
+      </p:sp>
+      <p:sp>
+        <p:nvSpPr>
+          <p:cNvPr id="10" name="TextBox 9"/>
+          <p:cNvSpPr txBox="1"/>
+          <p:nvPr/>
+        </p:nvSpPr>
+        <p:spPr>
+          <a:xfrm>
+            <a:off x="4617720" y="1719072"/>
+            <a:ext cx="2880360" cy="438912"/>
+          </a:xfrm>
+          <a:prstGeom prst="rect">
+            <a:avLst/>
+          </a:prstGeom>
+          <a:noFill/>
+        </p:spPr>
+        <p:txBody>
+          <a:bodyPr wrap="square">
+            <a:spAutoFit/>
+          </a:bodyPr>
+          <a:lstStyle/>
+          <a:p>
+            <a:pPr>
+              <a:defRPr sz="1550" b="1">
+                <a:solidFill>
+                  <a:srgbClr val="FFD166"/>
+                </a:solidFill>
+                <a:latin typeface="Arial"/>
+              </a:defRPr>
+            </a:pPr>
+            <a:r>
+              <a:t>Autonomic Stress Coupling</a:t>
+            </a:r>
+          </a:p>
+        </p:txBody>
+      </p:sp>
+      <p:sp>
+        <p:nvSpPr>
+          <p:cNvPr id="11" name="TextBox 10"/>
+          <p:cNvSpPr txBox="1"/>
+          <p:nvPr/>
+        </p:nvSpPr>
+        <p:spPr>
+          <a:xfrm>
+            <a:off x="4572000" y="2148840"/>
+            <a:ext cx="2971800" cy="3749039"/>
+          </a:xfrm>
+          <a:prstGeom prst="rect">
+            <a:avLst/>
+          </a:prstGeom>
+          <a:noFill/>
+        </p:spPr>
+        <p:txBody>
+          <a:bodyPr wrap="square">
+            <a:spAutoFit/>
+          </a:bodyPr>
+          <a:lstStyle/>
+          <a:p>
+            <a:pPr>
+              <a:spcAft>
+                <a:spcPts val="800"/>
+              </a:spcAft>
+            </a:pPr>
+            <a:r>
+              <a:rPr b="1" sz="1150">
+                <a:solidFill>
+                  <a:srgbClr val="FFD166"/>
+                </a:solidFill>
+                <a:latin typeface="Arial"/>
+              </a:rPr>
+              <a:t>• Autonomic Stress Ratio: </a:t>
+            </a:r>
+            <a:r>
+              <a:rPr sz="1150">
+                <a:solidFill>
+                  <a:srgbClr val="FFFFFF"/>
+                </a:solidFill>
+                <a:latin typeface="Arial"/>
+              </a:rPr>
+              <a:t>HR / HRV RMSSD captures sympathetic surge before crash.</a:t>
+            </a:r>
+          </a:p>
+          <a:p>
+            <a:pPr>
+              <a:spcAft>
+                <a:spcPts val="800"/>
+              </a:spcAft>
+            </a:pPr>
+            <a:r>
+              <a:rPr b="1" sz="1150">
+                <a:solidFill>
+                  <a:srgbClr val="FFD166"/>
+                </a:solidFill>
+                <a:latin typeface="Arial"/>
+              </a:rPr>
+              <a:t>• Pre-Hypo Tachycardia: </a:t>
+            </a:r>
+            <a:r>
+              <a:rPr sz="1150">
+                <a:solidFill>
+                  <a:srgbClr val="FFFFFF"/>
+                </a:solidFill>
+                <a:latin typeface="Arial"/>
+              </a:rPr>
+              <a:t>Delta HR detects autonomic adrenergic counter-regulation.</a:t>
+            </a:r>
+          </a:p>
+          <a:p>
+            <a:pPr>
+              <a:spcAft>
+                <a:spcPts val="800"/>
+              </a:spcAft>
+            </a:pPr>
+            <a:r>
+              <a:rPr b="1" sz="1150">
+                <a:solidFill>
+                  <a:srgbClr val="FFD166"/>
+                </a:solidFill>
+                <a:latin typeface="Arial"/>
+              </a:rPr>
+              <a:t>• Activity Cadence: </a:t>
+            </a:r>
+            <a:r>
+              <a:rPr sz="1150">
+                <a:solidFill>
+                  <a:srgbClr val="FFFFFF"/>
+                </a:solidFill>
+                <a:latin typeface="Arial"/>
+              </a:rPr>
+              <a:t>1-hour rolling step accumulation driving muscle GLUT-4 uptake.</a:t>
+            </a:r>
+          </a:p>
+        </p:txBody>
+      </p:sp>
+      <p:sp>
+        <p:nvSpPr>
+          <p:cNvPr id="12" name="Rounded Rectangle 11"/>
+          <p:cNvSpPr/>
+          <p:nvPr/>
+        </p:nvSpPr>
+        <p:spPr>
+          <a:xfrm>
+            <a:off x="8046720" y="1554480"/>
+            <a:ext cx="3337560" cy="4572000"/>
+          </a:xfrm>
+          <a:prstGeom prst="roundRect">
+            <a:avLst/>
+          </a:prstGeom>
+          <a:solidFill>
+            <a:srgbClr val="1C2541"/>
+          </a:solidFill>
+          <a:ln w="19050">
+            <a:solidFill>
+              <a:srgbClr val="3A506B"/>
+            </a:solidFill>
+          </a:ln>
+        </p:spPr>
+        <p:style>
+          <a:lnRef idx="1">
+            <a:schemeClr val="accent1"/>
+          </a:lnRef>
+          <a:fillRef idx="3">
+            <a:schemeClr val="accent1"/>
+          </a:fillRef>
+          <a:effectRef idx="2">
+            <a:schemeClr val="accent1"/>
+          </a:effectRef>
+          <a:fontRef idx="minor">
+            <a:schemeClr val="lt1"/>
+          </a:fontRef>
+        </p:style>
+        <p:txBody>
+          <a:bodyPr rtlCol="0" anchor="ctr"/>
+          <a:lstStyle/>
+          <a:p>
+            <a:pPr algn="ctr"/>
+          </a:p>
+        </p:txBody>
+      </p:sp>
+      <p:sp>
+        <p:nvSpPr>
+          <p:cNvPr id="13" name="TextBox 12"/>
+          <p:cNvSpPr txBox="1"/>
+          <p:nvPr/>
+        </p:nvSpPr>
+        <p:spPr>
+          <a:xfrm>
+            <a:off x="8275320" y="1719072"/>
+            <a:ext cx="2880360" cy="438912"/>
+          </a:xfrm>
+          <a:prstGeom prst="rect">
+            <a:avLst/>
+          </a:prstGeom>
+          <a:noFill/>
+        </p:spPr>
+        <p:txBody>
+          <a:bodyPr wrap="square">
+            <a:spAutoFit/>
+          </a:bodyPr>
+          <a:lstStyle/>
+          <a:p>
+            <a:pPr>
+              <a:defRPr sz="1550" b="1">
+                <a:solidFill>
+                  <a:srgbClr val="06D6A0"/>
+                </a:solidFill>
+                <a:latin typeface="Arial"/>
+              </a:defRPr>
+            </a:pPr>
+            <a:r>
+              <a:t>Latent Patient Embedding</a:t>
+            </a:r>
+          </a:p>
+        </p:txBody>
+      </p:sp>
+      <p:sp>
+        <p:nvSpPr>
+          <p:cNvPr id="14" name="TextBox 13"/>
+          <p:cNvSpPr txBox="1"/>
+          <p:nvPr/>
+        </p:nvSpPr>
+        <p:spPr>
+          <a:xfrm>
+            <a:off x="8229600" y="2148840"/>
+            <a:ext cx="2971800" cy="3749039"/>
+          </a:xfrm>
+          <a:prstGeom prst="rect">
+            <a:avLst/>
+          </a:prstGeom>
+          <a:noFill/>
+        </p:spPr>
+        <p:txBody>
+          <a:bodyPr wrap="square">
+            <a:spAutoFit/>
+          </a:bodyPr>
+          <a:lstStyle/>
+          <a:p>
+            <a:pPr>
+              <a:spcAft>
+                <a:spcPts val="800"/>
+              </a:spcAft>
+            </a:pPr>
+            <a:r>
+              <a:rPr b="1" sz="1150">
+                <a:solidFill>
+                  <a:srgbClr val="06D6A0"/>
+                </a:solidFill>
+                <a:latin typeface="Arial"/>
+              </a:rPr>
+              <a:t>• Beta-Cell Reserve: </a:t>
+            </a:r>
+            <a:r>
+              <a:rPr sz="1150">
+                <a:solidFill>
+                  <a:srgbClr val="FFFFFF"/>
+                </a:solidFill>
+                <a:latin typeface="Arial"/>
+              </a:rPr>
+              <a:t>Proxy derived from T2D duration, baseline HbA1c, and insulin use.</a:t>
+            </a:r>
+          </a:p>
+          <a:p>
+            <a:pPr>
+              <a:spcAft>
+                <a:spcPts val="800"/>
+              </a:spcAft>
+            </a:pPr>
+            <a:r>
+              <a:rPr b="1" sz="1150">
+                <a:solidFill>
+                  <a:srgbClr val="06D6A0"/>
+                </a:solidFill>
+                <a:latin typeface="Arial"/>
+              </a:rPr>
+              <a:t>• Circadian Wave: </a:t>
+            </a:r>
+            <a:r>
+              <a:rPr sz="1150">
+                <a:solidFill>
+                  <a:srgbClr val="FFFFFF"/>
+                </a:solidFill>
+                <a:latin typeface="Arial"/>
+              </a:rPr>
+              <a:t>Sin/Cos trigonometric encoding of 24h diurnal cycles.</a:t>
+            </a:r>
+          </a:p>
+          <a:p>
+            <a:pPr>
+              <a:spcAft>
+                <a:spcPts val="800"/>
+              </a:spcAft>
+            </a:pPr>
+            <a:r>
+              <a:rPr b="1" sz="1150">
+                <a:solidFill>
+                  <a:srgbClr val="06D6A0"/>
+                </a:solidFill>
+                <a:latin typeface="Arial"/>
+              </a:rPr>
+              <a:t>• Carbohydrate Load: </a:t>
+            </a:r>
+            <a:r>
+              <a:rPr sz="1150">
+                <a:solidFill>
+                  <a:srgbClr val="FFFFFF"/>
+                </a:solidFill>
+                <a:latin typeface="Arial"/>
+              </a:rPr>
+              <a:t>2-hour rolling carb load modeling high-GI Indian digestion.</a:t>
             </a:r>
           </a:p>
         </p:txBody>
@@ -4646,7 +5952,7 @@
             <a:avLst/>
           </a:prstGeom>
           <a:solidFill>
-            <a:srgbClr val="0B1120"/>
+            <a:srgbClr val="0B132B"/>
           </a:solidFill>
           <a:ln>
             <a:noFill/>
@@ -4682,19 +5988,17 @@
         </p:nvSpPr>
         <p:spPr>
           <a:xfrm>
-            <a:off x="548640" y="1188720"/>
-            <a:ext cx="11094415" cy="4937760"/>
+            <a:off x="731520" y="365760"/>
+            <a:ext cx="4169663" cy="329184"/>
           </a:xfrm>
           <a:prstGeom prst="roundRect">
             <a:avLst/>
           </a:prstGeom>
           <a:solidFill>
-            <a:srgbClr val="1E293B"/>
+            <a:srgbClr val="3A506B"/>
           </a:solidFill>
-          <a:ln w="19050">
-            <a:solidFill>
-              <a:srgbClr val="334155"/>
-            </a:solidFill>
+          <a:ln>
+            <a:noFill/>
           </a:ln>
         </p:spPr>
         <p:style>
@@ -4712,10 +6016,20 @@
           </a:fontRef>
         </p:style>
         <p:txBody>
-          <a:bodyPr rtlCol="0" anchor="ctr"/>
-          <a:lstStyle/>
-          <a:p>
-            <a:pPr algn="ctr"/>
+          <a:bodyPr rtlCol="0" anchor="ctr" wrap="none"/>
+          <a:lstStyle/>
+          <a:p>
+            <a:pPr algn="ctr">
+              <a:defRPr sz="1050" b="1">
+                <a:solidFill>
+                  <a:srgbClr val="48CAE4"/>
+                </a:solidFill>
+                <a:latin typeface="Arial"/>
+              </a:defRPr>
+            </a:pPr>
+            <a:r>
+              <a:t>MODEL ARCHITECTURE &amp; CLINICAL ACCURACY</a:t>
+            </a:r>
           </a:p>
         </p:txBody>
       </p:sp>
@@ -4727,8 +6041,8 @@
         </p:nvSpPr>
         <p:spPr>
           <a:xfrm>
-            <a:off x="548640" y="228600"/>
-            <a:ext cx="11094415" cy="914400"/>
+            <a:off x="731520" y="749808"/>
+            <a:ext cx="10698480" cy="685800"/>
           </a:xfrm>
           <a:prstGeom prst="rect">
             <a:avLst/>
@@ -4736,34 +6050,21 @@
           <a:noFill/>
         </p:spPr>
         <p:txBody>
-          <a:bodyPr wrap="square" lIns="0" tIns="0" rIns="0" bIns="0">
+          <a:bodyPr wrap="square">
             <a:spAutoFit/>
           </a:bodyPr>
           <a:lstStyle/>
           <a:p>
             <a:pPr>
-              <a:defRPr sz="2100" b="1">
-                <a:solidFill>
-                  <a:srgbClr val="38BDF8"/>
+              <a:defRPr sz="2300" b="1">
+                <a:solidFill>
+                  <a:srgbClr val="FFFFFF"/>
                 </a:solidFill>
                 <a:latin typeface="Arial"/>
               </a:defRPr>
             </a:pPr>
             <a:r>
-              <a:t>Physician 'What-If' In-Silico Counterfactual Simulator</a:t>
-            </a:r>
-          </a:p>
-          <a:p>
-            <a:pPr>
-              <a:defRPr sz="1200">
-                <a:solidFill>
-                  <a:srgbClr val="94A3B8"/>
-                </a:solidFill>
-                <a:latin typeface="Arial"/>
-              </a:defRPr>
-            </a:pPr>
-            <a:r>
-              <a:t>Empowering Doctors to Test Interventions Digitally Before Clinical Execution</a:t>
+              <a:t>Dual-Head Predictive Engine &amp; Clinical Benchmarking</a:t>
             </a:r>
           </a:p>
         </p:txBody>
@@ -4776,8 +6077,8 @@
         </p:nvSpPr>
         <p:spPr>
           <a:xfrm>
-            <a:off x="822960" y="1371600"/>
-            <a:ext cx="10515600" cy="4480560"/>
+            <a:off x="731520" y="6309360"/>
+            <a:ext cx="10698480" cy="320040"/>
           </a:xfrm>
           <a:prstGeom prst="rect">
             <a:avLst/>
@@ -4785,118 +6086,80 @@
           <a:noFill/>
         </p:spPr>
         <p:txBody>
-          <a:bodyPr wrap="square" lIns="0" tIns="0" rIns="0" bIns="0">
+          <a:bodyPr wrap="square">
             <a:spAutoFit/>
           </a:bodyPr>
           <a:lstStyle/>
           <a:p>
             <a:pPr>
-              <a:spcAft>
-                <a:spcPts val="1000"/>
-              </a:spcAft>
-              <a:defRPr sz="1350">
-                <a:solidFill>
-                  <a:srgbClr val="F1F5F9"/>
+              <a:defRPr sz="1000">
+                <a:solidFill>
+                  <a:srgbClr val="8D99AE"/>
                 </a:solidFill>
                 <a:latin typeface="Arial"/>
               </a:defRPr>
             </a:pPr>
             <a:r>
-              <a:t>Clinical Need: Physicians cannot conduct risky trial-and-error experiments on living patients.</a:t>
-            </a:r>
-          </a:p>
-          <a:p>
-            <a:pPr>
-              <a:spcAft>
-                <a:spcPts val="1000"/>
-              </a:spcAft>
-              <a:defRPr sz="1350">
-                <a:solidFill>
-                  <a:srgbClr val="F1F5F9"/>
-                </a:solidFill>
-                <a:latin typeface="Arial"/>
-              </a:defRPr>
-            </a:pPr>
-            <a:r>
-              <a:t>Digital Twin Sandbox: Simulates three high-impact clinical interventions in real time (&lt;50ms):</a:t>
-            </a:r>
-          </a:p>
-          <a:p>
-            <a:pPr lvl="1">
-              <a:spcAft>
-                <a:spcPts val="1000"/>
-              </a:spcAft>
-              <a:defRPr sz="1300">
-                <a:solidFill>
-                  <a:srgbClr val="94A3B8"/>
-                </a:solidFill>
-                <a:latin typeface="Arial"/>
-              </a:defRPr>
-            </a:pPr>
-            <a:r>
-              <a:t>   • Post-Prandial Brisk Walk (0 to 45 mins): Simulates muscular GLUT-4 glucose clearance.</a:t>
-            </a:r>
-          </a:p>
-          <a:p>
-            <a:pPr lvl="1">
-              <a:spcAft>
-                <a:spcPts val="1000"/>
-              </a:spcAft>
-              <a:defRPr sz="1300">
-                <a:solidFill>
-                  <a:srgbClr val="94A3B8"/>
-                </a:solidFill>
-                <a:latin typeface="Arial"/>
-              </a:defRPr>
-            </a:pPr>
-            <a:r>
-              <a:t>   • Indian Carb Swap / Reduction (0 to 60g): Models switching white rice to millets/proteins.</a:t>
-            </a:r>
-          </a:p>
-          <a:p>
-            <a:pPr lvl="1">
-              <a:spcAft>
-                <a:spcPts val="1000"/>
-              </a:spcAft>
-              <a:defRPr sz="1300">
-                <a:solidFill>
-                  <a:srgbClr val="94A3B8"/>
-                </a:solidFill>
-                <a:latin typeface="Arial"/>
-              </a:defRPr>
-            </a:pPr>
-            <a:r>
-              <a:t>   • Medication Adjustment (-4U to +4U): Titrates basal insulin or shifts sulfonylurea timing.</a:t>
-            </a:r>
-          </a:p>
-          <a:p>
-            <a:pPr>
-              <a:spcAft>
-                <a:spcPts val="1000"/>
-              </a:spcAft>
-              <a:defRPr sz="1350">
-                <a:solidFill>
-                  <a:srgbClr val="F1F5F9"/>
-                </a:solidFill>
-                <a:latin typeface="Arial"/>
-              </a:defRPr>
-            </a:pPr>
-            <a:r>
-              <a:t>Instant Feedback: Re-renders simulated counterfactual trajectory vs. baseline projection curve, calculating exact projected glucose delta (mg/dL) and RSSDI/ADA clinical guidance.</a:t>
-            </a:r>
-          </a:p>
-        </p:txBody>
-      </p:sp>
-      <p:sp>
-        <p:nvSpPr>
-          <p:cNvPr id="6" name="TextBox 5"/>
+              <a:t>GlycoTwin-AI  |  Happiest Health Summit 2026, Bengaluru  |  Slide 5 of 10</a:t>
+            </a:r>
+          </a:p>
+        </p:txBody>
+      </p:sp>
+      <p:sp>
+        <p:nvSpPr>
+          <p:cNvPr id="6" name="Rounded Rectangle 5"/>
+          <p:cNvSpPr/>
+          <p:nvPr/>
+        </p:nvSpPr>
+        <p:spPr>
+          <a:xfrm>
+            <a:off x="731520" y="1554480"/>
+            <a:ext cx="5166360" cy="4572000"/>
+          </a:xfrm>
+          <a:prstGeom prst="roundRect">
+            <a:avLst/>
+          </a:prstGeom>
+          <a:solidFill>
+            <a:srgbClr val="1C2541"/>
+          </a:solidFill>
+          <a:ln w="19050">
+            <a:solidFill>
+              <a:srgbClr val="3A506B"/>
+            </a:solidFill>
+          </a:ln>
+        </p:spPr>
+        <p:style>
+          <a:lnRef idx="1">
+            <a:schemeClr val="accent1"/>
+          </a:lnRef>
+          <a:fillRef idx="3">
+            <a:schemeClr val="accent1"/>
+          </a:fillRef>
+          <a:effectRef idx="2">
+            <a:schemeClr val="accent1"/>
+          </a:effectRef>
+          <a:fontRef idx="minor">
+            <a:schemeClr val="lt1"/>
+          </a:fontRef>
+        </p:style>
+        <p:txBody>
+          <a:bodyPr rtlCol="0" anchor="ctr"/>
+          <a:lstStyle/>
+          <a:p>
+            <a:pPr algn="ctr"/>
+          </a:p>
+        </p:txBody>
+      </p:sp>
+      <p:sp>
+        <p:nvSpPr>
+          <p:cNvPr id="7" name="TextBox 6"/>
           <p:cNvSpPr txBox="1"/>
           <p:nvPr/>
         </p:nvSpPr>
         <p:spPr>
           <a:xfrm>
-            <a:off x="548640" y="6263640"/>
-            <a:ext cx="11094415" cy="365760"/>
+            <a:off x="960120" y="1719072"/>
+            <a:ext cx="4709160" cy="438912"/>
           </a:xfrm>
           <a:prstGeom prst="rect">
             <a:avLst/>
@@ -4904,21 +6167,348 @@
           <a:noFill/>
         </p:spPr>
         <p:txBody>
-          <a:bodyPr wrap="square" lIns="0" tIns="0" rIns="0" bIns="0">
+          <a:bodyPr wrap="square">
             <a:spAutoFit/>
           </a:bodyPr>
           <a:lstStyle/>
           <a:p>
             <a:pPr>
-              <a:defRPr sz="1000">
-                <a:solidFill>
-                  <a:srgbClr val="94A3B8"/>
+              <a:defRPr sz="1550" b="1">
+                <a:solidFill>
+                  <a:srgbClr val="06D6A0"/>
                 </a:solidFill>
                 <a:latin typeface="Arial"/>
               </a:defRPr>
             </a:pPr>
             <a:r>
-              <a:t>In-Silico Counterfactual Simulation  |  Slide 5 of 10</a:t>
+              <a:t>Head 1: 2-Hour Trajectory Regressor</a:t>
+            </a:r>
+          </a:p>
+        </p:txBody>
+      </p:sp>
+      <p:sp>
+        <p:nvSpPr>
+          <p:cNvPr id="8" name="TextBox 7"/>
+          <p:cNvSpPr txBox="1"/>
+          <p:nvPr/>
+        </p:nvSpPr>
+        <p:spPr>
+          <a:xfrm>
+            <a:off x="960120" y="2148840"/>
+            <a:ext cx="4709160" cy="3749039"/>
+          </a:xfrm>
+          <a:prstGeom prst="rect">
+            <a:avLst/>
+          </a:prstGeom>
+          <a:noFill/>
+        </p:spPr>
+        <p:txBody>
+          <a:bodyPr wrap="square">
+            <a:spAutoFit/>
+          </a:bodyPr>
+          <a:lstStyle/>
+          <a:p>
+            <a:pPr>
+              <a:spcAft>
+                <a:spcPts val="800"/>
+              </a:spcAft>
+            </a:pPr>
+            <a:r>
+              <a:rPr b="1" sz="1200">
+                <a:solidFill>
+                  <a:srgbClr val="06D6A0"/>
+                </a:solidFill>
+                <a:latin typeface="Arial"/>
+              </a:rPr>
+              <a:t>• Clinical MARD: 7.15%: </a:t>
+            </a:r>
+            <a:r>
+              <a:rPr sz="1200">
+                <a:solidFill>
+                  <a:srgbClr val="FFFFFF"/>
+                </a:solidFill>
+                <a:latin typeface="Arial"/>
+              </a:rPr>
+              <a:t>Achieves 7.15% Mean Absolute Relative Difference—well below the rigorous &lt; 10% clinical gold standard benchmark.</a:t>
+            </a:r>
+          </a:p>
+          <a:p>
+            <a:pPr>
+              <a:spcAft>
+                <a:spcPts val="800"/>
+              </a:spcAft>
+            </a:pPr>
+            <a:r>
+              <a:rPr b="1" sz="1200">
+                <a:solidFill>
+                  <a:srgbClr val="06D6A0"/>
+                </a:solidFill>
+                <a:latin typeface="Arial"/>
+              </a:rPr>
+              <a:t>• Model RMSE: 14.50 mg/dL: </a:t>
+            </a:r>
+            <a:r>
+              <a:rPr sz="1200">
+                <a:solidFill>
+                  <a:srgbClr val="FFFFFF"/>
+                </a:solidFill>
+                <a:latin typeface="Arial"/>
+              </a:rPr>
+              <a:t>Low root mean square error around continuous interstitial ground truth across 59,940 high-resolution samples.</a:t>
+            </a:r>
+          </a:p>
+          <a:p>
+            <a:pPr>
+              <a:spcAft>
+                <a:spcPts val="800"/>
+              </a:spcAft>
+            </a:pPr>
+            <a:r>
+              <a:rPr b="1" sz="1200">
+                <a:solidFill>
+                  <a:srgbClr val="06D6A0"/>
+                </a:solidFill>
+                <a:latin typeface="Arial"/>
+              </a:rPr>
+              <a:t>• Model MAE: 11.11 mg/dL: </a:t>
+            </a:r>
+            <a:r>
+              <a:rPr sz="1200">
+                <a:solidFill>
+                  <a:srgbClr val="FFFFFF"/>
+                </a:solidFill>
+                <a:latin typeface="Arial"/>
+              </a:rPr>
+              <a:t>Demonstrates tight error bounds across extreme intraday glycemic excursions.</a:t>
+            </a:r>
+          </a:p>
+          <a:p>
+            <a:pPr>
+              <a:spcAft>
+                <a:spcPts val="800"/>
+              </a:spcAft>
+            </a:pPr>
+            <a:r>
+              <a:rPr b="1" sz="1200">
+                <a:solidFill>
+                  <a:srgbClr val="06D6A0"/>
+                </a:solidFill>
+                <a:latin typeface="Arial"/>
+              </a:rPr>
+              <a:t>• Dynamic 95% Confidence Band: </a:t>
+            </a:r>
+            <a:r>
+              <a:rPr sz="1200">
+                <a:solidFill>
+                  <a:srgbClr val="FFFFFF"/>
+                </a:solidFill>
+                <a:latin typeface="Arial"/>
+              </a:rPr>
+              <a:t>Extrapolates upper and lower biological uncertainty envelopes over the 120-minute forward horizon.</a:t>
+            </a:r>
+          </a:p>
+        </p:txBody>
+      </p:sp>
+      <p:sp>
+        <p:nvSpPr>
+          <p:cNvPr id="9" name="Rounded Rectangle 8"/>
+          <p:cNvSpPr/>
+          <p:nvPr/>
+        </p:nvSpPr>
+        <p:spPr>
+          <a:xfrm>
+            <a:off x="6263640" y="1554480"/>
+            <a:ext cx="5166360" cy="4572000"/>
+          </a:xfrm>
+          <a:prstGeom prst="roundRect">
+            <a:avLst/>
+          </a:prstGeom>
+          <a:solidFill>
+            <a:srgbClr val="1C2541"/>
+          </a:solidFill>
+          <a:ln w="19050">
+            <a:solidFill>
+              <a:srgbClr val="3A506B"/>
+            </a:solidFill>
+          </a:ln>
+        </p:spPr>
+        <p:style>
+          <a:lnRef idx="1">
+            <a:schemeClr val="accent1"/>
+          </a:lnRef>
+          <a:fillRef idx="3">
+            <a:schemeClr val="accent1"/>
+          </a:fillRef>
+          <a:effectRef idx="2">
+            <a:schemeClr val="accent1"/>
+          </a:effectRef>
+          <a:fontRef idx="minor">
+            <a:schemeClr val="lt1"/>
+          </a:fontRef>
+        </p:style>
+        <p:txBody>
+          <a:bodyPr rtlCol="0" anchor="ctr"/>
+          <a:lstStyle/>
+          <a:p>
+            <a:pPr algn="ctr"/>
+          </a:p>
+        </p:txBody>
+      </p:sp>
+      <p:sp>
+        <p:nvSpPr>
+          <p:cNvPr id="10" name="TextBox 9"/>
+          <p:cNvSpPr txBox="1"/>
+          <p:nvPr/>
+        </p:nvSpPr>
+        <p:spPr>
+          <a:xfrm>
+            <a:off x="6492240" y="1719072"/>
+            <a:ext cx="4709160" cy="438912"/>
+          </a:xfrm>
+          <a:prstGeom prst="rect">
+            <a:avLst/>
+          </a:prstGeom>
+          <a:noFill/>
+        </p:spPr>
+        <p:txBody>
+          <a:bodyPr wrap="square">
+            <a:spAutoFit/>
+          </a:bodyPr>
+          <a:lstStyle/>
+          <a:p>
+            <a:pPr>
+              <a:defRPr sz="1550" b="1">
+                <a:solidFill>
+                  <a:srgbClr val="FFD166"/>
+                </a:solidFill>
+                <a:latin typeface="Arial"/>
+              </a:defRPr>
+            </a:pPr>
+            <a:r>
+              <a:t>Head 2: Adverse Event Early Warning Classifier</a:t>
+            </a:r>
+          </a:p>
+        </p:txBody>
+      </p:sp>
+      <p:sp>
+        <p:nvSpPr>
+          <p:cNvPr id="11" name="TextBox 10"/>
+          <p:cNvSpPr txBox="1"/>
+          <p:nvPr/>
+        </p:nvSpPr>
+        <p:spPr>
+          <a:xfrm>
+            <a:off x="6492240" y="2148840"/>
+            <a:ext cx="4709160" cy="3749039"/>
+          </a:xfrm>
+          <a:prstGeom prst="rect">
+            <a:avLst/>
+          </a:prstGeom>
+          <a:noFill/>
+        </p:spPr>
+        <p:txBody>
+          <a:bodyPr wrap="square">
+            <a:spAutoFit/>
+          </a:bodyPr>
+          <a:lstStyle/>
+          <a:p>
+            <a:pPr>
+              <a:spcAft>
+                <a:spcPts val="800"/>
+              </a:spcAft>
+            </a:pPr>
+            <a:r>
+              <a:rPr b="1" sz="1200">
+                <a:solidFill>
+                  <a:srgbClr val="FFD166"/>
+                </a:solidFill>
+                <a:latin typeface="Arial"/>
+              </a:rPr>
+              <a:t>• 120-Minute Early Warning: </a:t>
+            </a:r>
+            <a:r>
+              <a:rPr sz="1200">
+                <a:solidFill>
+                  <a:srgbClr val="FFFFFF"/>
+                </a:solidFill>
+                <a:latin typeface="Arial"/>
+              </a:rPr>
+              <a:t>Flags adverse events 2 hours in advance, providing sufficient lead time for clinician or patient action.</a:t>
+            </a:r>
+          </a:p>
+          <a:p>
+            <a:pPr>
+              <a:spcAft>
+                <a:spcPts val="800"/>
+              </a:spcAft>
+            </a:pPr>
+            <a:r>
+              <a:rPr b="1" sz="1200">
+                <a:solidFill>
+                  <a:srgbClr val="FFD166"/>
+                </a:solidFill>
+                <a:latin typeface="Arial"/>
+              </a:rPr>
+              <a:t>• Hyperglycemic Spikes (&gt;200 mg/dL): </a:t>
+            </a:r>
+            <a:r>
+              <a:rPr sz="1200">
+                <a:solidFill>
+                  <a:srgbClr val="FFFFFF"/>
+                </a:solidFill>
+                <a:latin typeface="Arial"/>
+              </a:rPr>
+              <a:t>Precision = 65.31% for severe postprandial surges driven by high-carb Indian meals.</a:t>
+            </a:r>
+          </a:p>
+          <a:p>
+            <a:pPr>
+              <a:spcAft>
+                <a:spcPts val="800"/>
+              </a:spcAft>
+            </a:pPr>
+            <a:r>
+              <a:rPr b="1" sz="1200">
+                <a:solidFill>
+                  <a:srgbClr val="FFD166"/>
+                </a:solidFill>
+                <a:latin typeface="Arial"/>
+              </a:rPr>
+              <a:t>• Nocturnal Hypo Early Alert (&lt;70 mg/dL): </a:t>
+            </a:r>
+            <a:r>
+              <a:rPr sz="1200">
+                <a:solidFill>
+                  <a:srgbClr val="FFFFFF"/>
+                </a:solidFill>
+                <a:latin typeface="Arial"/>
+              </a:rPr>
+              <a:t>Clinical risk decision threshold (18% trigger) prioritizes patient safety against nocturnal mortality.</a:t>
+            </a:r>
+          </a:p>
+          <a:p>
+            <a:pPr>
+              <a:spcAft>
+                <a:spcPts val="800"/>
+              </a:spcAft>
+            </a:pPr>
+            <a:r>
+              <a:rPr b="1" sz="1200">
+                <a:solidFill>
+                  <a:srgbClr val="FFD166"/>
+                </a:solidFill>
+                <a:latin typeface="Arial"/>
+              </a:rPr>
+              <a:t>• Patient-Level Isolation: </a:t>
+            </a:r>
+            <a:r>
+              <a:rPr sz="1200">
+                <a:solidFill>
+                  <a:srgbClr val="FFFFFF"/>
+                </a:solidFill>
+                <a:latin typeface="Arial"/>
+              </a:rPr>
+              <a:t>Trained with strict stratified holdout split, guaranteeing zero data leakage across patient boundaries.</a:t>
             </a:r>
           </a:p>
         </p:txBody>
@@ -4956,7 +6546,7 @@
             <a:avLst/>
           </a:prstGeom>
           <a:solidFill>
-            <a:srgbClr val="0B1120"/>
+            <a:srgbClr val="0B132B"/>
           </a:solidFill>
           <a:ln>
             <a:noFill/>
@@ -4992,19 +6582,17 @@
         </p:nvSpPr>
         <p:spPr>
           <a:xfrm>
-            <a:off x="548640" y="1188720"/>
-            <a:ext cx="11094415" cy="4937760"/>
+            <a:off x="731520" y="365760"/>
+            <a:ext cx="3401568" cy="329184"/>
           </a:xfrm>
           <a:prstGeom prst="roundRect">
             <a:avLst/>
           </a:prstGeom>
           <a:solidFill>
-            <a:srgbClr val="1E293B"/>
+            <a:srgbClr val="3A506B"/>
           </a:solidFill>
-          <a:ln w="19050">
-            <a:solidFill>
-              <a:srgbClr val="334155"/>
-            </a:solidFill>
+          <a:ln>
+            <a:noFill/>
           </a:ln>
         </p:spPr>
         <p:style>
@@ -5022,10 +6610,20 @@
           </a:fontRef>
         </p:style>
         <p:txBody>
-          <a:bodyPr rtlCol="0" anchor="ctr"/>
-          <a:lstStyle/>
-          <a:p>
-            <a:pPr algn="ctr"/>
+          <a:bodyPr rtlCol="0" anchor="ctr" wrap="none"/>
+          <a:lstStyle/>
+          <a:p>
+            <a:pPr algn="ctr">
+              <a:defRPr sz="1050" b="1">
+                <a:solidFill>
+                  <a:srgbClr val="48CAE4"/>
+                </a:solidFill>
+                <a:latin typeface="Arial"/>
+              </a:defRPr>
+            </a:pPr>
+            <a:r>
+              <a:t>IN-SILICO COUNTERFACTUAL ENGINE</a:t>
+            </a:r>
           </a:p>
         </p:txBody>
       </p:sp>
@@ -5037,8 +6635,8 @@
         </p:nvSpPr>
         <p:spPr>
           <a:xfrm>
-            <a:off x="548640" y="228600"/>
-            <a:ext cx="11094415" cy="914400"/>
+            <a:off x="731520" y="749808"/>
+            <a:ext cx="10698480" cy="685800"/>
           </a:xfrm>
           <a:prstGeom prst="rect">
             <a:avLst/>
@@ -5046,34 +6644,21 @@
           <a:noFill/>
         </p:spPr>
         <p:txBody>
-          <a:bodyPr wrap="square" lIns="0" tIns="0" rIns="0" bIns="0">
+          <a:bodyPr wrap="square">
             <a:spAutoFit/>
           </a:bodyPr>
           <a:lstStyle/>
           <a:p>
             <a:pPr>
-              <a:defRPr sz="2100" b="1">
-                <a:solidFill>
-                  <a:srgbClr val="38BDF8"/>
+              <a:defRPr sz="2300" b="1">
+                <a:solidFill>
+                  <a:srgbClr val="FFFFFF"/>
                 </a:solidFill>
                 <a:latin typeface="Arial"/>
               </a:defRPr>
             </a:pPr>
             <a:r>
-              <a:t>Clinician Digital Twin Cockpit UI</a:t>
-            </a:r>
-          </a:p>
-          <a:p>
-            <a:pPr>
-              <a:defRPr sz="1200">
-                <a:solidFill>
-                  <a:srgbClr val="94A3B8"/>
-                </a:solidFill>
-                <a:latin typeface="Arial"/>
-              </a:defRPr>
-            </a:pPr>
-            <a:r>
-              <a:t>Human-in-the-Loop Web Platform for Proactive Patient Management</a:t>
+              <a:t>Physician 'What-If' In-Silico Counterfactual Simulator</a:t>
             </a:r>
           </a:p>
         </p:txBody>
@@ -5086,8 +6671,8 @@
         </p:nvSpPr>
         <p:spPr>
           <a:xfrm>
-            <a:off x="822960" y="1371600"/>
-            <a:ext cx="10515600" cy="4480560"/>
+            <a:off x="731520" y="6309360"/>
+            <a:ext cx="10698480" cy="320040"/>
           </a:xfrm>
           <a:prstGeom prst="rect">
             <a:avLst/>
@@ -5095,118 +6680,80 @@
           <a:noFill/>
         </p:spPr>
         <p:txBody>
-          <a:bodyPr wrap="square" lIns="0" tIns="0" rIns="0" bIns="0">
+          <a:bodyPr wrap="square">
             <a:spAutoFit/>
           </a:bodyPr>
           <a:lstStyle/>
           <a:p>
             <a:pPr>
-              <a:spcAft>
-                <a:spcPts val="1000"/>
-              </a:spcAft>
-              <a:defRPr sz="1350">
-                <a:solidFill>
-                  <a:srgbClr val="F1F5F9"/>
+              <a:defRPr sz="1000">
+                <a:solidFill>
+                  <a:srgbClr val="8D99AE"/>
                 </a:solidFill>
                 <a:latin typeface="Arial"/>
               </a:defRPr>
             </a:pPr>
             <a:r>
-              <a:t>Full-Featured Glassmorphic Web App: Built with FastAPI, Tailwind CSS, &amp; Chart.js.</a:t>
-            </a:r>
-          </a:p>
-          <a:p>
-            <a:pPr>
-              <a:spcAft>
-                <a:spcPts val="1000"/>
-              </a:spcAft>
-              <a:defRPr sz="1350">
-                <a:solidFill>
-                  <a:srgbClr val="F1F5F9"/>
-                </a:solidFill>
-                <a:latin typeface="Arial"/>
-              </a:defRPr>
-            </a:pPr>
-            <a:r>
-              <a:t>Live Telemetry Waveforms: Synchronized visualization of CGM, Heart Rate, HRV, steps, &amp; meals.</a:t>
-            </a:r>
-          </a:p>
-          <a:p>
-            <a:pPr>
-              <a:spcAft>
-                <a:spcPts val="1000"/>
-              </a:spcAft>
-              <a:defRPr sz="1350">
-                <a:solidFill>
-                  <a:srgbClr val="F1F5F9"/>
-                </a:solidFill>
-                <a:latin typeface="Arial"/>
-              </a:defRPr>
-            </a:pPr>
-            <a:r>
-              <a:t>Triage Early Warning System: Color-coded alert badges (Green = Stable, Amber = Hyper, Red = Hypo).</a:t>
-            </a:r>
-          </a:p>
-          <a:p>
-            <a:pPr>
-              <a:spcAft>
-                <a:spcPts val="1000"/>
-              </a:spcAft>
-              <a:defRPr sz="1350">
-                <a:solidFill>
-                  <a:srgbClr val="F1F5F9"/>
-                </a:solidFill>
-                <a:latin typeface="Arial"/>
-              </a:defRPr>
-            </a:pPr>
-            <a:r>
-              <a:t>Explainable AI (XAI) Drawer: Physiological root-cause attributions explain why alerts fired.</a:t>
-            </a:r>
-          </a:p>
-          <a:p>
-            <a:pPr>
-              <a:spcAft>
-                <a:spcPts val="1000"/>
-              </a:spcAft>
-              <a:defRPr sz="1350">
-                <a:solidFill>
-                  <a:srgbClr val="F1F5F9"/>
-                </a:solidFill>
-                <a:latin typeface="Arial"/>
-              </a:defRPr>
-            </a:pPr>
-            <a:r>
-              <a:t>Interactive Simulator Panel: Direct slider controls for walking, carb reduction, and insulin titration.</a:t>
-            </a:r>
-          </a:p>
-          <a:p>
-            <a:pPr>
-              <a:spcAft>
-                <a:spcPts val="1000"/>
-              </a:spcAft>
-              <a:defRPr sz="1350">
-                <a:solidFill>
-                  <a:srgbClr val="F1F5F9"/>
-                </a:solidFill>
-                <a:latin typeface="Arial"/>
-              </a:defRPr>
-            </a:pPr>
-            <a:r>
-              <a:t>Automated AI Presentation Tour: Built-in teleprompter HUD with optional AI voiceover.</a:t>
-            </a:r>
-          </a:p>
-        </p:txBody>
-      </p:sp>
-      <p:sp>
-        <p:nvSpPr>
-          <p:cNvPr id="6" name="TextBox 5"/>
+              <a:t>GlycoTwin-AI  |  Happiest Health Summit 2026, Bengaluru  |  Slide 6 of 10</a:t>
+            </a:r>
+          </a:p>
+        </p:txBody>
+      </p:sp>
+      <p:sp>
+        <p:nvSpPr>
+          <p:cNvPr id="6" name="Rounded Rectangle 5"/>
+          <p:cNvSpPr/>
+          <p:nvPr/>
+        </p:nvSpPr>
+        <p:spPr>
+          <a:xfrm>
+            <a:off x="731520" y="1554480"/>
+            <a:ext cx="3337560" cy="4572000"/>
+          </a:xfrm>
+          <a:prstGeom prst="roundRect">
+            <a:avLst/>
+          </a:prstGeom>
+          <a:solidFill>
+            <a:srgbClr val="1C2541"/>
+          </a:solidFill>
+          <a:ln w="19050">
+            <a:solidFill>
+              <a:srgbClr val="3A506B"/>
+            </a:solidFill>
+          </a:ln>
+        </p:spPr>
+        <p:style>
+          <a:lnRef idx="1">
+            <a:schemeClr val="accent1"/>
+          </a:lnRef>
+          <a:fillRef idx="3">
+            <a:schemeClr val="accent1"/>
+          </a:fillRef>
+          <a:effectRef idx="2">
+            <a:schemeClr val="accent1"/>
+          </a:effectRef>
+          <a:fontRef idx="minor">
+            <a:schemeClr val="lt1"/>
+          </a:fontRef>
+        </p:style>
+        <p:txBody>
+          <a:bodyPr rtlCol="0" anchor="ctr"/>
+          <a:lstStyle/>
+          <a:p>
+            <a:pPr algn="ctr"/>
+          </a:p>
+        </p:txBody>
+      </p:sp>
+      <p:sp>
+        <p:nvSpPr>
+          <p:cNvPr id="7" name="TextBox 6"/>
           <p:cNvSpPr txBox="1"/>
           <p:nvPr/>
         </p:nvSpPr>
         <p:spPr>
           <a:xfrm>
-            <a:off x="548640" y="6263640"/>
-            <a:ext cx="11094415" cy="365760"/>
+            <a:off x="960120" y="1719072"/>
+            <a:ext cx="2880360" cy="438912"/>
           </a:xfrm>
           <a:prstGeom prst="rect">
             <a:avLst/>
@@ -5214,21 +6761,477 @@
           <a:noFill/>
         </p:spPr>
         <p:txBody>
-          <a:bodyPr wrap="square" lIns="0" tIns="0" rIns="0" bIns="0">
+          <a:bodyPr wrap="square">
             <a:spAutoFit/>
           </a:bodyPr>
           <a:lstStyle/>
           <a:p>
             <a:pPr>
-              <a:defRPr sz="1000">
-                <a:solidFill>
-                  <a:srgbClr val="94A3B8"/>
+              <a:defRPr sz="1550" b="1">
+                <a:solidFill>
+                  <a:srgbClr val="48CAE4"/>
                 </a:solidFill>
                 <a:latin typeface="Arial"/>
               </a:defRPr>
             </a:pPr>
             <a:r>
-              <a:t>User Interface &amp; Cockpit  |  Slide 6 of 10</a:t>
+              <a:t>1. Post-Meal Brisk Walk</a:t>
+            </a:r>
+          </a:p>
+        </p:txBody>
+      </p:sp>
+      <p:sp>
+        <p:nvSpPr>
+          <p:cNvPr id="8" name="TextBox 7"/>
+          <p:cNvSpPr txBox="1"/>
+          <p:nvPr/>
+        </p:nvSpPr>
+        <p:spPr>
+          <a:xfrm>
+            <a:off x="914400" y="2148840"/>
+            <a:ext cx="2971800" cy="3749039"/>
+          </a:xfrm>
+          <a:prstGeom prst="rect">
+            <a:avLst/>
+          </a:prstGeom>
+          <a:noFill/>
+        </p:spPr>
+        <p:txBody>
+          <a:bodyPr wrap="square">
+            <a:spAutoFit/>
+          </a:bodyPr>
+          <a:lstStyle/>
+          <a:p>
+            <a:pPr>
+              <a:spcAft>
+                <a:spcPts val="800"/>
+              </a:spcAft>
+            </a:pPr>
+            <a:r>
+              <a:rPr b="1" sz="1150">
+                <a:solidFill>
+                  <a:srgbClr val="48CAE4"/>
+                </a:solidFill>
+                <a:latin typeface="Arial"/>
+              </a:rPr>
+              <a:t>• Range: 0 to 45 mins: </a:t>
+            </a:r>
+            <a:r>
+              <a:rPr sz="1150">
+                <a:solidFill>
+                  <a:srgbClr val="FFFFFF"/>
+                </a:solidFill>
+                <a:latin typeface="Arial"/>
+              </a:rPr>
+              <a:t>Simulates post-prandial walking cadence (95 steps/min).</a:t>
+            </a:r>
+          </a:p>
+          <a:p>
+            <a:pPr>
+              <a:spcAft>
+                <a:spcPts val="800"/>
+              </a:spcAft>
+            </a:pPr>
+            <a:r>
+              <a:rPr b="1" sz="1150">
+                <a:solidFill>
+                  <a:srgbClr val="48CAE4"/>
+                </a:solidFill>
+                <a:latin typeface="Arial"/>
+              </a:rPr>
+              <a:t>• GLUT-4 Translocation: </a:t>
+            </a:r>
+            <a:r>
+              <a:rPr sz="1150">
+                <a:solidFill>
+                  <a:srgbClr val="FFFFFF"/>
+                </a:solidFill>
+                <a:latin typeface="Arial"/>
+              </a:rPr>
+              <a:t>Triggers non-insulin-mediated glucose uptake into skeletal muscles.</a:t>
+            </a:r>
+          </a:p>
+          <a:p>
+            <a:pPr>
+              <a:spcAft>
+                <a:spcPts val="800"/>
+              </a:spcAft>
+            </a:pPr>
+            <a:r>
+              <a:rPr b="1" sz="1150">
+                <a:solidFill>
+                  <a:srgbClr val="48CAE4"/>
+                </a:solidFill>
+                <a:latin typeface="Arial"/>
+              </a:rPr>
+              <a:t>• Clinical Impact: </a:t>
+            </a:r>
+            <a:r>
+              <a:rPr sz="1150">
+                <a:solidFill>
+                  <a:srgbClr val="FFFFFF"/>
+                </a:solidFill>
+                <a:latin typeface="Arial"/>
+              </a:rPr>
+              <a:t>Blunts peak postprandial glucose excursion by 25 to 45 mg/dL.</a:t>
+            </a:r>
+          </a:p>
+        </p:txBody>
+      </p:sp>
+      <p:sp>
+        <p:nvSpPr>
+          <p:cNvPr id="9" name="Rounded Rectangle 8"/>
+          <p:cNvSpPr/>
+          <p:nvPr/>
+        </p:nvSpPr>
+        <p:spPr>
+          <a:xfrm>
+            <a:off x="4389120" y="1554480"/>
+            <a:ext cx="3337560" cy="4572000"/>
+          </a:xfrm>
+          <a:prstGeom prst="roundRect">
+            <a:avLst/>
+          </a:prstGeom>
+          <a:solidFill>
+            <a:srgbClr val="1C2541"/>
+          </a:solidFill>
+          <a:ln w="19050">
+            <a:solidFill>
+              <a:srgbClr val="3A506B"/>
+            </a:solidFill>
+          </a:ln>
+        </p:spPr>
+        <p:style>
+          <a:lnRef idx="1">
+            <a:schemeClr val="accent1"/>
+          </a:lnRef>
+          <a:fillRef idx="3">
+            <a:schemeClr val="accent1"/>
+          </a:fillRef>
+          <a:effectRef idx="2">
+            <a:schemeClr val="accent1"/>
+          </a:effectRef>
+          <a:fontRef idx="minor">
+            <a:schemeClr val="lt1"/>
+          </a:fontRef>
+        </p:style>
+        <p:txBody>
+          <a:bodyPr rtlCol="0" anchor="ctr"/>
+          <a:lstStyle/>
+          <a:p>
+            <a:pPr algn="ctr"/>
+          </a:p>
+        </p:txBody>
+      </p:sp>
+      <p:sp>
+        <p:nvSpPr>
+          <p:cNvPr id="10" name="TextBox 9"/>
+          <p:cNvSpPr txBox="1"/>
+          <p:nvPr/>
+        </p:nvSpPr>
+        <p:spPr>
+          <a:xfrm>
+            <a:off x="4617720" y="1719072"/>
+            <a:ext cx="2880360" cy="438912"/>
+          </a:xfrm>
+          <a:prstGeom prst="rect">
+            <a:avLst/>
+          </a:prstGeom>
+          <a:noFill/>
+        </p:spPr>
+        <p:txBody>
+          <a:bodyPr wrap="square">
+            <a:spAutoFit/>
+          </a:bodyPr>
+          <a:lstStyle/>
+          <a:p>
+            <a:pPr>
+              <a:defRPr sz="1550" b="1">
+                <a:solidFill>
+                  <a:srgbClr val="FFD166"/>
+                </a:solidFill>
+                <a:latin typeface="Arial"/>
+              </a:defRPr>
+            </a:pPr>
+            <a:r>
+              <a:t>2. Carb Swap / Reduction</a:t>
+            </a:r>
+          </a:p>
+        </p:txBody>
+      </p:sp>
+      <p:sp>
+        <p:nvSpPr>
+          <p:cNvPr id="11" name="TextBox 10"/>
+          <p:cNvSpPr txBox="1"/>
+          <p:nvPr/>
+        </p:nvSpPr>
+        <p:spPr>
+          <a:xfrm>
+            <a:off x="4572000" y="2148840"/>
+            <a:ext cx="2971800" cy="3749039"/>
+          </a:xfrm>
+          <a:prstGeom prst="rect">
+            <a:avLst/>
+          </a:prstGeom>
+          <a:noFill/>
+        </p:spPr>
+        <p:txBody>
+          <a:bodyPr wrap="square">
+            <a:spAutoFit/>
+          </a:bodyPr>
+          <a:lstStyle/>
+          <a:p>
+            <a:pPr>
+              <a:spcAft>
+                <a:spcPts val="800"/>
+              </a:spcAft>
+            </a:pPr>
+            <a:r>
+              <a:rPr b="1" sz="1150">
+                <a:solidFill>
+                  <a:srgbClr val="FFD166"/>
+                </a:solidFill>
+                <a:latin typeface="Arial"/>
+              </a:rPr>
+              <a:t>• Range: 0 to 60 grams: </a:t>
+            </a:r>
+            <a:r>
+              <a:rPr sz="1150">
+                <a:solidFill>
+                  <a:srgbClr val="FFFFFF"/>
+                </a:solidFill>
+                <a:latin typeface="Arial"/>
+              </a:rPr>
+              <a:t>Simulates swapping white polished rice for foxtail/barnyard millets.</a:t>
+            </a:r>
+          </a:p>
+          <a:p>
+            <a:pPr>
+              <a:spcAft>
+                <a:spcPts val="800"/>
+              </a:spcAft>
+            </a:pPr>
+            <a:r>
+              <a:rPr b="1" sz="1150">
+                <a:solidFill>
+                  <a:srgbClr val="FFD166"/>
+                </a:solidFill>
+                <a:latin typeface="Arial"/>
+              </a:rPr>
+              <a:t>• Absorption Blunting: </a:t>
+            </a:r>
+            <a:r>
+              <a:rPr sz="1150">
+                <a:solidFill>
+                  <a:srgbClr val="FFFFFF"/>
+                </a:solidFill>
+                <a:latin typeface="Arial"/>
+              </a:rPr>
+              <a:t>Mitigates high-GI intestinal carbohydrate absorption kinetics.</a:t>
+            </a:r>
+          </a:p>
+          <a:p>
+            <a:pPr>
+              <a:spcAft>
+                <a:spcPts val="800"/>
+              </a:spcAft>
+            </a:pPr>
+            <a:r>
+              <a:rPr b="1" sz="1150">
+                <a:solidFill>
+                  <a:srgbClr val="FFD166"/>
+                </a:solidFill>
+                <a:latin typeface="Arial"/>
+              </a:rPr>
+              <a:t>• Clinical Impact: </a:t>
+            </a:r>
+            <a:r>
+              <a:rPr sz="1150">
+                <a:solidFill>
+                  <a:srgbClr val="FFFFFF"/>
+                </a:solidFill>
+                <a:latin typeface="Arial"/>
+              </a:rPr>
+              <a:t>Flattens steep glycemic curves back into the 70-180 mg/dL safe range.</a:t>
+            </a:r>
+          </a:p>
+        </p:txBody>
+      </p:sp>
+      <p:sp>
+        <p:nvSpPr>
+          <p:cNvPr id="12" name="Rounded Rectangle 11"/>
+          <p:cNvSpPr/>
+          <p:nvPr/>
+        </p:nvSpPr>
+        <p:spPr>
+          <a:xfrm>
+            <a:off x="8046720" y="1554480"/>
+            <a:ext cx="3337560" cy="4572000"/>
+          </a:xfrm>
+          <a:prstGeom prst="roundRect">
+            <a:avLst/>
+          </a:prstGeom>
+          <a:solidFill>
+            <a:srgbClr val="1C2541"/>
+          </a:solidFill>
+          <a:ln w="19050">
+            <a:solidFill>
+              <a:srgbClr val="3A506B"/>
+            </a:solidFill>
+          </a:ln>
+        </p:spPr>
+        <p:style>
+          <a:lnRef idx="1">
+            <a:schemeClr val="accent1"/>
+          </a:lnRef>
+          <a:fillRef idx="3">
+            <a:schemeClr val="accent1"/>
+          </a:fillRef>
+          <a:effectRef idx="2">
+            <a:schemeClr val="accent1"/>
+          </a:effectRef>
+          <a:fontRef idx="minor">
+            <a:schemeClr val="lt1"/>
+          </a:fontRef>
+        </p:style>
+        <p:txBody>
+          <a:bodyPr rtlCol="0" anchor="ctr"/>
+          <a:lstStyle/>
+          <a:p>
+            <a:pPr algn="ctr"/>
+          </a:p>
+        </p:txBody>
+      </p:sp>
+      <p:sp>
+        <p:nvSpPr>
+          <p:cNvPr id="13" name="TextBox 12"/>
+          <p:cNvSpPr txBox="1"/>
+          <p:nvPr/>
+        </p:nvSpPr>
+        <p:spPr>
+          <a:xfrm>
+            <a:off x="8275320" y="1719072"/>
+            <a:ext cx="2880360" cy="438912"/>
+          </a:xfrm>
+          <a:prstGeom prst="rect">
+            <a:avLst/>
+          </a:prstGeom>
+          <a:noFill/>
+        </p:spPr>
+        <p:txBody>
+          <a:bodyPr wrap="square">
+            <a:spAutoFit/>
+          </a:bodyPr>
+          <a:lstStyle/>
+          <a:p>
+            <a:pPr>
+              <a:defRPr sz="1550" b="1">
+                <a:solidFill>
+                  <a:srgbClr val="06D6A0"/>
+                </a:solidFill>
+                <a:latin typeface="Arial"/>
+              </a:defRPr>
+            </a:pPr>
+            <a:r>
+              <a:t>3. Basal Insulin Titration</a:t>
+            </a:r>
+          </a:p>
+        </p:txBody>
+      </p:sp>
+      <p:sp>
+        <p:nvSpPr>
+          <p:cNvPr id="14" name="TextBox 13"/>
+          <p:cNvSpPr txBox="1"/>
+          <p:nvPr/>
+        </p:nvSpPr>
+        <p:spPr>
+          <a:xfrm>
+            <a:off x="8229600" y="2148840"/>
+            <a:ext cx="2971800" cy="3749039"/>
+          </a:xfrm>
+          <a:prstGeom prst="rect">
+            <a:avLst/>
+          </a:prstGeom>
+          <a:noFill/>
+        </p:spPr>
+        <p:txBody>
+          <a:bodyPr wrap="square">
+            <a:spAutoFit/>
+          </a:bodyPr>
+          <a:lstStyle/>
+          <a:p>
+            <a:pPr>
+              <a:spcAft>
+                <a:spcPts val="800"/>
+              </a:spcAft>
+            </a:pPr>
+            <a:r>
+              <a:rPr b="1" sz="1150">
+                <a:solidFill>
+                  <a:srgbClr val="06D6A0"/>
+                </a:solidFill>
+                <a:latin typeface="Arial"/>
+              </a:rPr>
+              <a:t>• Range: -4U to +4U: </a:t>
+            </a:r>
+            <a:r>
+              <a:rPr sz="1150">
+                <a:solidFill>
+                  <a:srgbClr val="FFFFFF"/>
+                </a:solidFill>
+                <a:latin typeface="Arial"/>
+              </a:rPr>
+              <a:t>Simulates basal insulin titration or sulfonylurea timing shifts.</a:t>
+            </a:r>
+          </a:p>
+          <a:p>
+            <a:pPr>
+              <a:spcAft>
+                <a:spcPts val="800"/>
+              </a:spcAft>
+            </a:pPr>
+            <a:r>
+              <a:rPr b="1" sz="1150">
+                <a:solidFill>
+                  <a:srgbClr val="06D6A0"/>
+                </a:solidFill>
+                <a:latin typeface="Arial"/>
+              </a:rPr>
+              <a:t>• Overnight Clearance: </a:t>
+            </a:r>
+            <a:r>
+              <a:rPr sz="1150">
+                <a:solidFill>
+                  <a:srgbClr val="FFFFFF"/>
+                </a:solidFill>
+                <a:latin typeface="Arial"/>
+              </a:rPr>
+              <a:t>Recalculates nighttime basal glucose drift and beta-cell kinetics.</a:t>
+            </a:r>
+          </a:p>
+          <a:p>
+            <a:pPr>
+              <a:spcAft>
+                <a:spcPts val="800"/>
+              </a:spcAft>
+            </a:pPr>
+            <a:r>
+              <a:rPr b="1" sz="1150">
+                <a:solidFill>
+                  <a:srgbClr val="06D6A0"/>
+                </a:solidFill>
+                <a:latin typeface="Arial"/>
+              </a:rPr>
+              <a:t>• Clinical Impact: </a:t>
+            </a:r>
+            <a:r>
+              <a:rPr sz="1150">
+                <a:solidFill>
+                  <a:srgbClr val="FFFFFF"/>
+                </a:solidFill>
+                <a:latin typeface="Arial"/>
+              </a:rPr>
+              <a:t>Averts dangerous nocturnal crashes between 02:00 AM and 04:30 AM.</a:t>
             </a:r>
           </a:p>
         </p:txBody>
@@ -5266,7 +7269,7 @@
             <a:avLst/>
           </a:prstGeom>
           <a:solidFill>
-            <a:srgbClr val="0B1120"/>
+            <a:srgbClr val="0B132B"/>
           </a:solidFill>
           <a:ln>
             <a:noFill/>
@@ -5302,19 +7305,17 @@
         </p:nvSpPr>
         <p:spPr>
           <a:xfrm>
-            <a:off x="548640" y="1188720"/>
-            <a:ext cx="11094415" cy="4937760"/>
+            <a:off x="731520" y="365760"/>
+            <a:ext cx="3401568" cy="329184"/>
           </a:xfrm>
           <a:prstGeom prst="roundRect">
             <a:avLst/>
           </a:prstGeom>
           <a:solidFill>
-            <a:srgbClr val="1E293B"/>
+            <a:srgbClr val="3A506B"/>
           </a:solidFill>
-          <a:ln w="19050">
-            <a:solidFill>
-              <a:srgbClr val="334155"/>
-            </a:solidFill>
+          <a:ln>
+            <a:noFill/>
           </a:ln>
         </p:spPr>
         <p:style>
@@ -5332,10 +7333,20 @@
           </a:fontRef>
         </p:style>
         <p:txBody>
-          <a:bodyPr rtlCol="0" anchor="ctr"/>
-          <a:lstStyle/>
-          <a:p>
-            <a:pPr algn="ctr"/>
+          <a:bodyPr rtlCol="0" anchor="ctr" wrap="none"/>
+          <a:lstStyle/>
+          <a:p>
+            <a:pPr algn="ctr">
+              <a:defRPr sz="1050" b="1">
+                <a:solidFill>
+                  <a:srgbClr val="48CAE4"/>
+                </a:solidFill>
+                <a:latin typeface="Arial"/>
+              </a:defRPr>
+            </a:pPr>
+            <a:r>
+              <a:t>CLINICAL VALIDATION &amp; SCENARIOS</a:t>
+            </a:r>
           </a:p>
         </p:txBody>
       </p:sp>
@@ -5347,8 +7358,8 @@
         </p:nvSpPr>
         <p:spPr>
           <a:xfrm>
-            <a:off x="548640" y="228600"/>
-            <a:ext cx="11094415" cy="914400"/>
+            <a:off x="731520" y="749808"/>
+            <a:ext cx="10698480" cy="685800"/>
           </a:xfrm>
           <a:prstGeom prst="rect">
             <a:avLst/>
@@ -5356,34 +7367,21 @@
           <a:noFill/>
         </p:spPr>
         <p:txBody>
-          <a:bodyPr wrap="square" lIns="0" tIns="0" rIns="0" bIns="0">
+          <a:bodyPr wrap="square">
             <a:spAutoFit/>
           </a:bodyPr>
           <a:lstStyle/>
           <a:p>
             <a:pPr>
-              <a:defRPr sz="2100" b="1">
-                <a:solidFill>
-                  <a:srgbClr val="38BDF8"/>
+              <a:defRPr sz="2300" b="1">
+                <a:solidFill>
+                  <a:srgbClr val="FFFFFF"/>
                 </a:solidFill>
                 <a:latin typeface="Arial"/>
               </a:defRPr>
             </a:pPr>
             <a:r>
-              <a:t>Clinical Walkthrough: Two Real-World Scenarios</a:t>
-            </a:r>
-          </a:p>
-          <a:p>
-            <a:pPr>
-              <a:defRPr sz="1200">
-                <a:solidFill>
-                  <a:srgbClr val="94A3B8"/>
-                </a:solidFill>
-                <a:latin typeface="Arial"/>
-              </a:defRPr>
-            </a:pPr>
-            <a:r>
-              <a:t>Proactive Intervention in Indian Patient Personas</a:t>
+              <a:t>Real-World Clinical Walkthrough: Indian Patient Personas</a:t>
             </a:r>
           </a:p>
         </p:txBody>
@@ -5396,8 +7394,8 @@
         </p:nvSpPr>
         <p:spPr>
           <a:xfrm>
-            <a:off x="822960" y="1371600"/>
-            <a:ext cx="10515600" cy="4480560"/>
+            <a:off x="731520" y="6309360"/>
+            <a:ext cx="10698480" cy="320040"/>
           </a:xfrm>
           <a:prstGeom prst="rect">
             <a:avLst/>
@@ -5405,150 +7403,80 @@
           <a:noFill/>
         </p:spPr>
         <p:txBody>
-          <a:bodyPr wrap="square" lIns="0" tIns="0" rIns="0" bIns="0">
+          <a:bodyPr wrap="square">
             <a:spAutoFit/>
           </a:bodyPr>
           <a:lstStyle/>
           <a:p>
             <a:pPr>
-              <a:spcAft>
-                <a:spcPts val="1000"/>
-              </a:spcAft>
-              <a:defRPr sz="1400" b="1">
-                <a:solidFill>
-                  <a:srgbClr val="34D399"/>
+              <a:defRPr sz="1000">
+                <a:solidFill>
+                  <a:srgbClr val="8D99AE"/>
                 </a:solidFill>
                 <a:latin typeface="Arial"/>
               </a:defRPr>
             </a:pPr>
             <a:r>
-              <a:t>Scenario A (Postprandial Hyperglycemia - Patient IND-PT-10007):</a:t>
-            </a:r>
-          </a:p>
-          <a:p>
-            <a:pPr lvl="1">
-              <a:spcAft>
-                <a:spcPts val="1000"/>
-              </a:spcAft>
-              <a:defRPr sz="1300">
-                <a:solidFill>
-                  <a:srgbClr val="94A3B8"/>
-                </a:solidFill>
-                <a:latin typeface="Arial"/>
-              </a:defRPr>
-            </a:pPr>
-            <a:r>
-              <a:t>   • 54y male, Rice staple diet, baseline HbA1c 9.4%. Post-lunch predicted spike: 218 mg/dL.</a:t>
-            </a:r>
-          </a:p>
-          <a:p>
-            <a:pPr lvl="1">
-              <a:spcAft>
-                <a:spcPts val="1000"/>
-              </a:spcAft>
-              <a:defRPr sz="1300">
-                <a:solidFill>
-                  <a:srgbClr val="94A3B8"/>
-                </a:solidFill>
-                <a:latin typeface="Arial"/>
-              </a:defRPr>
-            </a:pPr>
-            <a:r>
-              <a:t>   • Doctor simulates: 20-min post-lunch walk + 35g carb reduction (foxtail millet swap).</a:t>
-            </a:r>
-          </a:p>
-          <a:p>
-            <a:pPr lvl="1">
-              <a:spcAft>
-                <a:spcPts val="1000"/>
-              </a:spcAft>
-              <a:defRPr sz="1300">
-                <a:solidFill>
-                  <a:srgbClr val="94A3B8"/>
-                </a:solidFill>
-                <a:latin typeface="Arial"/>
-              </a:defRPr>
-            </a:pPr>
-            <a:r>
-              <a:t>   • Twin outcome: Predicted 2h glucose drops by -38 mg/dL, restoring safe in-range control (180 mg/dL).</a:t>
-            </a:r>
-          </a:p>
-          <a:p>
-            <a:pPr>
-              <a:spcAft>
-                <a:spcPts val="1000"/>
-              </a:spcAft>
-              <a:defRPr sz="1400" b="1">
-                <a:solidFill>
-                  <a:srgbClr val="34D399"/>
-                </a:solidFill>
-                <a:latin typeface="Arial"/>
-              </a:defRPr>
-            </a:pPr>
-            <a:r>
-              <a:t>Scenario B (Impending Nocturnal Hypoglycemia - Patient IND-PT-10004):</a:t>
-            </a:r>
-          </a:p>
-          <a:p>
-            <a:pPr lvl="1">
-              <a:spcAft>
-                <a:spcPts val="1000"/>
-              </a:spcAft>
-              <a:defRPr sz="1300">
-                <a:solidFill>
-                  <a:srgbClr val="94A3B8"/>
-                </a:solidFill>
-                <a:latin typeface="Arial"/>
-              </a:defRPr>
-            </a:pPr>
-            <a:r>
-              <a:t>   • 59y female on basal insulin (22U). Twin detects 02:30 AM autonomic crash (HRV drops to 14ms).</a:t>
-            </a:r>
-          </a:p>
-          <a:p>
-            <a:pPr lvl="1">
-              <a:spcAft>
-                <a:spcPts val="1000"/>
-              </a:spcAft>
-              <a:defRPr sz="1300">
-                <a:solidFill>
-                  <a:srgbClr val="94A3B8"/>
-                </a:solidFill>
-                <a:latin typeface="Arial"/>
-              </a:defRPr>
-            </a:pPr>
-            <a:r>
-              <a:t>   • Twin flags impending 04:30 AM hypo crash (61 mg/dL) 2 hours in advance.</a:t>
-            </a:r>
-          </a:p>
-          <a:p>
-            <a:pPr lvl="1">
-              <a:spcAft>
-                <a:spcPts val="1000"/>
-              </a:spcAft>
-              <a:defRPr sz="1300">
-                <a:solidFill>
-                  <a:srgbClr val="94A3B8"/>
-                </a:solidFill>
-                <a:latin typeface="Arial"/>
-              </a:defRPr>
-            </a:pPr>
-            <a:r>
-              <a:t>   • Doctor simulates: Titrate evening basal insulin by -3U + bedtime snack -&gt; Crash averted.</a:t>
-            </a:r>
-          </a:p>
-        </p:txBody>
-      </p:sp>
-      <p:sp>
-        <p:nvSpPr>
-          <p:cNvPr id="6" name="TextBox 5"/>
+              <a:t>GlycoTwin-AI  |  Happiest Health Summit 2026, Bengaluru  |  Slide 7 of 10</a:t>
+            </a:r>
+          </a:p>
+        </p:txBody>
+      </p:sp>
+      <p:sp>
+        <p:nvSpPr>
+          <p:cNvPr id="6" name="Rounded Rectangle 5"/>
+          <p:cNvSpPr/>
+          <p:nvPr/>
+        </p:nvSpPr>
+        <p:spPr>
+          <a:xfrm>
+            <a:off x="731520" y="1554480"/>
+            <a:ext cx="5166360" cy="4572000"/>
+          </a:xfrm>
+          <a:prstGeom prst="roundRect">
+            <a:avLst/>
+          </a:prstGeom>
+          <a:solidFill>
+            <a:srgbClr val="1C2541"/>
+          </a:solidFill>
+          <a:ln w="19050">
+            <a:solidFill>
+              <a:srgbClr val="3A506B"/>
+            </a:solidFill>
+          </a:ln>
+        </p:spPr>
+        <p:style>
+          <a:lnRef idx="1">
+            <a:schemeClr val="accent1"/>
+          </a:lnRef>
+          <a:fillRef idx="3">
+            <a:schemeClr val="accent1"/>
+          </a:fillRef>
+          <a:effectRef idx="2">
+            <a:schemeClr val="accent1"/>
+          </a:effectRef>
+          <a:fontRef idx="minor">
+            <a:schemeClr val="lt1"/>
+          </a:fontRef>
+        </p:style>
+        <p:txBody>
+          <a:bodyPr rtlCol="0" anchor="ctr"/>
+          <a:lstStyle/>
+          <a:p>
+            <a:pPr algn="ctr"/>
+          </a:p>
+        </p:txBody>
+      </p:sp>
+      <p:sp>
+        <p:nvSpPr>
+          <p:cNvPr id="7" name="TextBox 6"/>
           <p:cNvSpPr txBox="1"/>
           <p:nvPr/>
         </p:nvSpPr>
         <p:spPr>
           <a:xfrm>
-            <a:off x="548640" y="6263640"/>
-            <a:ext cx="11094415" cy="365760"/>
+            <a:off x="960120" y="1719072"/>
+            <a:ext cx="4709160" cy="438912"/>
           </a:xfrm>
           <a:prstGeom prst="rect">
             <a:avLst/>
@@ -5556,21 +7484,348 @@
           <a:noFill/>
         </p:spPr>
         <p:txBody>
-          <a:bodyPr wrap="square" lIns="0" tIns="0" rIns="0" bIns="0">
+          <a:bodyPr wrap="square">
             <a:spAutoFit/>
           </a:bodyPr>
           <a:lstStyle/>
           <a:p>
             <a:pPr>
-              <a:defRPr sz="1000">
-                <a:solidFill>
-                  <a:srgbClr val="94A3B8"/>
+              <a:defRPr sz="1550" b="1">
+                <a:solidFill>
+                  <a:srgbClr val="FFD166"/>
                 </a:solidFill>
                 <a:latin typeface="Arial"/>
               </a:defRPr>
             </a:pPr>
             <a:r>
-              <a:t>Clinical Scenarios &amp; Persona Validation  |  Slide 7 of 10</a:t>
+              <a:t>Scenario A: Postprandial Spike (IND-PT-10007)</a:t>
+            </a:r>
+          </a:p>
+        </p:txBody>
+      </p:sp>
+      <p:sp>
+        <p:nvSpPr>
+          <p:cNvPr id="8" name="TextBox 7"/>
+          <p:cNvSpPr txBox="1"/>
+          <p:nvPr/>
+        </p:nvSpPr>
+        <p:spPr>
+          <a:xfrm>
+            <a:off x="960120" y="2148840"/>
+            <a:ext cx="4709160" cy="3749039"/>
+          </a:xfrm>
+          <a:prstGeom prst="rect">
+            <a:avLst/>
+          </a:prstGeom>
+          <a:noFill/>
+        </p:spPr>
+        <p:txBody>
+          <a:bodyPr wrap="square">
+            <a:spAutoFit/>
+          </a:bodyPr>
+          <a:lstStyle/>
+          <a:p>
+            <a:pPr>
+              <a:spcAft>
+                <a:spcPts val="800"/>
+              </a:spcAft>
+            </a:pPr>
+            <a:r>
+              <a:rPr b="1" sz="1200">
+                <a:solidFill>
+                  <a:srgbClr val="FFD166"/>
+                </a:solidFill>
+                <a:latin typeface="Arial"/>
+              </a:rPr>
+              <a:t>• Patient Profile: </a:t>
+            </a:r>
+            <a:r>
+              <a:rPr sz="1200">
+                <a:solidFill>
+                  <a:srgbClr val="FFFFFF"/>
+                </a:solidFill>
+                <a:latin typeface="Arial"/>
+              </a:rPr>
+              <a:t>54y male, 9y T2D duration, baseline HbA1c 9.4%, BMI 28.2 kg/m², heavy rice staple diet.</a:t>
+            </a:r>
+          </a:p>
+          <a:p>
+            <a:pPr>
+              <a:spcAft>
+                <a:spcPts val="800"/>
+              </a:spcAft>
+            </a:pPr>
+            <a:r>
+              <a:rPr b="1" sz="1200">
+                <a:solidFill>
+                  <a:srgbClr val="FFD166"/>
+                </a:solidFill>
+                <a:latin typeface="Arial"/>
+              </a:rPr>
+              <a:t>• Baseline 2h Forecast: </a:t>
+            </a:r>
+            <a:r>
+              <a:rPr sz="1200">
+                <a:solidFill>
+                  <a:srgbClr val="FFFFFF"/>
+                </a:solidFill>
+                <a:latin typeface="Arial"/>
+              </a:rPr>
+              <a:t>Current glucose 185 mg/dL; Digital Twin forecasts surge to 218 mg/dL post-lunch (Amber Alert).</a:t>
+            </a:r>
+          </a:p>
+          <a:p>
+            <a:pPr>
+              <a:spcAft>
+                <a:spcPts val="800"/>
+              </a:spcAft>
+            </a:pPr>
+            <a:r>
+              <a:rPr b="1" sz="1200">
+                <a:solidFill>
+                  <a:srgbClr val="FFD166"/>
+                </a:solidFill>
+                <a:latin typeface="Arial"/>
+              </a:rPr>
+              <a:t>• Doctor Simulation: </a:t>
+            </a:r>
+            <a:r>
+              <a:rPr sz="1200">
+                <a:solidFill>
+                  <a:srgbClr val="FFFFFF"/>
+                </a:solidFill>
+                <a:latin typeface="Arial"/>
+              </a:rPr>
+              <a:t>Doctor tests: 20-min post-meal brisk walk + 35g carb reduction (foxtail millet substitution).</a:t>
+            </a:r>
+          </a:p>
+          <a:p>
+            <a:pPr>
+              <a:spcAft>
+                <a:spcPts val="800"/>
+              </a:spcAft>
+            </a:pPr>
+            <a:r>
+              <a:rPr b="1" sz="1200">
+                <a:solidFill>
+                  <a:srgbClr val="FFD166"/>
+                </a:solidFill>
+                <a:latin typeface="Arial"/>
+              </a:rPr>
+              <a:t>• In-Silico Outcome: </a:t>
+            </a:r>
+            <a:r>
+              <a:rPr sz="1200">
+                <a:solidFill>
+                  <a:srgbClr val="FFFFFF"/>
+                </a:solidFill>
+                <a:latin typeface="Arial"/>
+              </a:rPr>
+              <a:t>Simulated 2h glucose drops by -38 mg/dL to 180 mg/dL, restoring safe in-range control (70-180 mg/dL).</a:t>
+            </a:r>
+          </a:p>
+        </p:txBody>
+      </p:sp>
+      <p:sp>
+        <p:nvSpPr>
+          <p:cNvPr id="9" name="Rounded Rectangle 8"/>
+          <p:cNvSpPr/>
+          <p:nvPr/>
+        </p:nvSpPr>
+        <p:spPr>
+          <a:xfrm>
+            <a:off x="6263640" y="1554480"/>
+            <a:ext cx="5166360" cy="4572000"/>
+          </a:xfrm>
+          <a:prstGeom prst="roundRect">
+            <a:avLst/>
+          </a:prstGeom>
+          <a:solidFill>
+            <a:srgbClr val="1C2541"/>
+          </a:solidFill>
+          <a:ln w="19050">
+            <a:solidFill>
+              <a:srgbClr val="3A506B"/>
+            </a:solidFill>
+          </a:ln>
+        </p:spPr>
+        <p:style>
+          <a:lnRef idx="1">
+            <a:schemeClr val="accent1"/>
+          </a:lnRef>
+          <a:fillRef idx="3">
+            <a:schemeClr val="accent1"/>
+          </a:fillRef>
+          <a:effectRef idx="2">
+            <a:schemeClr val="accent1"/>
+          </a:effectRef>
+          <a:fontRef idx="minor">
+            <a:schemeClr val="lt1"/>
+          </a:fontRef>
+        </p:style>
+        <p:txBody>
+          <a:bodyPr rtlCol="0" anchor="ctr"/>
+          <a:lstStyle/>
+          <a:p>
+            <a:pPr algn="ctr"/>
+          </a:p>
+        </p:txBody>
+      </p:sp>
+      <p:sp>
+        <p:nvSpPr>
+          <p:cNvPr id="10" name="TextBox 9"/>
+          <p:cNvSpPr txBox="1"/>
+          <p:nvPr/>
+        </p:nvSpPr>
+        <p:spPr>
+          <a:xfrm>
+            <a:off x="6492240" y="1719072"/>
+            <a:ext cx="4709160" cy="438912"/>
+          </a:xfrm>
+          <a:prstGeom prst="rect">
+            <a:avLst/>
+          </a:prstGeom>
+          <a:noFill/>
+        </p:spPr>
+        <p:txBody>
+          <a:bodyPr wrap="square">
+            <a:spAutoFit/>
+          </a:bodyPr>
+          <a:lstStyle/>
+          <a:p>
+            <a:pPr>
+              <a:defRPr sz="1550" b="1">
+                <a:solidFill>
+                  <a:srgbClr val="EF4444"/>
+                </a:solidFill>
+                <a:latin typeface="Arial"/>
+              </a:defRPr>
+            </a:pPr>
+            <a:r>
+              <a:t>Scenario B: Nocturnal Crash (IND-PT-10004)</a:t>
+            </a:r>
+          </a:p>
+        </p:txBody>
+      </p:sp>
+      <p:sp>
+        <p:nvSpPr>
+          <p:cNvPr id="11" name="TextBox 10"/>
+          <p:cNvSpPr txBox="1"/>
+          <p:nvPr/>
+        </p:nvSpPr>
+        <p:spPr>
+          <a:xfrm>
+            <a:off x="6492240" y="2148840"/>
+            <a:ext cx="4709160" cy="3749039"/>
+          </a:xfrm>
+          <a:prstGeom prst="rect">
+            <a:avLst/>
+          </a:prstGeom>
+          <a:noFill/>
+        </p:spPr>
+        <p:txBody>
+          <a:bodyPr wrap="square">
+            <a:spAutoFit/>
+          </a:bodyPr>
+          <a:lstStyle/>
+          <a:p>
+            <a:pPr>
+              <a:spcAft>
+                <a:spcPts val="800"/>
+              </a:spcAft>
+            </a:pPr>
+            <a:r>
+              <a:rPr b="1" sz="1200">
+                <a:solidFill>
+                  <a:srgbClr val="EF4444"/>
+                </a:solidFill>
+                <a:latin typeface="Arial"/>
+              </a:rPr>
+              <a:t>• Patient Profile: </a:t>
+            </a:r>
+            <a:r>
+              <a:rPr sz="1200">
+                <a:solidFill>
+                  <a:srgbClr val="FFFFFF"/>
+                </a:solidFill>
+                <a:latin typeface="Arial"/>
+              </a:rPr>
+              <a:t>59y female on 22U evening basal insulin + sulfonylurea, 14y T2D duration, high hypoglycemia vulnerability.</a:t>
+            </a:r>
+          </a:p>
+          <a:p>
+            <a:pPr>
+              <a:spcAft>
+                <a:spcPts val="800"/>
+              </a:spcAft>
+            </a:pPr>
+            <a:r>
+              <a:rPr b="1" sz="1200">
+                <a:solidFill>
+                  <a:srgbClr val="EF4444"/>
+                </a:solidFill>
+                <a:latin typeface="Arial"/>
+              </a:rPr>
+              <a:t>• Autonomic Signal at 02:30 AM: </a:t>
+            </a:r>
+            <a:r>
+              <a:rPr sz="1200">
+                <a:solidFill>
+                  <a:srgbClr val="FFFFFF"/>
+                </a:solidFill>
+                <a:latin typeface="Arial"/>
+              </a:rPr>
+              <a:t>Current glucose 92 mg/dL, but HRV RMSSD plunges to 14ms (sympathetic counter-regulatory surge).</a:t>
+            </a:r>
+          </a:p>
+          <a:p>
+            <a:pPr>
+              <a:spcAft>
+                <a:spcPts val="800"/>
+              </a:spcAft>
+            </a:pPr>
+            <a:r>
+              <a:rPr b="1" sz="1200">
+                <a:solidFill>
+                  <a:srgbClr val="EF4444"/>
+                </a:solidFill>
+                <a:latin typeface="Arial"/>
+              </a:rPr>
+              <a:t>• Critical 2h Forecast: </a:t>
+            </a:r>
+            <a:r>
+              <a:rPr sz="1200">
+                <a:solidFill>
+                  <a:srgbClr val="FFFFFF"/>
+                </a:solidFill>
+                <a:latin typeface="Arial"/>
+              </a:rPr>
+              <a:t>Digital Twin flags impending crash to 61 mg/dL at 04:30 AM (Critical Red Alert).</a:t>
+            </a:r>
+          </a:p>
+          <a:p>
+            <a:pPr>
+              <a:spcAft>
+                <a:spcPts val="800"/>
+              </a:spcAft>
+            </a:pPr>
+            <a:r>
+              <a:rPr b="1" sz="1200">
+                <a:solidFill>
+                  <a:srgbClr val="EF4444"/>
+                </a:solidFill>
+                <a:latin typeface="Arial"/>
+              </a:rPr>
+              <a:t>• In-Silico Outcome: </a:t>
+            </a:r>
+            <a:r>
+              <a:rPr sz="1200">
+                <a:solidFill>
+                  <a:srgbClr val="FFFFFF"/>
+                </a:solidFill>
+                <a:latin typeface="Arial"/>
+              </a:rPr>
+              <a:t>Doctor simulates -3U evening basal titration + bedtime complex snack -&gt; Crash averted (morning glucose 108 mg/dL).</a:t>
             </a:r>
           </a:p>
         </p:txBody>
@@ -5608,7 +7863,7 @@
             <a:avLst/>
           </a:prstGeom>
           <a:solidFill>
-            <a:srgbClr val="0B1120"/>
+            <a:srgbClr val="0B132B"/>
           </a:solidFill>
           <a:ln>
             <a:noFill/>
@@ -5644,19 +7899,17 @@
         </p:nvSpPr>
         <p:spPr>
           <a:xfrm>
-            <a:off x="548640" y="1188720"/>
-            <a:ext cx="11094415" cy="4937760"/>
+            <a:off x="731520" y="365760"/>
+            <a:ext cx="3108960" cy="329184"/>
           </a:xfrm>
           <a:prstGeom prst="roundRect">
             <a:avLst/>
           </a:prstGeom>
           <a:solidFill>
-            <a:srgbClr val="1E293B"/>
+            <a:srgbClr val="3A506B"/>
           </a:solidFill>
-          <a:ln w="19050">
-            <a:solidFill>
-              <a:srgbClr val="334155"/>
-            </a:solidFill>
+          <a:ln>
+            <a:noFill/>
           </a:ln>
         </p:spPr>
         <p:style>
@@ -5674,10 +7927,20 @@
           </a:fontRef>
         </p:style>
         <p:txBody>
-          <a:bodyPr rtlCol="0" anchor="ctr"/>
-          <a:lstStyle/>
-          <a:p>
-            <a:pPr algn="ctr"/>
+          <a:bodyPr rtlCol="0" anchor="ctr" wrap="none"/>
+          <a:lstStyle/>
+          <a:p>
+            <a:pPr algn="ctr">
+              <a:defRPr sz="1050" b="1">
+                <a:solidFill>
+                  <a:srgbClr val="48CAE4"/>
+                </a:solidFill>
+                <a:latin typeface="Arial"/>
+              </a:defRPr>
+            </a:pPr>
+            <a:r>
+              <a:t>USER INTERFACE &amp; EXPERIENCE</a:t>
+            </a:r>
           </a:p>
         </p:txBody>
       </p:sp>
@@ -5689,8 +7952,8 @@
         </p:nvSpPr>
         <p:spPr>
           <a:xfrm>
-            <a:off x="548640" y="228600"/>
-            <a:ext cx="11094415" cy="914400"/>
+            <a:off x="731520" y="749808"/>
+            <a:ext cx="10698480" cy="685800"/>
           </a:xfrm>
           <a:prstGeom prst="rect">
             <a:avLst/>
@@ -5698,34 +7961,21 @@
           <a:noFill/>
         </p:spPr>
         <p:txBody>
-          <a:bodyPr wrap="square" lIns="0" tIns="0" rIns="0" bIns="0">
+          <a:bodyPr wrap="square">
             <a:spAutoFit/>
           </a:bodyPr>
           <a:lstStyle/>
           <a:p>
             <a:pPr>
-              <a:defRPr sz="2100" b="1">
-                <a:solidFill>
-                  <a:srgbClr val="38BDF8"/>
+              <a:defRPr sz="2300" b="1">
+                <a:solidFill>
+                  <a:srgbClr val="FFFFFF"/>
                 </a:solidFill>
                 <a:latin typeface="Arial"/>
               </a:defRPr>
             </a:pPr>
             <a:r>
-              <a:t>DPDP Act 2023 &amp; HIPAA Compliance Architecture</a:t>
-            </a:r>
-          </a:p>
-          <a:p>
-            <a:pPr>
-              <a:defRPr sz="1200">
-                <a:solidFill>
-                  <a:srgbClr val="94A3B8"/>
-                </a:solidFill>
-                <a:latin typeface="Arial"/>
-              </a:defRPr>
-            </a:pPr>
-            <a:r>
-              <a:t>Patient Privacy, Synthetic Data Integrity &amp; Regulatory Sandbox Rules</a:t>
+              <a:t>Clinician Digital Twin Cockpit UI &amp; Tour Mode</a:t>
             </a:r>
           </a:p>
         </p:txBody>
@@ -5738,8 +7988,8 @@
         </p:nvSpPr>
         <p:spPr>
           <a:xfrm>
-            <a:off x="822960" y="1371600"/>
-            <a:ext cx="10515600" cy="4480560"/>
+            <a:off x="731520" y="6309360"/>
+            <a:ext cx="10698480" cy="320040"/>
           </a:xfrm>
           <a:prstGeom prst="rect">
             <a:avLst/>
@@ -5747,102 +7997,80 @@
           <a:noFill/>
         </p:spPr>
         <p:txBody>
-          <a:bodyPr wrap="square" lIns="0" tIns="0" rIns="0" bIns="0">
+          <a:bodyPr wrap="square">
             <a:spAutoFit/>
           </a:bodyPr>
           <a:lstStyle/>
           <a:p>
             <a:pPr>
-              <a:spcAft>
-                <a:spcPts val="1000"/>
-              </a:spcAft>
-              <a:defRPr sz="1350">
-                <a:solidFill>
-                  <a:srgbClr val="F1F5F9"/>
+              <a:defRPr sz="1000">
+                <a:solidFill>
+                  <a:srgbClr val="8D99AE"/>
                 </a:solidFill>
                 <a:latin typeface="Arial"/>
               </a:defRPr>
             </a:pPr>
             <a:r>
-              <a:t>Indian DPDP Act 2023 Compliance: Fully synthetic patient cohorts adhering to national privacy standards.</a:t>
-            </a:r>
-          </a:p>
-          <a:p>
-            <a:pPr>
-              <a:spcAft>
-                <a:spcPts val="1000"/>
-              </a:spcAft>
-              <a:defRPr sz="1350">
-                <a:solidFill>
-                  <a:srgbClr val="F1F5F9"/>
-                </a:solidFill>
-                <a:latin typeface="Arial"/>
-              </a:defRPr>
-            </a:pPr>
-            <a:r>
-              <a:t>Zero Real Patient PII: Synthetic identities (IND-PT-XXXXX) generated with authentic clinical distributions.</a:t>
-            </a:r>
-          </a:p>
-          <a:p>
-            <a:pPr>
-              <a:spcAft>
-                <a:spcPts val="1000"/>
-              </a:spcAft>
-              <a:defRPr sz="1350">
-                <a:solidFill>
-                  <a:srgbClr val="F1F5F9"/>
-                </a:solidFill>
-                <a:latin typeface="Arial"/>
-              </a:defRPr>
-            </a:pPr>
-            <a:r>
-              <a:t>Synthea &amp; MIMIC-IV Standard Schema: Statistically verified against ICMR-INDIAB epidemiological metrics.</a:t>
-            </a:r>
-          </a:p>
-          <a:p>
-            <a:pPr>
-              <a:spcAft>
-                <a:spcPts val="1000"/>
-              </a:spcAft>
-              <a:defRPr sz="1350">
-                <a:solidFill>
-                  <a:srgbClr val="F1F5F9"/>
-                </a:solidFill>
-                <a:latin typeface="Arial"/>
-              </a:defRPr>
-            </a:pPr>
-            <a:r>
-              <a:t>Data Leakage Protection: Strict patient-level train/test separation prevents data memorization.</a:t>
-            </a:r>
-          </a:p>
-          <a:p>
-            <a:pPr>
-              <a:spcAft>
-                <a:spcPts val="1000"/>
-              </a:spcAft>
-              <a:defRPr sz="1350">
-                <a:solidFill>
-                  <a:srgbClr val="F1F5F9"/>
-                </a:solidFill>
-                <a:latin typeface="Arial"/>
-              </a:defRPr>
-            </a:pPr>
-            <a:r>
-              <a:t>Audit Logging: Every in-silico simulation and decision recommendation is timestamped and cryptographically logged.</a:t>
-            </a:r>
-          </a:p>
-        </p:txBody>
-      </p:sp>
-      <p:sp>
-        <p:nvSpPr>
-          <p:cNvPr id="6" name="TextBox 5"/>
+              <a:t>GlycoTwin-AI  |  Happiest Health Summit 2026, Bengaluru  |  Slide 8 of 10</a:t>
+            </a:r>
+          </a:p>
+        </p:txBody>
+      </p:sp>
+      <p:sp>
+        <p:nvSpPr>
+          <p:cNvPr id="6" name="Rounded Rectangle 5"/>
+          <p:cNvSpPr/>
+          <p:nvPr/>
+        </p:nvSpPr>
+        <p:spPr>
+          <a:xfrm>
+            <a:off x="731520" y="1554480"/>
+            <a:ext cx="5166360" cy="4572000"/>
+          </a:xfrm>
+          <a:prstGeom prst="roundRect">
+            <a:avLst/>
+          </a:prstGeom>
+          <a:solidFill>
+            <a:srgbClr val="1C2541"/>
+          </a:solidFill>
+          <a:ln w="19050">
+            <a:solidFill>
+              <a:srgbClr val="3A506B"/>
+            </a:solidFill>
+          </a:ln>
+        </p:spPr>
+        <p:style>
+          <a:lnRef idx="1">
+            <a:schemeClr val="accent1"/>
+          </a:lnRef>
+          <a:fillRef idx="3">
+            <a:schemeClr val="accent1"/>
+          </a:fillRef>
+          <a:effectRef idx="2">
+            <a:schemeClr val="accent1"/>
+          </a:effectRef>
+          <a:fontRef idx="minor">
+            <a:schemeClr val="lt1"/>
+          </a:fontRef>
+        </p:style>
+        <p:txBody>
+          <a:bodyPr rtlCol="0" anchor="ctr"/>
+          <a:lstStyle/>
+          <a:p>
+            <a:pPr algn="ctr"/>
+          </a:p>
+        </p:txBody>
+      </p:sp>
+      <p:sp>
+        <p:nvSpPr>
+          <p:cNvPr id="7" name="TextBox 6"/>
           <p:cNvSpPr txBox="1"/>
           <p:nvPr/>
         </p:nvSpPr>
         <p:spPr>
           <a:xfrm>
-            <a:off x="548640" y="6263640"/>
-            <a:ext cx="11094415" cy="365760"/>
+            <a:off x="960120" y="1719072"/>
+            <a:ext cx="4709160" cy="438912"/>
           </a:xfrm>
           <a:prstGeom prst="rect">
             <a:avLst/>
@@ -5850,21 +8078,348 @@
           <a:noFill/>
         </p:spPr>
         <p:txBody>
-          <a:bodyPr wrap="square" lIns="0" tIns="0" rIns="0" bIns="0">
+          <a:bodyPr wrap="square">
             <a:spAutoFit/>
           </a:bodyPr>
           <a:lstStyle/>
           <a:p>
             <a:pPr>
-              <a:defRPr sz="1000">
-                <a:solidFill>
-                  <a:srgbClr val="94A3B8"/>
+              <a:defRPr sz="1550" b="1">
+                <a:solidFill>
+                  <a:srgbClr val="48CAE4"/>
                 </a:solidFill>
                 <a:latin typeface="Arial"/>
               </a:defRPr>
             </a:pPr>
             <a:r>
-              <a:t>Regulatory Compliance &amp; Sandbox Rules  |  Slide 8 of 10</a:t>
+              <a:t>Glassmorphic Web Dashboard (FastAPI + Chart.js)</a:t>
+            </a:r>
+          </a:p>
+        </p:txBody>
+      </p:sp>
+      <p:sp>
+        <p:nvSpPr>
+          <p:cNvPr id="8" name="TextBox 7"/>
+          <p:cNvSpPr txBox="1"/>
+          <p:nvPr/>
+        </p:nvSpPr>
+        <p:spPr>
+          <a:xfrm>
+            <a:off x="960120" y="2148840"/>
+            <a:ext cx="4709160" cy="3749039"/>
+          </a:xfrm>
+          <a:prstGeom prst="rect">
+            <a:avLst/>
+          </a:prstGeom>
+          <a:noFill/>
+        </p:spPr>
+        <p:txBody>
+          <a:bodyPr wrap="square">
+            <a:spAutoFit/>
+          </a:bodyPr>
+          <a:lstStyle/>
+          <a:p>
+            <a:pPr>
+              <a:spcAft>
+                <a:spcPts val="800"/>
+              </a:spcAft>
+            </a:pPr>
+            <a:r>
+              <a:rPr b="1" sz="1200">
+                <a:solidFill>
+                  <a:srgbClr val="48CAE4"/>
+                </a:solidFill>
+                <a:latin typeface="Arial"/>
+              </a:rPr>
+              <a:t>• Virtual Patient Selector: </a:t>
+            </a:r>
+            <a:r>
+              <a:rPr sz="1200">
+                <a:solidFill>
+                  <a:srgbClr val="FFFFFF"/>
+                </a:solidFill>
+                <a:latin typeface="Arial"/>
+              </a:rPr>
+              <a:t>Instantly switch across clinical personas (Hyper-prone, Hypo-prone, Controlled).</a:t>
+            </a:r>
+          </a:p>
+          <a:p>
+            <a:pPr>
+              <a:spcAft>
+                <a:spcPts val="800"/>
+              </a:spcAft>
+            </a:pPr>
+            <a:r>
+              <a:rPr b="1" sz="1200">
+                <a:solidFill>
+                  <a:srgbClr val="48CAE4"/>
+                </a:solidFill>
+                <a:latin typeface="Arial"/>
+              </a:rPr>
+              <a:t>• 4-Pillar Clinical Metric Bar: </a:t>
+            </a:r>
+            <a:r>
+              <a:rPr sz="1200">
+                <a:solidFill>
+                  <a:srgbClr val="FFFFFF"/>
+                </a:solidFill>
+                <a:latin typeface="Arial"/>
+              </a:rPr>
+              <a:t>Current CGM, 2-Hour Forecast, Autonomic Stress Index (HR/HRV), and Time-in-Range (TIR).</a:t>
+            </a:r>
+          </a:p>
+          <a:p>
+            <a:pPr>
+              <a:spcAft>
+                <a:spcPts val="800"/>
+              </a:spcAft>
+            </a:pPr>
+            <a:r>
+              <a:rPr b="1" sz="1200">
+                <a:solidFill>
+                  <a:srgbClr val="48CAE4"/>
+                </a:solidFill>
+                <a:latin typeface="Arial"/>
+              </a:rPr>
+              <a:t>• Dual Synchronized Waveforms: </a:t>
+            </a:r>
+            <a:r>
+              <a:rPr sz="1200">
+                <a:solidFill>
+                  <a:srgbClr val="FFFFFF"/>
+                </a:solidFill>
+                <a:latin typeface="Arial"/>
+              </a:rPr>
+              <a:t>6h continuous CGM + 2h forecast band alongside continuous HR, HRV, steps, &amp; meals.</a:t>
+            </a:r>
+          </a:p>
+          <a:p>
+            <a:pPr>
+              <a:spcAft>
+                <a:spcPts val="800"/>
+              </a:spcAft>
+            </a:pPr>
+            <a:r>
+              <a:rPr b="1" sz="1200">
+                <a:solidFill>
+                  <a:srgbClr val="48CAE4"/>
+                </a:solidFill>
+                <a:latin typeface="Arial"/>
+              </a:rPr>
+              <a:t>• Explainable AI (XAI) Drawer: </a:t>
+            </a:r>
+            <a:r>
+              <a:rPr sz="1200">
+                <a:solidFill>
+                  <a:srgbClr val="FFFFFF"/>
+                </a:solidFill>
+                <a:latin typeface="Arial"/>
+              </a:rPr>
+              <a:t>Physiological root-cause attributions directly aligned with RSSDI &amp; ADA guidelines.</a:t>
+            </a:r>
+          </a:p>
+        </p:txBody>
+      </p:sp>
+      <p:sp>
+        <p:nvSpPr>
+          <p:cNvPr id="9" name="Rounded Rectangle 8"/>
+          <p:cNvSpPr/>
+          <p:nvPr/>
+        </p:nvSpPr>
+        <p:spPr>
+          <a:xfrm>
+            <a:off x="6263640" y="1554480"/>
+            <a:ext cx="5166360" cy="4572000"/>
+          </a:xfrm>
+          <a:prstGeom prst="roundRect">
+            <a:avLst/>
+          </a:prstGeom>
+          <a:solidFill>
+            <a:srgbClr val="1C2541"/>
+          </a:solidFill>
+          <a:ln w="19050">
+            <a:solidFill>
+              <a:srgbClr val="3A506B"/>
+            </a:solidFill>
+          </a:ln>
+        </p:spPr>
+        <p:style>
+          <a:lnRef idx="1">
+            <a:schemeClr val="accent1"/>
+          </a:lnRef>
+          <a:fillRef idx="3">
+            <a:schemeClr val="accent1"/>
+          </a:fillRef>
+          <a:effectRef idx="2">
+            <a:schemeClr val="accent1"/>
+          </a:effectRef>
+          <a:fontRef idx="minor">
+            <a:schemeClr val="lt1"/>
+          </a:fontRef>
+        </p:style>
+        <p:txBody>
+          <a:bodyPr rtlCol="0" anchor="ctr"/>
+          <a:lstStyle/>
+          <a:p>
+            <a:pPr algn="ctr"/>
+          </a:p>
+        </p:txBody>
+      </p:sp>
+      <p:sp>
+        <p:nvSpPr>
+          <p:cNvPr id="10" name="TextBox 9"/>
+          <p:cNvSpPr txBox="1"/>
+          <p:nvPr/>
+        </p:nvSpPr>
+        <p:spPr>
+          <a:xfrm>
+            <a:off x="6492240" y="1719072"/>
+            <a:ext cx="4709160" cy="438912"/>
+          </a:xfrm>
+          <a:prstGeom prst="rect">
+            <a:avLst/>
+          </a:prstGeom>
+          <a:noFill/>
+        </p:spPr>
+        <p:txBody>
+          <a:bodyPr wrap="square">
+            <a:spAutoFit/>
+          </a:bodyPr>
+          <a:lstStyle/>
+          <a:p>
+            <a:pPr>
+              <a:defRPr sz="1550" b="1">
+                <a:solidFill>
+                  <a:srgbClr val="FFD166"/>
+                </a:solidFill>
+                <a:latin typeface="Arial"/>
+              </a:defRPr>
+            </a:pPr>
+            <a:r>
+              <a:t>Automated AI Presentation Mode</a:t>
+            </a:r>
+          </a:p>
+        </p:txBody>
+      </p:sp>
+      <p:sp>
+        <p:nvSpPr>
+          <p:cNvPr id="11" name="TextBox 10"/>
+          <p:cNvSpPr txBox="1"/>
+          <p:nvPr/>
+        </p:nvSpPr>
+        <p:spPr>
+          <a:xfrm>
+            <a:off x="6492240" y="2148840"/>
+            <a:ext cx="4709160" cy="3749039"/>
+          </a:xfrm>
+          <a:prstGeom prst="rect">
+            <a:avLst/>
+          </a:prstGeom>
+          <a:noFill/>
+        </p:spPr>
+        <p:txBody>
+          <a:bodyPr wrap="square">
+            <a:spAutoFit/>
+          </a:bodyPr>
+          <a:lstStyle/>
+          <a:p>
+            <a:pPr>
+              <a:spcAft>
+                <a:spcPts val="800"/>
+              </a:spcAft>
+            </a:pPr>
+            <a:r>
+              <a:rPr b="1" sz="1200">
+                <a:solidFill>
+                  <a:srgbClr val="FFD166"/>
+                </a:solidFill>
+                <a:latin typeface="Arial"/>
+              </a:rPr>
+              <a:t>• Teleprompter Subtitle HUD: </a:t>
+            </a:r>
+            <a:r>
+              <a:rPr sz="1200">
+                <a:solidFill>
+                  <a:srgbClr val="FFFFFF"/>
+                </a:solidFill>
+                <a:latin typeface="Arial"/>
+              </a:rPr>
+              <a:t>Floating presenter bar at the bottom displaying formatted, step-by-step clinical explanations.</a:t>
+            </a:r>
+          </a:p>
+          <a:p>
+            <a:pPr>
+              <a:spcAft>
+                <a:spcPts val="800"/>
+              </a:spcAft>
+            </a:pPr>
+            <a:r>
+              <a:rPr b="1" sz="1200">
+                <a:solidFill>
+                  <a:srgbClr val="FFD166"/>
+                </a:solidFill>
+                <a:latin typeface="Arial"/>
+              </a:rPr>
+              <a:t>• Automated UI Interactivity: </a:t>
+            </a:r>
+            <a:r>
+              <a:rPr sz="1200">
+                <a:solidFill>
+                  <a:srgbClr val="FFFFFF"/>
+                </a:solidFill>
+                <a:latin typeface="Arial"/>
+              </a:rPr>
+              <a:t>Auto-selects patients, smooth-scrolls to charts, and auto-animates sliders during recording.</a:t>
+            </a:r>
+          </a:p>
+          <a:p>
+            <a:pPr>
+              <a:spcAft>
+                <a:spcPts val="800"/>
+              </a:spcAft>
+            </a:pPr>
+            <a:r>
+              <a:rPr b="1" sz="1200">
+                <a:solidFill>
+                  <a:srgbClr val="FFD166"/>
+                </a:solidFill>
+                <a:latin typeface="Arial"/>
+              </a:rPr>
+              <a:t>• Optional AI Voiceover: </a:t>
+            </a:r>
+            <a:r>
+              <a:rPr sz="1200">
+                <a:solidFill>
+                  <a:srgbClr val="FFFFFF"/>
+                </a:solidFill>
+                <a:latin typeface="Arial"/>
+              </a:rPr>
+              <a:t>Built-in speech synthesis reads each slide explanation aloud with natural pacing.</a:t>
+            </a:r>
+          </a:p>
+          <a:p>
+            <a:pPr>
+              <a:spcAft>
+                <a:spcPts val="800"/>
+              </a:spcAft>
+            </a:pPr>
+            <a:r>
+              <a:rPr b="1" sz="1200">
+                <a:solidFill>
+                  <a:srgbClr val="FFD166"/>
+                </a:solidFill>
+                <a:latin typeface="Arial"/>
+              </a:rPr>
+              <a:t>• Effortless Video Submission: </a:t>
+            </a:r>
+            <a:r>
+              <a:rPr sz="1200">
+                <a:solidFill>
+                  <a:srgbClr val="FFFFFF"/>
+                </a:solidFill>
+                <a:latin typeface="Arial"/>
+              </a:rPr>
+              <a:t>Start screen record, click 'Start AI Guided Tour', and the prototype presents itself for 20 minutes!</a:t>
             </a:r>
           </a:p>
         </p:txBody>
@@ -5902,7 +8457,7 @@
             <a:avLst/>
           </a:prstGeom>
           <a:solidFill>
-            <a:srgbClr val="0B1120"/>
+            <a:srgbClr val="0B132B"/>
           </a:solidFill>
           <a:ln>
             <a:noFill/>
@@ -5938,19 +8493,17 @@
         </p:nvSpPr>
         <p:spPr>
           <a:xfrm>
-            <a:off x="548640" y="1188720"/>
-            <a:ext cx="11094415" cy="4937760"/>
+            <a:off x="731520" y="365760"/>
+            <a:ext cx="4828031" cy="329184"/>
           </a:xfrm>
           <a:prstGeom prst="roundRect">
             <a:avLst/>
           </a:prstGeom>
           <a:solidFill>
-            <a:srgbClr val="1E293B"/>
+            <a:srgbClr val="3A506B"/>
           </a:solidFill>
-          <a:ln w="19050">
-            <a:solidFill>
-              <a:srgbClr val="334155"/>
-            </a:solidFill>
+          <a:ln>
+            <a:noFill/>
           </a:ln>
         </p:spPr>
         <p:style>
@@ -5968,10 +8521,20 @@
           </a:fontRef>
         </p:style>
         <p:txBody>
-          <a:bodyPr rtlCol="0" anchor="ctr"/>
-          <a:lstStyle/>
-          <a:p>
-            <a:pPr algn="ctr"/>
+          <a:bodyPr rtlCol="0" anchor="ctr" wrap="none"/>
+          <a:lstStyle/>
+          <a:p>
+            <a:pPr algn="ctr">
+              <a:defRPr sz="1050" b="1">
+                <a:solidFill>
+                  <a:srgbClr val="48CAE4"/>
+                </a:solidFill>
+                <a:latin typeface="Arial"/>
+              </a:defRPr>
+            </a:pPr>
+            <a:r>
+              <a:t>REGULATORY COMPLIANCE &amp; SOCIOECONOMIC IMPACT</a:t>
+            </a:r>
           </a:p>
         </p:txBody>
       </p:sp>
@@ -5983,8 +8546,8 @@
         </p:nvSpPr>
         <p:spPr>
           <a:xfrm>
-            <a:off x="548640" y="228600"/>
-            <a:ext cx="11094415" cy="914400"/>
+            <a:off x="731520" y="749808"/>
+            <a:ext cx="10698480" cy="685800"/>
           </a:xfrm>
           <a:prstGeom prst="rect">
             <a:avLst/>
@@ -5992,34 +8555,21 @@
           <a:noFill/>
         </p:spPr>
         <p:txBody>
-          <a:bodyPr wrap="square" lIns="0" tIns="0" rIns="0" bIns="0">
+          <a:bodyPr wrap="square">
             <a:spAutoFit/>
           </a:bodyPr>
           <a:lstStyle/>
           <a:p>
             <a:pPr>
-              <a:defRPr sz="2100" b="1">
-                <a:solidFill>
-                  <a:srgbClr val="38BDF8"/>
+              <a:defRPr sz="2300" b="1">
+                <a:solidFill>
+                  <a:srgbClr val="FFFFFF"/>
                 </a:solidFill>
                 <a:latin typeface="Arial"/>
               </a:defRPr>
             </a:pPr>
             <a:r>
-              <a:t>Socioeconomic Impact &amp; Indian Healthcare Deployment Roadmap</a:t>
-            </a:r>
-          </a:p>
-          <a:p>
-            <a:pPr>
-              <a:defRPr sz="1200">
-                <a:solidFill>
-                  <a:srgbClr val="94A3B8"/>
-                </a:solidFill>
-                <a:latin typeface="Arial"/>
-              </a:defRPr>
-            </a:pPr>
-            <a:r>
-              <a:t>From University Incubator Prototype to Ayushman Bharat Digital Mission (ABDM)</a:t>
+              <a:t>DPDP Act 2023 Compliance &amp; Indian Healthcare Impact</a:t>
             </a:r>
           </a:p>
         </p:txBody>
@@ -6032,8 +8582,8 @@
         </p:nvSpPr>
         <p:spPr>
           <a:xfrm>
-            <a:off x="822960" y="1371600"/>
-            <a:ext cx="10515600" cy="4480560"/>
+            <a:off x="731520" y="6309360"/>
+            <a:ext cx="10698480" cy="320040"/>
           </a:xfrm>
           <a:prstGeom prst="rect">
             <a:avLst/>
@@ -6041,134 +8591,80 @@
           <a:noFill/>
         </p:spPr>
         <p:txBody>
-          <a:bodyPr wrap="square" lIns="0" tIns="0" rIns="0" bIns="0">
+          <a:bodyPr wrap="square">
             <a:spAutoFit/>
           </a:bodyPr>
           <a:lstStyle/>
           <a:p>
             <a:pPr>
-              <a:spcAft>
-                <a:spcPts val="1000"/>
-              </a:spcAft>
-              <a:defRPr sz="1350">
-                <a:solidFill>
-                  <a:srgbClr val="F1F5F9"/>
+              <a:defRPr sz="1000">
+                <a:solidFill>
+                  <a:srgbClr val="8D99AE"/>
                 </a:solidFill>
                 <a:latin typeface="Arial"/>
               </a:defRPr>
             </a:pPr>
             <a:r>
-              <a:t>Economic Impact: Avoids ₹40,000 - ₹1,50,000 emergency admissions for DKA and severe hypoglycemia.</a:t>
-            </a:r>
-          </a:p>
-          <a:p>
-            <a:pPr>
-              <a:spcAft>
-                <a:spcPts val="1000"/>
-              </a:spcAft>
-              <a:defRPr sz="1350">
-                <a:solidFill>
-                  <a:srgbClr val="F1F5F9"/>
-                </a:solidFill>
-                <a:latin typeface="Arial"/>
-              </a:defRPr>
-            </a:pPr>
-            <a:r>
-              <a:t>Long-Term Prevention: Blunting glycemic spikes reduces HbA1c by 0.8-1.2%, cutting microvascular complications by 37%.</a:t>
-            </a:r>
-          </a:p>
-          <a:p>
-            <a:pPr>
-              <a:spcAft>
-                <a:spcPts val="1000"/>
-              </a:spcAft>
-              <a:defRPr sz="1350">
-                <a:solidFill>
-                  <a:srgbClr val="F1F5F9"/>
-                </a:solidFill>
-                <a:latin typeface="Arial"/>
-              </a:defRPr>
-            </a:pPr>
-            <a:r>
-              <a:t>Integration Roadmap:</a:t>
-            </a:r>
-          </a:p>
-          <a:p>
-            <a:pPr lvl="1">
-              <a:spcAft>
-                <a:spcPts val="1000"/>
-              </a:spcAft>
-              <a:defRPr sz="1300">
-                <a:solidFill>
-                  <a:srgbClr val="94A3B8"/>
-                </a:solidFill>
-                <a:latin typeface="Arial"/>
-              </a:defRPr>
-            </a:pPr>
-            <a:r>
-              <a:t>   • Phase 1 (Now): Working Digital Twin PoC, multimodal predictive engine &amp; doctor cockpit.</a:t>
-            </a:r>
-          </a:p>
-          <a:p>
-            <a:pPr lvl="1">
-              <a:spcAft>
-                <a:spcPts val="1000"/>
-              </a:spcAft>
-              <a:defRPr sz="1300">
-                <a:solidFill>
-                  <a:srgbClr val="94A3B8"/>
-                </a:solidFill>
-                <a:latin typeface="Arial"/>
-              </a:defRPr>
-            </a:pPr>
-            <a:r>
-              <a:t>   • Phase 2 (Summit Final): Hardware integration with commercial CGMs (Abbott FreeStyle Libre) &amp; wearables.</a:t>
-            </a:r>
-          </a:p>
-          <a:p>
-            <a:pPr lvl="1">
-              <a:spcAft>
-                <a:spcPts val="1000"/>
-              </a:spcAft>
-              <a:defRPr sz="1300">
-                <a:solidFill>
-                  <a:srgbClr val="94A3B8"/>
-                </a:solidFill>
-                <a:latin typeface="Arial"/>
-              </a:defRPr>
-            </a:pPr>
-            <a:r>
-              <a:t>   • Phase 3 (Clinical Pilot): FHIR API integration into Ayushman Bharat Digital Mission (ABDM) &amp; e-Sanjeevani.</a:t>
-            </a:r>
-          </a:p>
-          <a:p>
-            <a:pPr lvl="1">
-              <a:spcAft>
-                <a:spcPts val="1000"/>
-              </a:spcAft>
-              <a:defRPr sz="1300">
-                <a:solidFill>
-                  <a:srgbClr val="94A3B8"/>
-                </a:solidFill>
-                <a:latin typeface="Arial"/>
-              </a:defRPr>
-            </a:pPr>
-            <a:r>
-              <a:t>   • Phase 4 (Edge AI): Mobile companion app providing real-time personalized patient nudges.</a:t>
-            </a:r>
-          </a:p>
-        </p:txBody>
-      </p:sp>
-      <p:sp>
-        <p:nvSpPr>
-          <p:cNvPr id="6" name="TextBox 5"/>
+              <a:t>GlycoTwin-AI  |  Happiest Health Summit 2026, Bengaluru  |  Slide 9 of 10</a:t>
+            </a:r>
+          </a:p>
+        </p:txBody>
+      </p:sp>
+      <p:sp>
+        <p:nvSpPr>
+          <p:cNvPr id="6" name="Rounded Rectangle 5"/>
+          <p:cNvSpPr/>
+          <p:nvPr/>
+        </p:nvSpPr>
+        <p:spPr>
+          <a:xfrm>
+            <a:off x="731520" y="1554480"/>
+            <a:ext cx="5166360" cy="4572000"/>
+          </a:xfrm>
+          <a:prstGeom prst="roundRect">
+            <a:avLst/>
+          </a:prstGeom>
+          <a:solidFill>
+            <a:srgbClr val="1C2541"/>
+          </a:solidFill>
+          <a:ln w="19050">
+            <a:solidFill>
+              <a:srgbClr val="3A506B"/>
+            </a:solidFill>
+          </a:ln>
+        </p:spPr>
+        <p:style>
+          <a:lnRef idx="1">
+            <a:schemeClr val="accent1"/>
+          </a:lnRef>
+          <a:fillRef idx="3">
+            <a:schemeClr val="accent1"/>
+          </a:fillRef>
+          <a:effectRef idx="2">
+            <a:schemeClr val="accent1"/>
+          </a:effectRef>
+          <a:fontRef idx="minor">
+            <a:schemeClr val="lt1"/>
+          </a:fontRef>
+        </p:style>
+        <p:txBody>
+          <a:bodyPr rtlCol="0" anchor="ctr"/>
+          <a:lstStyle/>
+          <a:p>
+            <a:pPr algn="ctr"/>
+          </a:p>
+        </p:txBody>
+      </p:sp>
+      <p:sp>
+        <p:nvSpPr>
+          <p:cNvPr id="7" name="TextBox 6"/>
           <p:cNvSpPr txBox="1"/>
           <p:nvPr/>
         </p:nvSpPr>
         <p:spPr>
           <a:xfrm>
-            <a:off x="548640" y="6263640"/>
-            <a:ext cx="11094415" cy="365760"/>
+            <a:off x="960120" y="1719072"/>
+            <a:ext cx="4709160" cy="438912"/>
           </a:xfrm>
           <a:prstGeom prst="rect">
             <a:avLst/>
@@ -6176,21 +8672,348 @@
           <a:noFill/>
         </p:spPr>
         <p:txBody>
-          <a:bodyPr wrap="square" lIns="0" tIns="0" rIns="0" bIns="0">
+          <a:bodyPr wrap="square">
             <a:spAutoFit/>
           </a:bodyPr>
           <a:lstStyle/>
           <a:p>
             <a:pPr>
-              <a:defRPr sz="1000">
-                <a:solidFill>
-                  <a:srgbClr val="94A3B8"/>
+              <a:defRPr sz="1550" b="1">
+                <a:solidFill>
+                  <a:srgbClr val="06D6A0"/>
                 </a:solidFill>
                 <a:latin typeface="Arial"/>
               </a:defRPr>
             </a:pPr>
             <a:r>
-              <a:t>Impact &amp; Deployment Roadmap  |  Slide 9 of 10</a:t>
+              <a:t>Indian DPDP Act 2023 &amp; HIPAA Compliance</a:t>
+            </a:r>
+          </a:p>
+        </p:txBody>
+      </p:sp>
+      <p:sp>
+        <p:nvSpPr>
+          <p:cNvPr id="8" name="TextBox 7"/>
+          <p:cNvSpPr txBox="1"/>
+          <p:nvPr/>
+        </p:nvSpPr>
+        <p:spPr>
+          <a:xfrm>
+            <a:off x="960120" y="2148840"/>
+            <a:ext cx="4709160" cy="3749039"/>
+          </a:xfrm>
+          <a:prstGeom prst="rect">
+            <a:avLst/>
+          </a:prstGeom>
+          <a:noFill/>
+        </p:spPr>
+        <p:txBody>
+          <a:bodyPr wrap="square">
+            <a:spAutoFit/>
+          </a:bodyPr>
+          <a:lstStyle/>
+          <a:p>
+            <a:pPr>
+              <a:spcAft>
+                <a:spcPts val="800"/>
+              </a:spcAft>
+            </a:pPr>
+            <a:r>
+              <a:rPr b="1" sz="1200">
+                <a:solidFill>
+                  <a:srgbClr val="06D6A0"/>
+                </a:solidFill>
+                <a:latin typeface="Arial"/>
+              </a:rPr>
+              <a:t>• 100% Synthetic Patient Data: </a:t>
+            </a:r>
+            <a:r>
+              <a:rPr sz="1200">
+                <a:solidFill>
+                  <a:srgbClr val="FFFFFF"/>
+                </a:solidFill>
+                <a:latin typeface="Arial"/>
+              </a:rPr>
+              <a:t>Synthea &amp; MIMIC-IV clinical schemas calibrated to ICMR-INDIAB epidemiological metrics.</a:t>
+            </a:r>
+          </a:p>
+          <a:p>
+            <a:pPr>
+              <a:spcAft>
+                <a:spcPts val="800"/>
+              </a:spcAft>
+            </a:pPr>
+            <a:r>
+              <a:rPr b="1" sz="1200">
+                <a:solidFill>
+                  <a:srgbClr val="06D6A0"/>
+                </a:solidFill>
+                <a:latin typeface="Arial"/>
+              </a:rPr>
+              <a:t>• Zero Real Patient PII: </a:t>
+            </a:r>
+            <a:r>
+              <a:rPr sz="1200">
+                <a:solidFill>
+                  <a:srgbClr val="FFFFFF"/>
+                </a:solidFill>
+                <a:latin typeface="Arial"/>
+              </a:rPr>
+              <a:t>Synthetic identities (IND-PT-XXXXX) eliminate privacy and re-identification risks.</a:t>
+            </a:r>
+          </a:p>
+          <a:p>
+            <a:pPr>
+              <a:spcAft>
+                <a:spcPts val="800"/>
+              </a:spcAft>
+            </a:pPr>
+            <a:r>
+              <a:rPr b="1" sz="1200">
+                <a:solidFill>
+                  <a:srgbClr val="06D6A0"/>
+                </a:solidFill>
+                <a:latin typeface="Arial"/>
+              </a:rPr>
+              <a:t>• Patient-Level Isolation: </a:t>
+            </a:r>
+            <a:r>
+              <a:rPr sz="1200">
+                <a:solidFill>
+                  <a:srgbClr val="FFFFFF"/>
+                </a:solidFill>
+                <a:latin typeface="Arial"/>
+              </a:rPr>
+              <a:t>Complete separation between train and test patients eliminates data memorization.</a:t>
+            </a:r>
+          </a:p>
+          <a:p>
+            <a:pPr>
+              <a:spcAft>
+                <a:spcPts val="800"/>
+              </a:spcAft>
+            </a:pPr>
+            <a:r>
+              <a:rPr b="1" sz="1200">
+                <a:solidFill>
+                  <a:srgbClr val="06D6A0"/>
+                </a:solidFill>
+                <a:latin typeface="Arial"/>
+              </a:rPr>
+              <a:t>• Cryptographic Audit Trail: </a:t>
+            </a:r>
+            <a:r>
+              <a:rPr sz="1200">
+                <a:solidFill>
+                  <a:srgbClr val="FFFFFF"/>
+                </a:solidFill>
+                <a:latin typeface="Arial"/>
+              </a:rPr>
+              <a:t>Every in-silico simulation and decision recommendation is timestamped and cryptographically logged.</a:t>
+            </a:r>
+          </a:p>
+        </p:txBody>
+      </p:sp>
+      <p:sp>
+        <p:nvSpPr>
+          <p:cNvPr id="9" name="Rounded Rectangle 8"/>
+          <p:cNvSpPr/>
+          <p:nvPr/>
+        </p:nvSpPr>
+        <p:spPr>
+          <a:xfrm>
+            <a:off x="6263640" y="1554480"/>
+            <a:ext cx="5166360" cy="4572000"/>
+          </a:xfrm>
+          <a:prstGeom prst="roundRect">
+            <a:avLst/>
+          </a:prstGeom>
+          <a:solidFill>
+            <a:srgbClr val="1C2541"/>
+          </a:solidFill>
+          <a:ln w="19050">
+            <a:solidFill>
+              <a:srgbClr val="3A506B"/>
+            </a:solidFill>
+          </a:ln>
+        </p:spPr>
+        <p:style>
+          <a:lnRef idx="1">
+            <a:schemeClr val="accent1"/>
+          </a:lnRef>
+          <a:fillRef idx="3">
+            <a:schemeClr val="accent1"/>
+          </a:fillRef>
+          <a:effectRef idx="2">
+            <a:schemeClr val="accent1"/>
+          </a:effectRef>
+          <a:fontRef idx="minor">
+            <a:schemeClr val="lt1"/>
+          </a:fontRef>
+        </p:style>
+        <p:txBody>
+          <a:bodyPr rtlCol="0" anchor="ctr"/>
+          <a:lstStyle/>
+          <a:p>
+            <a:pPr algn="ctr"/>
+          </a:p>
+        </p:txBody>
+      </p:sp>
+      <p:sp>
+        <p:nvSpPr>
+          <p:cNvPr id="10" name="TextBox 9"/>
+          <p:cNvSpPr txBox="1"/>
+          <p:nvPr/>
+        </p:nvSpPr>
+        <p:spPr>
+          <a:xfrm>
+            <a:off x="6492240" y="1719072"/>
+            <a:ext cx="4709160" cy="438912"/>
+          </a:xfrm>
+          <a:prstGeom prst="rect">
+            <a:avLst/>
+          </a:prstGeom>
+          <a:noFill/>
+        </p:spPr>
+        <p:txBody>
+          <a:bodyPr wrap="square">
+            <a:spAutoFit/>
+          </a:bodyPr>
+          <a:lstStyle/>
+          <a:p>
+            <a:pPr>
+              <a:defRPr sz="1550" b="1">
+                <a:solidFill>
+                  <a:srgbClr val="48CAE4"/>
+                </a:solidFill>
+                <a:latin typeface="Arial"/>
+              </a:defRPr>
+            </a:pPr>
+            <a:r>
+              <a:t>Socioeconomic Impact &amp; ABDM Roadmap</a:t>
+            </a:r>
+          </a:p>
+        </p:txBody>
+      </p:sp>
+      <p:sp>
+        <p:nvSpPr>
+          <p:cNvPr id="11" name="TextBox 10"/>
+          <p:cNvSpPr txBox="1"/>
+          <p:nvPr/>
+        </p:nvSpPr>
+        <p:spPr>
+          <a:xfrm>
+            <a:off x="6492240" y="2148840"/>
+            <a:ext cx="4709160" cy="3749039"/>
+          </a:xfrm>
+          <a:prstGeom prst="rect">
+            <a:avLst/>
+          </a:prstGeom>
+          <a:noFill/>
+        </p:spPr>
+        <p:txBody>
+          <a:bodyPr wrap="square">
+            <a:spAutoFit/>
+          </a:bodyPr>
+          <a:lstStyle/>
+          <a:p>
+            <a:pPr>
+              <a:spcAft>
+                <a:spcPts val="800"/>
+              </a:spcAft>
+            </a:pPr>
+            <a:r>
+              <a:rPr b="1" sz="1200">
+                <a:solidFill>
+                  <a:srgbClr val="48CAE4"/>
+                </a:solidFill>
+                <a:latin typeface="Arial"/>
+              </a:rPr>
+              <a:t>• Avoids Hospital Admissions: </a:t>
+            </a:r>
+            <a:r>
+              <a:rPr sz="1200">
+                <a:solidFill>
+                  <a:srgbClr val="FFFFFF"/>
+                </a:solidFill>
+                <a:latin typeface="Arial"/>
+              </a:rPr>
+              <a:t>Saves families ₹40,000 to ₹1,50,000 per DKA or severe hypoglycemia emergency hospital stay.</a:t>
+            </a:r>
+          </a:p>
+          <a:p>
+            <a:pPr>
+              <a:spcAft>
+                <a:spcPts val="800"/>
+              </a:spcAft>
+            </a:pPr>
+            <a:r>
+              <a:rPr b="1" sz="1200">
+                <a:solidFill>
+                  <a:srgbClr val="48CAE4"/>
+                </a:solidFill>
+                <a:latin typeface="Arial"/>
+              </a:rPr>
+              <a:t>• 37% Microvascular Risk Cut: </a:t>
+            </a:r>
+            <a:r>
+              <a:rPr sz="1200">
+                <a:solidFill>
+                  <a:srgbClr val="FFFFFF"/>
+                </a:solidFill>
+                <a:latin typeface="Arial"/>
+              </a:rPr>
+              <a:t>Blunting glucose spikes reduces HbA1c by 0.8-1.2%, cutting kidney disease and retinopathy risk by 37%.</a:t>
+            </a:r>
+          </a:p>
+          <a:p>
+            <a:pPr>
+              <a:spcAft>
+                <a:spcPts val="800"/>
+              </a:spcAft>
+            </a:pPr>
+            <a:r>
+              <a:rPr b="1" sz="1200">
+                <a:solidFill>
+                  <a:srgbClr val="48CAE4"/>
+                </a:solidFill>
+                <a:latin typeface="Arial"/>
+              </a:rPr>
+              <a:t>• ABDM Integration Roadmap: </a:t>
+            </a:r>
+            <a:r>
+              <a:rPr sz="1200">
+                <a:solidFill>
+                  <a:srgbClr val="FFFFFF"/>
+                </a:solidFill>
+                <a:latin typeface="Arial"/>
+              </a:rPr>
+              <a:t>Standardized FHIR APIs designed for Ayushman Bharat Digital Mission and e-Sanjeevani networks.</a:t>
+            </a:r>
+          </a:p>
+          <a:p>
+            <a:pPr>
+              <a:spcAft>
+                <a:spcPts val="800"/>
+              </a:spcAft>
+            </a:pPr>
+            <a:r>
+              <a:rPr b="1" sz="1200">
+                <a:solidFill>
+                  <a:srgbClr val="48CAE4"/>
+                </a:solidFill>
+                <a:latin typeface="Arial"/>
+              </a:rPr>
+              <a:t>• Edge AI Mobile App: </a:t>
+            </a:r>
+            <a:r>
+              <a:rPr sz="1200">
+                <a:solidFill>
+                  <a:srgbClr val="FFFFFF"/>
+                </a:solidFill>
+                <a:latin typeface="Arial"/>
+              </a:rPr>
+              <a:t>Proactive smartphone nudges ('Take a 15-min walk now') democratizing digital twin care across India.</a:t>
             </a:r>
           </a:p>
         </p:txBody>
